--- a/plotting/流程图/final.pptx
+++ b/plotting/流程图/final.pptx
@@ -14224,7 +14224,7 @@
                 <a:ea typeface="Times New Roman"/>
                 <a:cs typeface="Times New Roman"/>
               </a:rPr>
-              <a:t>8</a:t>
+              <a:t>9</a:t>
             </a:r>
             <a:r>
               <a:rPr sz="1958" dirty="0">
@@ -14741,51 +14741,6 @@
       </p:sp>
       <p:sp>
         <p:nvSpPr>
-          <p:cNvPr id="171" name="path-168">
-            <a:extLst>
-              <a:ext uri="{FF2B5EF4-FFF2-40B4-BE49-F238E27FC236}">
-                <a16:creationId xmlns:a16="http://schemas.microsoft.com/office/drawing/2014/main" id="{C6992C50-3C71-4AC3-83F4-2D86040D3176}"/>
-              </a:ext>
-            </a:extLst>
-          </p:cNvPr>
-          <p:cNvSpPr>
-            <a:spLocks noGrp="1"/>
-          </p:cNvSpPr>
-          <p:nvPr/>
-        </p:nvSpPr>
-        <p:spPr>
-          <a:xfrm>
-            <a:off x="11999886" y="7689420"/>
-            <a:ext cx="229084" cy="888"/>
-          </a:xfrm>
-          <a:custGeom>
-            <a:avLst/>
-            <a:gdLst/>
-            <a:ahLst/>
-            <a:cxnLst/>
-            <a:rect l="0" t="0" r="0" b="0"/>
-            <a:pathLst>
-              <a:path w="245745" h="953">
-                <a:moveTo>
-                  <a:pt x="0" y="0"/>
-                </a:moveTo>
-                <a:lnTo>
-                  <a:pt x="245745" y="0"/>
-                </a:lnTo>
-              </a:path>
-            </a:pathLst>
-          </a:custGeom>
-          <a:noFill/>
-          <a:ln w="14288">
-            <a:solidFill>
-              <a:srgbClr val="203344"/>
-            </a:solidFill>
-            <a:prstDash val="solid"/>
-          </a:ln>
-        </p:spPr>
-      </p:sp>
-      <p:sp>
-        <p:nvSpPr>
           <p:cNvPr id="172" name="path-169">
             <a:extLst>
               <a:ext uri="{FF2B5EF4-FFF2-40B4-BE49-F238E27FC236}">
@@ -14800,7 +14755,7 @@
         </p:nvSpPr>
         <p:spPr>
           <a:xfrm>
-            <a:off x="12212988" y="7657454"/>
+            <a:off x="12144892" y="7618542"/>
             <a:ext cx="79913" cy="63931"/>
           </a:xfrm>
           <a:custGeom>
@@ -15943,21 +15898,1209 @@
       </p:sp>
       <p:sp>
         <p:nvSpPr>
-          <p:cNvPr id="206" name="path-203">
-            <a:extLst>
-              <a:ext uri="{FF2B5EF4-FFF2-40B4-BE49-F238E27FC236}">
-                <a16:creationId xmlns:a16="http://schemas.microsoft.com/office/drawing/2014/main" id="{024FA99A-F20E-4E3B-AC34-8A217196F856}"/>
-              </a:ext>
-            </a:extLst>
-          </p:cNvPr>
-          <p:cNvSpPr>
-            <a:spLocks noGrp="1"/>
-          </p:cNvSpPr>
-          <p:nvPr/>
-        </p:nvSpPr>
-        <p:spPr>
-          <a:xfrm>
-            <a:off x="13607028" y="6348655"/>
+          <p:cNvPr id="207" name="path-204">
+            <a:extLst>
+              <a:ext uri="{FF2B5EF4-FFF2-40B4-BE49-F238E27FC236}">
+                <a16:creationId xmlns:a16="http://schemas.microsoft.com/office/drawing/2014/main" id="{0707ABB8-DB8F-487A-88C0-1E2ED9983FEA}"/>
+              </a:ext>
+            </a:extLst>
+          </p:cNvPr>
+          <p:cNvSpPr>
+            <a:spLocks noGrp="1"/>
+          </p:cNvSpPr>
+          <p:nvPr/>
+        </p:nvSpPr>
+        <p:spPr>
+          <a:xfrm>
+            <a:off x="13820129" y="6348655"/>
+            <a:ext cx="168706" cy="168706"/>
+          </a:xfrm>
+          <a:custGeom>
+            <a:avLst/>
+            <a:gdLst/>
+            <a:ahLst/>
+            <a:cxnLst/>
+            <a:rect l="0" t="0" r="0" b="0"/>
+            <a:pathLst>
+              <a:path w="180975" h="180975">
+                <a:moveTo>
+                  <a:pt x="0" y="0"/>
+                </a:moveTo>
+                <a:lnTo>
+                  <a:pt x="180975" y="0"/>
+                </a:lnTo>
+                <a:lnTo>
+                  <a:pt x="180975" y="180975"/>
+                </a:lnTo>
+                <a:lnTo>
+                  <a:pt x="0" y="180975"/>
+                </a:lnTo>
+                <a:close/>
+              </a:path>
+            </a:pathLst>
+          </a:custGeom>
+          <a:solidFill>
+            <a:srgbClr val="D1E0E8"/>
+          </a:solidFill>
+          <a:ln w="5239">
+            <a:solidFill>
+              <a:srgbClr val="FFFFFF"/>
+            </a:solidFill>
+            <a:prstDash val="solid"/>
+          </a:ln>
+        </p:spPr>
+      </p:sp>
+      <p:sp>
+        <p:nvSpPr>
+          <p:cNvPr id="208" name="path-205">
+            <a:extLst>
+              <a:ext uri="{FF2B5EF4-FFF2-40B4-BE49-F238E27FC236}">
+                <a16:creationId xmlns:a16="http://schemas.microsoft.com/office/drawing/2014/main" id="{FB3C05F5-A496-4DAD-A7C0-41732FDA33AA}"/>
+              </a:ext>
+            </a:extLst>
+          </p:cNvPr>
+          <p:cNvSpPr>
+            <a:spLocks noGrp="1"/>
+          </p:cNvSpPr>
+          <p:nvPr/>
+        </p:nvSpPr>
+        <p:spPr>
+          <a:xfrm>
+            <a:off x="14033231" y="6348655"/>
+            <a:ext cx="168706" cy="168706"/>
+          </a:xfrm>
+          <a:custGeom>
+            <a:avLst/>
+            <a:gdLst/>
+            <a:ahLst/>
+            <a:cxnLst/>
+            <a:rect l="0" t="0" r="0" b="0"/>
+            <a:pathLst>
+              <a:path w="180975" h="180975">
+                <a:moveTo>
+                  <a:pt x="0" y="0"/>
+                </a:moveTo>
+                <a:lnTo>
+                  <a:pt x="180975" y="0"/>
+                </a:lnTo>
+                <a:lnTo>
+                  <a:pt x="180975" y="180975"/>
+                </a:lnTo>
+                <a:lnTo>
+                  <a:pt x="0" y="180975"/>
+                </a:lnTo>
+                <a:close/>
+              </a:path>
+            </a:pathLst>
+          </a:custGeom>
+          <a:solidFill>
+            <a:srgbClr val="CEDDE6"/>
+          </a:solidFill>
+          <a:ln w="5239">
+            <a:solidFill>
+              <a:srgbClr val="FFFFFF"/>
+            </a:solidFill>
+            <a:prstDash val="solid"/>
+          </a:ln>
+        </p:spPr>
+      </p:sp>
+      <p:sp>
+        <p:nvSpPr>
+          <p:cNvPr id="209" name="path-206">
+            <a:extLst>
+              <a:ext uri="{FF2B5EF4-FFF2-40B4-BE49-F238E27FC236}">
+                <a16:creationId xmlns:a16="http://schemas.microsoft.com/office/drawing/2014/main" id="{4FF21ACA-5F35-4F6B-8986-6EAE7DA890C3}"/>
+              </a:ext>
+            </a:extLst>
+          </p:cNvPr>
+          <p:cNvSpPr>
+            <a:spLocks noGrp="1"/>
+          </p:cNvSpPr>
+          <p:nvPr/>
+        </p:nvSpPr>
+        <p:spPr>
+          <a:xfrm>
+            <a:off x="14246333" y="6348655"/>
+            <a:ext cx="168706" cy="168706"/>
+          </a:xfrm>
+          <a:custGeom>
+            <a:avLst/>
+            <a:gdLst/>
+            <a:ahLst/>
+            <a:cxnLst/>
+            <a:rect l="0" t="0" r="0" b="0"/>
+            <a:pathLst>
+              <a:path w="180975" h="180975">
+                <a:moveTo>
+                  <a:pt x="0" y="0"/>
+                </a:moveTo>
+                <a:lnTo>
+                  <a:pt x="180975" y="0"/>
+                </a:lnTo>
+                <a:lnTo>
+                  <a:pt x="180975" y="180975"/>
+                </a:lnTo>
+                <a:lnTo>
+                  <a:pt x="0" y="180975"/>
+                </a:lnTo>
+                <a:close/>
+              </a:path>
+            </a:pathLst>
+          </a:custGeom>
+          <a:solidFill>
+            <a:srgbClr val="9FBBCC"/>
+          </a:solidFill>
+          <a:ln w="5239">
+            <a:solidFill>
+              <a:srgbClr val="FFFFFF"/>
+            </a:solidFill>
+            <a:prstDash val="solid"/>
+          </a:ln>
+        </p:spPr>
+      </p:sp>
+      <p:sp>
+        <p:nvSpPr>
+          <p:cNvPr id="210" name="path-207">
+            <a:extLst>
+              <a:ext uri="{FF2B5EF4-FFF2-40B4-BE49-F238E27FC236}">
+                <a16:creationId xmlns:a16="http://schemas.microsoft.com/office/drawing/2014/main" id="{C4F1E675-60D7-4D50-8064-90587D0B9620}"/>
+              </a:ext>
+            </a:extLst>
+          </p:cNvPr>
+          <p:cNvSpPr>
+            <a:spLocks noGrp="1"/>
+          </p:cNvSpPr>
+          <p:nvPr/>
+        </p:nvSpPr>
+        <p:spPr>
+          <a:xfrm>
+            <a:off x="14459435" y="6348655"/>
+            <a:ext cx="168706" cy="168706"/>
+          </a:xfrm>
+          <a:custGeom>
+            <a:avLst/>
+            <a:gdLst/>
+            <a:ahLst/>
+            <a:cxnLst/>
+            <a:rect l="0" t="0" r="0" b="0"/>
+            <a:pathLst>
+              <a:path w="180975" h="180975">
+                <a:moveTo>
+                  <a:pt x="0" y="0"/>
+                </a:moveTo>
+                <a:lnTo>
+                  <a:pt x="180975" y="0"/>
+                </a:lnTo>
+                <a:lnTo>
+                  <a:pt x="180975" y="180975"/>
+                </a:lnTo>
+                <a:lnTo>
+                  <a:pt x="0" y="180975"/>
+                </a:lnTo>
+                <a:close/>
+              </a:path>
+            </a:pathLst>
+          </a:custGeom>
+          <a:solidFill>
+            <a:srgbClr val="497B9C"/>
+          </a:solidFill>
+          <a:ln w="5239">
+            <a:solidFill>
+              <a:srgbClr val="FFFFFF"/>
+            </a:solidFill>
+            <a:prstDash val="solid"/>
+          </a:ln>
+        </p:spPr>
+      </p:sp>
+      <p:sp>
+        <p:nvSpPr>
+          <p:cNvPr id="211" name="path-208">
+            <a:extLst>
+              <a:ext uri="{FF2B5EF4-FFF2-40B4-BE49-F238E27FC236}">
+                <a16:creationId xmlns:a16="http://schemas.microsoft.com/office/drawing/2014/main" id="{EB7AA31C-ED5B-495D-B004-A1BCA2E7C087}"/>
+              </a:ext>
+            </a:extLst>
+          </p:cNvPr>
+          <p:cNvSpPr>
+            <a:spLocks noGrp="1"/>
+          </p:cNvSpPr>
+          <p:nvPr/>
+        </p:nvSpPr>
+        <p:spPr>
+          <a:xfrm>
+            <a:off x="14672536" y="6348655"/>
+            <a:ext cx="168706" cy="168706"/>
+          </a:xfrm>
+          <a:custGeom>
+            <a:avLst/>
+            <a:gdLst/>
+            <a:ahLst/>
+            <a:cxnLst/>
+            <a:rect l="0" t="0" r="0" b="0"/>
+            <a:pathLst>
+              <a:path w="180975" h="180975">
+                <a:moveTo>
+                  <a:pt x="0" y="0"/>
+                </a:moveTo>
+                <a:lnTo>
+                  <a:pt x="180975" y="0"/>
+                </a:lnTo>
+                <a:lnTo>
+                  <a:pt x="180975" y="180975"/>
+                </a:lnTo>
+                <a:lnTo>
+                  <a:pt x="0" y="180975"/>
+                </a:lnTo>
+                <a:close/>
+              </a:path>
+            </a:pathLst>
+          </a:custGeom>
+          <a:solidFill>
+            <a:srgbClr val="3F7496"/>
+          </a:solidFill>
+          <a:ln w="5239">
+            <a:solidFill>
+              <a:srgbClr val="FFFFFF"/>
+            </a:solidFill>
+            <a:prstDash val="solid"/>
+          </a:ln>
+        </p:spPr>
+      </p:sp>
+      <p:sp>
+        <p:nvSpPr>
+          <p:cNvPr id="212" name="path-209">
+            <a:extLst>
+              <a:ext uri="{FF2B5EF4-FFF2-40B4-BE49-F238E27FC236}">
+                <a16:creationId xmlns:a16="http://schemas.microsoft.com/office/drawing/2014/main" id="{431EECBF-2B48-4CEA-AB71-56D6F6197C3D}"/>
+              </a:ext>
+            </a:extLst>
+          </p:cNvPr>
+          <p:cNvSpPr>
+            <a:spLocks noGrp="1"/>
+          </p:cNvSpPr>
+          <p:nvPr/>
+        </p:nvSpPr>
+        <p:spPr>
+          <a:xfrm>
+            <a:off x="14885638" y="6348655"/>
+            <a:ext cx="168706" cy="168706"/>
+          </a:xfrm>
+          <a:custGeom>
+            <a:avLst/>
+            <a:gdLst/>
+            <a:ahLst/>
+            <a:cxnLst/>
+            <a:rect l="0" t="0" r="0" b="0"/>
+            <a:pathLst>
+              <a:path w="180975" h="180975">
+                <a:moveTo>
+                  <a:pt x="0" y="0"/>
+                </a:moveTo>
+                <a:lnTo>
+                  <a:pt x="180975" y="0"/>
+                </a:lnTo>
+                <a:lnTo>
+                  <a:pt x="180975" y="180975"/>
+                </a:lnTo>
+                <a:lnTo>
+                  <a:pt x="0" y="180975"/>
+                </a:lnTo>
+                <a:close/>
+              </a:path>
+            </a:pathLst>
+          </a:custGeom>
+          <a:solidFill>
+            <a:srgbClr val="91B0C4"/>
+          </a:solidFill>
+          <a:ln w="5239">
+            <a:solidFill>
+              <a:srgbClr val="FFFFFF"/>
+            </a:solidFill>
+            <a:prstDash val="solid"/>
+          </a:ln>
+        </p:spPr>
+      </p:sp>
+      <p:sp>
+        <p:nvSpPr>
+          <p:cNvPr id="213" name="path-210">
+            <a:extLst>
+              <a:ext uri="{FF2B5EF4-FFF2-40B4-BE49-F238E27FC236}">
+                <a16:creationId xmlns:a16="http://schemas.microsoft.com/office/drawing/2014/main" id="{0850F9A1-1F1D-4DD2-8090-08DB10C8F8FD}"/>
+              </a:ext>
+            </a:extLst>
+          </p:cNvPr>
+          <p:cNvSpPr>
+            <a:spLocks noGrp="1"/>
+          </p:cNvSpPr>
+          <p:nvPr/>
+        </p:nvSpPr>
+        <p:spPr>
+          <a:xfrm>
+            <a:off x="15098740" y="6348655"/>
+            <a:ext cx="168706" cy="168706"/>
+          </a:xfrm>
+          <a:custGeom>
+            <a:avLst/>
+            <a:gdLst/>
+            <a:ahLst/>
+            <a:cxnLst/>
+            <a:rect l="0" t="0" r="0" b="0"/>
+            <a:pathLst>
+              <a:path w="180975" h="180975">
+                <a:moveTo>
+                  <a:pt x="0" y="0"/>
+                </a:moveTo>
+                <a:lnTo>
+                  <a:pt x="180975" y="0"/>
+                </a:lnTo>
+                <a:lnTo>
+                  <a:pt x="180975" y="180975"/>
+                </a:lnTo>
+                <a:lnTo>
+                  <a:pt x="0" y="180975"/>
+                </a:lnTo>
+                <a:close/>
+              </a:path>
+            </a:pathLst>
+          </a:custGeom>
+          <a:solidFill>
+            <a:srgbClr val="CBDBE5"/>
+          </a:solidFill>
+          <a:ln w="5239">
+            <a:solidFill>
+              <a:srgbClr val="FFFFFF"/>
+            </a:solidFill>
+            <a:prstDash val="solid"/>
+          </a:ln>
+        </p:spPr>
+      </p:sp>
+      <p:sp>
+        <p:nvSpPr>
+          <p:cNvPr id="214" name="path-211">
+            <a:extLst>
+              <a:ext uri="{FF2B5EF4-FFF2-40B4-BE49-F238E27FC236}">
+                <a16:creationId xmlns:a16="http://schemas.microsoft.com/office/drawing/2014/main" id="{903ABD25-E7F1-4D39-9C8B-C48D12462F17}"/>
+              </a:ext>
+            </a:extLst>
+          </p:cNvPr>
+          <p:cNvSpPr>
+            <a:spLocks noGrp="1"/>
+          </p:cNvSpPr>
+          <p:nvPr/>
+        </p:nvSpPr>
+        <p:spPr>
+          <a:xfrm>
+            <a:off x="15311841" y="6348655"/>
+            <a:ext cx="168706" cy="168706"/>
+          </a:xfrm>
+          <a:custGeom>
+            <a:avLst/>
+            <a:gdLst/>
+            <a:ahLst/>
+            <a:cxnLst/>
+            <a:rect l="0" t="0" r="0" b="0"/>
+            <a:pathLst>
+              <a:path w="180975" h="180975">
+                <a:moveTo>
+                  <a:pt x="0" y="0"/>
+                </a:moveTo>
+                <a:lnTo>
+                  <a:pt x="180975" y="0"/>
+                </a:lnTo>
+                <a:lnTo>
+                  <a:pt x="180975" y="180975"/>
+                </a:lnTo>
+                <a:lnTo>
+                  <a:pt x="0" y="180975"/>
+                </a:lnTo>
+                <a:close/>
+              </a:path>
+            </a:pathLst>
+          </a:custGeom>
+          <a:solidFill>
+            <a:srgbClr val="D1E0E8"/>
+          </a:solidFill>
+          <a:ln w="5239">
+            <a:solidFill>
+              <a:srgbClr val="FFFFFF"/>
+            </a:solidFill>
+            <a:prstDash val="solid"/>
+          </a:ln>
+        </p:spPr>
+      </p:sp>
+      <p:sp>
+        <p:nvSpPr>
+          <p:cNvPr id="215" name="path-212">
+            <a:extLst>
+              <a:ext uri="{FF2B5EF4-FFF2-40B4-BE49-F238E27FC236}">
+                <a16:creationId xmlns:a16="http://schemas.microsoft.com/office/drawing/2014/main" id="{2E25A650-7FAB-4ED1-88A7-248475CCB60B}"/>
+              </a:ext>
+            </a:extLst>
+          </p:cNvPr>
+          <p:cNvSpPr>
+            <a:spLocks noGrp="1"/>
+          </p:cNvSpPr>
+          <p:nvPr/>
+        </p:nvSpPr>
+        <p:spPr>
+          <a:xfrm>
+            <a:off x="15524943" y="6348655"/>
+            <a:ext cx="168706" cy="168706"/>
+          </a:xfrm>
+          <a:custGeom>
+            <a:avLst/>
+            <a:gdLst/>
+            <a:ahLst/>
+            <a:cxnLst/>
+            <a:rect l="0" t="0" r="0" b="0"/>
+            <a:pathLst>
+              <a:path w="180975" h="180975">
+                <a:moveTo>
+                  <a:pt x="0" y="0"/>
+                </a:moveTo>
+                <a:lnTo>
+                  <a:pt x="180975" y="0"/>
+                </a:lnTo>
+                <a:lnTo>
+                  <a:pt x="180975" y="180975"/>
+                </a:lnTo>
+                <a:lnTo>
+                  <a:pt x="0" y="180975"/>
+                </a:lnTo>
+                <a:close/>
+              </a:path>
+            </a:pathLst>
+          </a:custGeom>
+          <a:solidFill>
+            <a:srgbClr val="CCDCE6"/>
+          </a:solidFill>
+          <a:ln w="5239">
+            <a:solidFill>
+              <a:srgbClr val="FFFFFF"/>
+            </a:solidFill>
+            <a:prstDash val="solid"/>
+          </a:ln>
+        </p:spPr>
+      </p:sp>
+      <p:sp>
+        <p:nvSpPr>
+          <p:cNvPr id="216" name="path-213">
+            <a:extLst>
+              <a:ext uri="{FF2B5EF4-FFF2-40B4-BE49-F238E27FC236}">
+                <a16:creationId xmlns:a16="http://schemas.microsoft.com/office/drawing/2014/main" id="{756439CF-CB40-458F-832F-798FFD943376}"/>
+              </a:ext>
+            </a:extLst>
+          </p:cNvPr>
+          <p:cNvSpPr>
+            <a:spLocks noGrp="1"/>
+          </p:cNvSpPr>
+          <p:nvPr/>
+        </p:nvSpPr>
+        <p:spPr>
+          <a:xfrm>
+            <a:off x="15738045" y="6348655"/>
+            <a:ext cx="168706" cy="168706"/>
+          </a:xfrm>
+          <a:custGeom>
+            <a:avLst/>
+            <a:gdLst/>
+            <a:ahLst/>
+            <a:cxnLst/>
+            <a:rect l="0" t="0" r="0" b="0"/>
+            <a:pathLst>
+              <a:path w="180975" h="180975">
+                <a:moveTo>
+                  <a:pt x="0" y="0"/>
+                </a:moveTo>
+                <a:lnTo>
+                  <a:pt x="180975" y="0"/>
+                </a:lnTo>
+                <a:lnTo>
+                  <a:pt x="180975" y="180975"/>
+                </a:lnTo>
+                <a:lnTo>
+                  <a:pt x="0" y="180975"/>
+                </a:lnTo>
+                <a:close/>
+              </a:path>
+            </a:pathLst>
+          </a:custGeom>
+          <a:solidFill>
+            <a:srgbClr val="97B5C8"/>
+          </a:solidFill>
+          <a:ln w="5239">
+            <a:solidFill>
+              <a:srgbClr val="FFFFFF"/>
+            </a:solidFill>
+            <a:prstDash val="solid"/>
+          </a:ln>
+        </p:spPr>
+      </p:sp>
+      <p:sp>
+        <p:nvSpPr>
+          <p:cNvPr id="217" name="path-214">
+            <a:extLst>
+              <a:ext uri="{FF2B5EF4-FFF2-40B4-BE49-F238E27FC236}">
+                <a16:creationId xmlns:a16="http://schemas.microsoft.com/office/drawing/2014/main" id="{C94F6480-92ED-4D57-9B49-E301AFEF0B14}"/>
+              </a:ext>
+            </a:extLst>
+          </p:cNvPr>
+          <p:cNvSpPr>
+            <a:spLocks noGrp="1"/>
+          </p:cNvSpPr>
+          <p:nvPr/>
+        </p:nvSpPr>
+        <p:spPr>
+          <a:xfrm>
+            <a:off x="13393926" y="6561757"/>
+            <a:ext cx="168706" cy="168706"/>
+          </a:xfrm>
+          <a:custGeom>
+            <a:avLst/>
+            <a:gdLst/>
+            <a:ahLst/>
+            <a:cxnLst/>
+            <a:rect l="0" t="0" r="0" b="0"/>
+            <a:pathLst>
+              <a:path w="180975" h="180975">
+                <a:moveTo>
+                  <a:pt x="0" y="0"/>
+                </a:moveTo>
+                <a:lnTo>
+                  <a:pt x="180975" y="0"/>
+                </a:lnTo>
+                <a:lnTo>
+                  <a:pt x="180975" y="180975"/>
+                </a:lnTo>
+                <a:lnTo>
+                  <a:pt x="0" y="180975"/>
+                </a:lnTo>
+                <a:close/>
+              </a:path>
+            </a:pathLst>
+          </a:custGeom>
+          <a:solidFill>
+            <a:srgbClr val="B8CDDA"/>
+          </a:solidFill>
+          <a:ln w="5239">
+            <a:solidFill>
+              <a:srgbClr val="FFFFFF"/>
+            </a:solidFill>
+            <a:prstDash val="solid"/>
+          </a:ln>
+        </p:spPr>
+      </p:sp>
+      <p:sp>
+        <p:nvSpPr>
+          <p:cNvPr id="219" name="path-216">
+            <a:extLst>
+              <a:ext uri="{FF2B5EF4-FFF2-40B4-BE49-F238E27FC236}">
+                <a16:creationId xmlns:a16="http://schemas.microsoft.com/office/drawing/2014/main" id="{0C081246-D774-4CC8-AA2B-BFCB2047DA64}"/>
+              </a:ext>
+            </a:extLst>
+          </p:cNvPr>
+          <p:cNvSpPr>
+            <a:spLocks noGrp="1"/>
+          </p:cNvSpPr>
+          <p:nvPr/>
+        </p:nvSpPr>
+        <p:spPr>
+          <a:xfrm>
+            <a:off x="13820129" y="6561757"/>
+            <a:ext cx="168706" cy="168706"/>
+          </a:xfrm>
+          <a:custGeom>
+            <a:avLst/>
+            <a:gdLst/>
+            <a:ahLst/>
+            <a:cxnLst/>
+            <a:rect l="0" t="0" r="0" b="0"/>
+            <a:pathLst>
+              <a:path w="180975" h="180975">
+                <a:moveTo>
+                  <a:pt x="0" y="0"/>
+                </a:moveTo>
+                <a:lnTo>
+                  <a:pt x="180975" y="0"/>
+                </a:lnTo>
+                <a:lnTo>
+                  <a:pt x="180975" y="180975"/>
+                </a:lnTo>
+                <a:lnTo>
+                  <a:pt x="0" y="180975"/>
+                </a:lnTo>
+                <a:close/>
+              </a:path>
+            </a:pathLst>
+          </a:custGeom>
+          <a:solidFill>
+            <a:srgbClr val="D1DFE8"/>
+          </a:solidFill>
+          <a:ln w="5239">
+            <a:solidFill>
+              <a:srgbClr val="FFFFFF"/>
+            </a:solidFill>
+            <a:prstDash val="solid"/>
+          </a:ln>
+        </p:spPr>
+      </p:sp>
+      <p:sp>
+        <p:nvSpPr>
+          <p:cNvPr id="220" name="path-217">
+            <a:extLst>
+              <a:ext uri="{FF2B5EF4-FFF2-40B4-BE49-F238E27FC236}">
+                <a16:creationId xmlns:a16="http://schemas.microsoft.com/office/drawing/2014/main" id="{AD69E60A-9C77-4B3A-82CB-6509EEF44847}"/>
+              </a:ext>
+            </a:extLst>
+          </p:cNvPr>
+          <p:cNvSpPr>
+            <a:spLocks noGrp="1"/>
+          </p:cNvSpPr>
+          <p:nvPr/>
+        </p:nvSpPr>
+        <p:spPr>
+          <a:xfrm>
+            <a:off x="14033231" y="6561757"/>
+            <a:ext cx="168706" cy="168706"/>
+          </a:xfrm>
+          <a:custGeom>
+            <a:avLst/>
+            <a:gdLst/>
+            <a:ahLst/>
+            <a:cxnLst/>
+            <a:rect l="0" t="0" r="0" b="0"/>
+            <a:pathLst>
+              <a:path w="180975" h="180975">
+                <a:moveTo>
+                  <a:pt x="0" y="0"/>
+                </a:moveTo>
+                <a:lnTo>
+                  <a:pt x="180975" y="0"/>
+                </a:lnTo>
+                <a:lnTo>
+                  <a:pt x="180975" y="180975"/>
+                </a:lnTo>
+                <a:lnTo>
+                  <a:pt x="0" y="180975"/>
+                </a:lnTo>
+                <a:close/>
+              </a:path>
+            </a:pathLst>
+          </a:custGeom>
+          <a:solidFill>
+            <a:srgbClr val="B9CEDB"/>
+          </a:solidFill>
+          <a:ln w="5239">
+            <a:solidFill>
+              <a:srgbClr val="FFFFFF"/>
+            </a:solidFill>
+            <a:prstDash val="solid"/>
+          </a:ln>
+        </p:spPr>
+      </p:sp>
+      <p:sp>
+        <p:nvSpPr>
+          <p:cNvPr id="221" name="path-218">
+            <a:extLst>
+              <a:ext uri="{FF2B5EF4-FFF2-40B4-BE49-F238E27FC236}">
+                <a16:creationId xmlns:a16="http://schemas.microsoft.com/office/drawing/2014/main" id="{DA44EA3F-1FD3-4D9B-91AE-FDCEBB3A81B4}"/>
+              </a:ext>
+            </a:extLst>
+          </p:cNvPr>
+          <p:cNvSpPr>
+            <a:spLocks noGrp="1"/>
+          </p:cNvSpPr>
+          <p:nvPr/>
+        </p:nvSpPr>
+        <p:spPr>
+          <a:xfrm>
+            <a:off x="14246333" y="6561757"/>
+            <a:ext cx="168706" cy="168706"/>
+          </a:xfrm>
+          <a:custGeom>
+            <a:avLst/>
+            <a:gdLst/>
+            <a:ahLst/>
+            <a:cxnLst/>
+            <a:rect l="0" t="0" r="0" b="0"/>
+            <a:pathLst>
+              <a:path w="180975" h="180975">
+                <a:moveTo>
+                  <a:pt x="0" y="0"/>
+                </a:moveTo>
+                <a:lnTo>
+                  <a:pt x="180975" y="0"/>
+                </a:lnTo>
+                <a:lnTo>
+                  <a:pt x="180975" y="180975"/>
+                </a:lnTo>
+                <a:lnTo>
+                  <a:pt x="0" y="180975"/>
+                </a:lnTo>
+                <a:close/>
+              </a:path>
+            </a:pathLst>
+          </a:custGeom>
+          <a:solidFill>
+            <a:srgbClr val="6792AD"/>
+          </a:solidFill>
+          <a:ln w="5239">
+            <a:solidFill>
+              <a:srgbClr val="FFFFFF"/>
+            </a:solidFill>
+            <a:prstDash val="solid"/>
+          </a:ln>
+        </p:spPr>
+      </p:sp>
+      <p:sp>
+        <p:nvSpPr>
+          <p:cNvPr id="222" name="path-219">
+            <a:extLst>
+              <a:ext uri="{FF2B5EF4-FFF2-40B4-BE49-F238E27FC236}">
+                <a16:creationId xmlns:a16="http://schemas.microsoft.com/office/drawing/2014/main" id="{9B9960B2-2C0B-4B26-A4C8-3FF4AF486CE7}"/>
+              </a:ext>
+            </a:extLst>
+          </p:cNvPr>
+          <p:cNvSpPr>
+            <a:spLocks noGrp="1"/>
+          </p:cNvSpPr>
+          <p:nvPr/>
+        </p:nvSpPr>
+        <p:spPr>
+          <a:xfrm>
+            <a:off x="14459435" y="6561757"/>
+            <a:ext cx="168706" cy="168706"/>
+          </a:xfrm>
+          <a:custGeom>
+            <a:avLst/>
+            <a:gdLst/>
+            <a:ahLst/>
+            <a:cxnLst/>
+            <a:rect l="0" t="0" r="0" b="0"/>
+            <a:pathLst>
+              <a:path w="180975" h="180975">
+                <a:moveTo>
+                  <a:pt x="0" y="0"/>
+                </a:moveTo>
+                <a:lnTo>
+                  <a:pt x="180975" y="0"/>
+                </a:lnTo>
+                <a:lnTo>
+                  <a:pt x="180975" y="180975"/>
+                </a:lnTo>
+                <a:lnTo>
+                  <a:pt x="0" y="180975"/>
+                </a:lnTo>
+                <a:close/>
+              </a:path>
+            </a:pathLst>
+          </a:custGeom>
+          <a:solidFill>
+            <a:srgbClr val="346C90"/>
+          </a:solidFill>
+          <a:ln w="5239">
+            <a:solidFill>
+              <a:srgbClr val="FFFFFF"/>
+            </a:solidFill>
+            <a:prstDash val="solid"/>
+          </a:ln>
+        </p:spPr>
+      </p:sp>
+      <p:sp>
+        <p:nvSpPr>
+          <p:cNvPr id="223" name="path-220">
+            <a:extLst>
+              <a:ext uri="{FF2B5EF4-FFF2-40B4-BE49-F238E27FC236}">
+                <a16:creationId xmlns:a16="http://schemas.microsoft.com/office/drawing/2014/main" id="{D191754F-60F3-44BE-ACB8-0098E6E5DFC0}"/>
+              </a:ext>
+            </a:extLst>
+          </p:cNvPr>
+          <p:cNvSpPr>
+            <a:spLocks noGrp="1"/>
+          </p:cNvSpPr>
+          <p:nvPr/>
+        </p:nvSpPr>
+        <p:spPr>
+          <a:xfrm>
+            <a:off x="14672536" y="6561757"/>
+            <a:ext cx="168706" cy="168706"/>
+          </a:xfrm>
+          <a:custGeom>
+            <a:avLst/>
+            <a:gdLst/>
+            <a:ahLst/>
+            <a:cxnLst/>
+            <a:rect l="0" t="0" r="0" b="0"/>
+            <a:pathLst>
+              <a:path w="180975" h="180975">
+                <a:moveTo>
+                  <a:pt x="0" y="0"/>
+                </a:moveTo>
+                <a:lnTo>
+                  <a:pt x="180975" y="0"/>
+                </a:lnTo>
+                <a:lnTo>
+                  <a:pt x="180975" y="180975"/>
+                </a:lnTo>
+                <a:lnTo>
+                  <a:pt x="0" y="180975"/>
+                </a:lnTo>
+                <a:close/>
+              </a:path>
+            </a:pathLst>
+          </a:custGeom>
+          <a:solidFill>
+            <a:srgbClr val="6F97B1"/>
+          </a:solidFill>
+          <a:ln w="5239">
+            <a:solidFill>
+              <a:srgbClr val="FFFFFF"/>
+            </a:solidFill>
+            <a:prstDash val="solid"/>
+          </a:ln>
+        </p:spPr>
+      </p:sp>
+      <p:sp>
+        <p:nvSpPr>
+          <p:cNvPr id="224" name="path-221">
+            <a:extLst>
+              <a:ext uri="{FF2B5EF4-FFF2-40B4-BE49-F238E27FC236}">
+                <a16:creationId xmlns:a16="http://schemas.microsoft.com/office/drawing/2014/main" id="{A8A347D8-C89E-4EA8-8030-1E9A994354CD}"/>
+              </a:ext>
+            </a:extLst>
+          </p:cNvPr>
+          <p:cNvSpPr>
+            <a:spLocks noGrp="1"/>
+          </p:cNvSpPr>
+          <p:nvPr/>
+        </p:nvSpPr>
+        <p:spPr>
+          <a:xfrm>
+            <a:off x="14885638" y="6561757"/>
+            <a:ext cx="168706" cy="168706"/>
+          </a:xfrm>
+          <a:custGeom>
+            <a:avLst/>
+            <a:gdLst/>
+            <a:ahLst/>
+            <a:cxnLst/>
+            <a:rect l="0" t="0" r="0" b="0"/>
+            <a:pathLst>
+              <a:path w="180975" h="180975">
+                <a:moveTo>
+                  <a:pt x="0" y="0"/>
+                </a:moveTo>
+                <a:lnTo>
+                  <a:pt x="180975" y="0"/>
+                </a:lnTo>
+                <a:lnTo>
+                  <a:pt x="180975" y="180975"/>
+                </a:lnTo>
+                <a:lnTo>
+                  <a:pt x="0" y="180975"/>
+                </a:lnTo>
+                <a:close/>
+              </a:path>
+            </a:pathLst>
+          </a:custGeom>
+          <a:solidFill>
+            <a:srgbClr val="BDD1DD"/>
+          </a:solidFill>
+          <a:ln w="5239">
+            <a:solidFill>
+              <a:srgbClr val="FFFFFF"/>
+            </a:solidFill>
+            <a:prstDash val="solid"/>
+          </a:ln>
+        </p:spPr>
+      </p:sp>
+      <p:sp>
+        <p:nvSpPr>
+          <p:cNvPr id="225" name="path-222">
+            <a:extLst>
+              <a:ext uri="{FF2B5EF4-FFF2-40B4-BE49-F238E27FC236}">
+                <a16:creationId xmlns:a16="http://schemas.microsoft.com/office/drawing/2014/main" id="{B9562C8E-0078-4E32-B846-6F2518024D04}"/>
+              </a:ext>
+            </a:extLst>
+          </p:cNvPr>
+          <p:cNvSpPr>
+            <a:spLocks noGrp="1"/>
+          </p:cNvSpPr>
+          <p:nvPr/>
+        </p:nvSpPr>
+        <p:spPr>
+          <a:xfrm>
+            <a:off x="15098740" y="6561757"/>
+            <a:ext cx="168706" cy="168706"/>
+          </a:xfrm>
+          <a:custGeom>
+            <a:avLst/>
+            <a:gdLst/>
+            <a:ahLst/>
+            <a:cxnLst/>
+            <a:rect l="0" t="0" r="0" b="0"/>
+            <a:pathLst>
+              <a:path w="180975" h="180975">
+                <a:moveTo>
+                  <a:pt x="0" y="0"/>
+                </a:moveTo>
+                <a:lnTo>
+                  <a:pt x="180975" y="0"/>
+                </a:lnTo>
+                <a:lnTo>
+                  <a:pt x="180975" y="180975"/>
+                </a:lnTo>
+                <a:lnTo>
+                  <a:pt x="0" y="180975"/>
+                </a:lnTo>
+                <a:close/>
+              </a:path>
+            </a:pathLst>
+          </a:custGeom>
+          <a:solidFill>
+            <a:srgbClr val="D1DFE8"/>
+          </a:solidFill>
+          <a:ln w="5239">
+            <a:solidFill>
+              <a:srgbClr val="FFFFFF"/>
+            </a:solidFill>
+            <a:prstDash val="solid"/>
+          </a:ln>
+        </p:spPr>
+      </p:sp>
+      <p:sp>
+        <p:nvSpPr>
+          <p:cNvPr id="226" name="path-223">
+            <a:extLst>
+              <a:ext uri="{FF2B5EF4-FFF2-40B4-BE49-F238E27FC236}">
+                <a16:creationId xmlns:a16="http://schemas.microsoft.com/office/drawing/2014/main" id="{A7CC0CB1-96BC-413D-AE81-CE89FB4751A8}"/>
+              </a:ext>
+            </a:extLst>
+          </p:cNvPr>
+          <p:cNvSpPr>
+            <a:spLocks noGrp="1"/>
+          </p:cNvSpPr>
+          <p:nvPr/>
+        </p:nvSpPr>
+        <p:spPr>
+          <a:xfrm>
+            <a:off x="15311841" y="6561757"/>
+            <a:ext cx="168706" cy="168706"/>
+          </a:xfrm>
+          <a:custGeom>
+            <a:avLst/>
+            <a:gdLst/>
+            <a:ahLst/>
+            <a:cxnLst/>
+            <a:rect l="0" t="0" r="0" b="0"/>
+            <a:pathLst>
+              <a:path w="180975" h="180975">
+                <a:moveTo>
+                  <a:pt x="0" y="0"/>
+                </a:moveTo>
+                <a:lnTo>
+                  <a:pt x="180975" y="0"/>
+                </a:lnTo>
+                <a:lnTo>
+                  <a:pt x="180975" y="180975"/>
+                </a:lnTo>
+                <a:lnTo>
+                  <a:pt x="0" y="180975"/>
+                </a:lnTo>
+                <a:close/>
+              </a:path>
+            </a:pathLst>
+          </a:custGeom>
+          <a:solidFill>
+            <a:srgbClr val="D0DFE8"/>
+          </a:solidFill>
+          <a:ln w="5239">
+            <a:solidFill>
+              <a:srgbClr val="FFFFFF"/>
+            </a:solidFill>
+            <a:prstDash val="solid"/>
+          </a:ln>
+        </p:spPr>
+      </p:sp>
+      <p:sp>
+        <p:nvSpPr>
+          <p:cNvPr id="227" name="path-224">
+            <a:extLst>
+              <a:ext uri="{FF2B5EF4-FFF2-40B4-BE49-F238E27FC236}">
+                <a16:creationId xmlns:a16="http://schemas.microsoft.com/office/drawing/2014/main" id="{1BE63697-5AE8-478D-BD34-0966AB505B16}"/>
+              </a:ext>
+            </a:extLst>
+          </p:cNvPr>
+          <p:cNvSpPr>
+            <a:spLocks noGrp="1"/>
+          </p:cNvSpPr>
+          <p:nvPr/>
+        </p:nvSpPr>
+        <p:spPr>
+          <a:xfrm>
+            <a:off x="15524943" y="6561757"/>
+            <a:ext cx="168706" cy="168706"/>
+          </a:xfrm>
+          <a:custGeom>
+            <a:avLst/>
+            <a:gdLst/>
+            <a:ahLst/>
+            <a:cxnLst/>
+            <a:rect l="0" t="0" r="0" b="0"/>
+            <a:pathLst>
+              <a:path w="180975" h="180975">
+                <a:moveTo>
+                  <a:pt x="0" y="0"/>
+                </a:moveTo>
+                <a:lnTo>
+                  <a:pt x="180975" y="0"/>
+                </a:lnTo>
+                <a:lnTo>
+                  <a:pt x="180975" y="180975"/>
+                </a:lnTo>
+                <a:lnTo>
+                  <a:pt x="0" y="180975"/>
+                </a:lnTo>
+                <a:close/>
+              </a:path>
+            </a:pathLst>
+          </a:custGeom>
+          <a:solidFill>
+            <a:srgbClr val="B3C9D7"/>
+          </a:solidFill>
+          <a:ln w="5239">
+            <a:solidFill>
+              <a:srgbClr val="FFFFFF"/>
+            </a:solidFill>
+            <a:prstDash val="solid"/>
+          </a:ln>
+        </p:spPr>
+      </p:sp>
+      <p:sp>
+        <p:nvSpPr>
+          <p:cNvPr id="228" name="path-225">
+            <a:extLst>
+              <a:ext uri="{FF2B5EF4-FFF2-40B4-BE49-F238E27FC236}">
+                <a16:creationId xmlns:a16="http://schemas.microsoft.com/office/drawing/2014/main" id="{1A0418B3-742E-4684-B155-3E8A103D6260}"/>
+              </a:ext>
+            </a:extLst>
+          </p:cNvPr>
+          <p:cNvSpPr>
+            <a:spLocks noGrp="1"/>
+          </p:cNvSpPr>
+          <p:nvPr/>
+        </p:nvSpPr>
+        <p:spPr>
+          <a:xfrm>
+            <a:off x="15738045" y="6561757"/>
+            <a:ext cx="168706" cy="168706"/>
+          </a:xfrm>
+          <a:custGeom>
+            <a:avLst/>
+            <a:gdLst/>
+            <a:ahLst/>
+            <a:cxnLst/>
+            <a:rect l="0" t="0" r="0" b="0"/>
+            <a:pathLst>
+              <a:path w="180975" h="180975">
+                <a:moveTo>
+                  <a:pt x="0" y="0"/>
+                </a:moveTo>
+                <a:lnTo>
+                  <a:pt x="180975" y="0"/>
+                </a:lnTo>
+                <a:lnTo>
+                  <a:pt x="180975" y="180975"/>
+                </a:lnTo>
+                <a:lnTo>
+                  <a:pt x="0" y="180975"/>
+                </a:lnTo>
+                <a:close/>
+              </a:path>
+            </a:pathLst>
+          </a:custGeom>
+          <a:solidFill>
+            <a:srgbClr val="5F8BA8"/>
+          </a:solidFill>
+          <a:ln w="5239">
+            <a:solidFill>
+              <a:srgbClr val="FFFFFF"/>
+            </a:solidFill>
+            <a:prstDash val="solid"/>
+          </a:ln>
+        </p:spPr>
+      </p:sp>
+      <p:sp>
+        <p:nvSpPr>
+          <p:cNvPr id="229" name="path-226">
+            <a:extLst>
+              <a:ext uri="{FF2B5EF4-FFF2-40B4-BE49-F238E27FC236}">
+                <a16:creationId xmlns:a16="http://schemas.microsoft.com/office/drawing/2014/main" id="{54DF4B84-F4DE-49C4-A6E0-A6A2CE796FD6}"/>
+              </a:ext>
+            </a:extLst>
+          </p:cNvPr>
+          <p:cNvSpPr>
+            <a:spLocks noGrp="1"/>
+          </p:cNvSpPr>
+          <p:nvPr/>
+        </p:nvSpPr>
+        <p:spPr>
+          <a:xfrm>
+            <a:off x="13393926" y="6774858"/>
+            <a:ext cx="168706" cy="168706"/>
+          </a:xfrm>
+          <a:custGeom>
+            <a:avLst/>
+            <a:gdLst/>
+            <a:ahLst/>
+            <a:cxnLst/>
+            <a:rect l="0" t="0" r="0" b="0"/>
+            <a:pathLst>
+              <a:path w="180975" h="180975">
+                <a:moveTo>
+                  <a:pt x="0" y="0"/>
+                </a:moveTo>
+                <a:lnTo>
+                  <a:pt x="180975" y="0"/>
+                </a:lnTo>
+                <a:lnTo>
+                  <a:pt x="180975" y="180975"/>
+                </a:lnTo>
+                <a:lnTo>
+                  <a:pt x="0" y="180975"/>
+                </a:lnTo>
+                <a:close/>
+              </a:path>
+            </a:pathLst>
+          </a:custGeom>
+          <a:solidFill>
+            <a:srgbClr val="CEDDE6"/>
+          </a:solidFill>
+          <a:ln w="5239">
+            <a:solidFill>
+              <a:srgbClr val="FFFFFF"/>
+            </a:solidFill>
+            <a:prstDash val="solid"/>
+          </a:ln>
+        </p:spPr>
+      </p:sp>
+      <p:sp>
+        <p:nvSpPr>
+          <p:cNvPr id="231" name="path-228">
+            <a:extLst>
+              <a:ext uri="{FF2B5EF4-FFF2-40B4-BE49-F238E27FC236}">
+                <a16:creationId xmlns:a16="http://schemas.microsoft.com/office/drawing/2014/main" id="{A3360EEB-D9AA-45C4-B033-921F5A18F457}"/>
+              </a:ext>
+            </a:extLst>
+          </p:cNvPr>
+          <p:cNvSpPr>
+            <a:spLocks noGrp="1"/>
+          </p:cNvSpPr>
+          <p:nvPr/>
+        </p:nvSpPr>
+        <p:spPr>
+          <a:xfrm>
+            <a:off x="13820129" y="6774858"/>
             <a:ext cx="168706" cy="168706"/>
           </a:xfrm>
           <a:custGeom>
@@ -15997,21 +17140,291 @@
       </p:sp>
       <p:sp>
         <p:nvSpPr>
-          <p:cNvPr id="207" name="path-204">
-            <a:extLst>
-              <a:ext uri="{FF2B5EF4-FFF2-40B4-BE49-F238E27FC236}">
-                <a16:creationId xmlns:a16="http://schemas.microsoft.com/office/drawing/2014/main" id="{0707ABB8-DB8F-487A-88C0-1E2ED9983FEA}"/>
-              </a:ext>
-            </a:extLst>
-          </p:cNvPr>
-          <p:cNvSpPr>
-            <a:spLocks noGrp="1"/>
-          </p:cNvSpPr>
-          <p:nvPr/>
-        </p:nvSpPr>
-        <p:spPr>
-          <a:xfrm>
-            <a:off x="13820129" y="6348655"/>
+          <p:cNvPr id="232" name="path-229">
+            <a:extLst>
+              <a:ext uri="{FF2B5EF4-FFF2-40B4-BE49-F238E27FC236}">
+                <a16:creationId xmlns:a16="http://schemas.microsoft.com/office/drawing/2014/main" id="{E718D3F1-FCFE-47DA-8E53-91B60E011ADA}"/>
+              </a:ext>
+            </a:extLst>
+          </p:cNvPr>
+          <p:cNvSpPr>
+            <a:spLocks noGrp="1"/>
+          </p:cNvSpPr>
+          <p:nvPr/>
+        </p:nvSpPr>
+        <p:spPr>
+          <a:xfrm>
+            <a:off x="14033231" y="6774858"/>
+            <a:ext cx="168706" cy="168706"/>
+          </a:xfrm>
+          <a:custGeom>
+            <a:avLst/>
+            <a:gdLst/>
+            <a:ahLst/>
+            <a:cxnLst/>
+            <a:rect l="0" t="0" r="0" b="0"/>
+            <a:pathLst>
+              <a:path w="180975" h="180975">
+                <a:moveTo>
+                  <a:pt x="0" y="0"/>
+                </a:moveTo>
+                <a:lnTo>
+                  <a:pt x="180975" y="0"/>
+                </a:lnTo>
+                <a:lnTo>
+                  <a:pt x="180975" y="180975"/>
+                </a:lnTo>
+                <a:lnTo>
+                  <a:pt x="0" y="180975"/>
+                </a:lnTo>
+                <a:close/>
+              </a:path>
+            </a:pathLst>
+          </a:custGeom>
+          <a:solidFill>
+            <a:srgbClr val="8AABC0"/>
+          </a:solidFill>
+          <a:ln w="5239">
+            <a:solidFill>
+              <a:srgbClr val="FFFFFF"/>
+            </a:solidFill>
+            <a:prstDash val="solid"/>
+          </a:ln>
+        </p:spPr>
+      </p:sp>
+      <p:sp>
+        <p:nvSpPr>
+          <p:cNvPr id="233" name="path-230">
+            <a:extLst>
+              <a:ext uri="{FF2B5EF4-FFF2-40B4-BE49-F238E27FC236}">
+                <a16:creationId xmlns:a16="http://schemas.microsoft.com/office/drawing/2014/main" id="{DF6CA084-178C-492D-B4AC-5E76AA043AD6}"/>
+              </a:ext>
+            </a:extLst>
+          </p:cNvPr>
+          <p:cNvSpPr>
+            <a:spLocks noGrp="1"/>
+          </p:cNvSpPr>
+          <p:nvPr/>
+        </p:nvSpPr>
+        <p:spPr>
+          <a:xfrm>
+            <a:off x="14246333" y="6774858"/>
+            <a:ext cx="168706" cy="168706"/>
+          </a:xfrm>
+          <a:custGeom>
+            <a:avLst/>
+            <a:gdLst/>
+            <a:ahLst/>
+            <a:cxnLst/>
+            <a:rect l="0" t="0" r="0" b="0"/>
+            <a:pathLst>
+              <a:path w="180975" h="180975">
+                <a:moveTo>
+                  <a:pt x="0" y="0"/>
+                </a:moveTo>
+                <a:lnTo>
+                  <a:pt x="180975" y="0"/>
+                </a:lnTo>
+                <a:lnTo>
+                  <a:pt x="180975" y="180975"/>
+                </a:lnTo>
+                <a:lnTo>
+                  <a:pt x="0" y="180975"/>
+                </a:lnTo>
+                <a:close/>
+              </a:path>
+            </a:pathLst>
+          </a:custGeom>
+          <a:solidFill>
+            <a:srgbClr val="3B7194"/>
+          </a:solidFill>
+          <a:ln w="5239">
+            <a:solidFill>
+              <a:srgbClr val="FFFFFF"/>
+            </a:solidFill>
+            <a:prstDash val="solid"/>
+          </a:ln>
+        </p:spPr>
+      </p:sp>
+      <p:sp>
+        <p:nvSpPr>
+          <p:cNvPr id="234" name="path-231">
+            <a:extLst>
+              <a:ext uri="{FF2B5EF4-FFF2-40B4-BE49-F238E27FC236}">
+                <a16:creationId xmlns:a16="http://schemas.microsoft.com/office/drawing/2014/main" id="{35EDD18A-DB29-4240-8398-E7D73DF1F95B}"/>
+              </a:ext>
+            </a:extLst>
+          </p:cNvPr>
+          <p:cNvSpPr>
+            <a:spLocks noGrp="1"/>
+          </p:cNvSpPr>
+          <p:nvPr/>
+        </p:nvSpPr>
+        <p:spPr>
+          <a:xfrm>
+            <a:off x="14459435" y="6774858"/>
+            <a:ext cx="168706" cy="168706"/>
+          </a:xfrm>
+          <a:custGeom>
+            <a:avLst/>
+            <a:gdLst/>
+            <a:ahLst/>
+            <a:cxnLst/>
+            <a:rect l="0" t="0" r="0" b="0"/>
+            <a:pathLst>
+              <a:path w="180975" h="180975">
+                <a:moveTo>
+                  <a:pt x="0" y="0"/>
+                </a:moveTo>
+                <a:lnTo>
+                  <a:pt x="180975" y="0"/>
+                </a:lnTo>
+                <a:lnTo>
+                  <a:pt x="180975" y="180975"/>
+                </a:lnTo>
+                <a:lnTo>
+                  <a:pt x="0" y="180975"/>
+                </a:lnTo>
+                <a:close/>
+              </a:path>
+            </a:pathLst>
+          </a:custGeom>
+          <a:solidFill>
+            <a:srgbClr val="4F809F"/>
+          </a:solidFill>
+          <a:ln w="5239">
+            <a:solidFill>
+              <a:srgbClr val="FFFFFF"/>
+            </a:solidFill>
+            <a:prstDash val="solid"/>
+          </a:ln>
+        </p:spPr>
+      </p:sp>
+      <p:sp>
+        <p:nvSpPr>
+          <p:cNvPr id="235" name="path-232">
+            <a:extLst>
+              <a:ext uri="{FF2B5EF4-FFF2-40B4-BE49-F238E27FC236}">
+                <a16:creationId xmlns:a16="http://schemas.microsoft.com/office/drawing/2014/main" id="{16736BC8-8C77-4459-8DC7-06292733D613}"/>
+              </a:ext>
+            </a:extLst>
+          </p:cNvPr>
+          <p:cNvSpPr>
+            <a:spLocks noGrp="1"/>
+          </p:cNvSpPr>
+          <p:nvPr/>
+        </p:nvSpPr>
+        <p:spPr>
+          <a:xfrm>
+            <a:off x="14672536" y="6774858"/>
+            <a:ext cx="168706" cy="168706"/>
+          </a:xfrm>
+          <a:custGeom>
+            <a:avLst/>
+            <a:gdLst/>
+            <a:ahLst/>
+            <a:cxnLst/>
+            <a:rect l="0" t="0" r="0" b="0"/>
+            <a:pathLst>
+              <a:path w="180975" h="180975">
+                <a:moveTo>
+                  <a:pt x="0" y="0"/>
+                </a:moveTo>
+                <a:lnTo>
+                  <a:pt x="180975" y="0"/>
+                </a:lnTo>
+                <a:lnTo>
+                  <a:pt x="180975" y="180975"/>
+                </a:lnTo>
+                <a:lnTo>
+                  <a:pt x="0" y="180975"/>
+                </a:lnTo>
+                <a:close/>
+              </a:path>
+            </a:pathLst>
+          </a:custGeom>
+          <a:solidFill>
+            <a:srgbClr val="A6BFD0"/>
+          </a:solidFill>
+          <a:ln w="5239">
+            <a:solidFill>
+              <a:srgbClr val="FFFFFF"/>
+            </a:solidFill>
+            <a:prstDash val="solid"/>
+          </a:ln>
+        </p:spPr>
+      </p:sp>
+      <p:sp>
+        <p:nvSpPr>
+          <p:cNvPr id="236" name="path-233">
+            <a:extLst>
+              <a:ext uri="{FF2B5EF4-FFF2-40B4-BE49-F238E27FC236}">
+                <a16:creationId xmlns:a16="http://schemas.microsoft.com/office/drawing/2014/main" id="{7E15F708-18F7-40B6-B79E-54535952E845}"/>
+              </a:ext>
+            </a:extLst>
+          </p:cNvPr>
+          <p:cNvSpPr>
+            <a:spLocks noGrp="1"/>
+          </p:cNvSpPr>
+          <p:nvPr/>
+        </p:nvSpPr>
+        <p:spPr>
+          <a:xfrm>
+            <a:off x="14885638" y="6774858"/>
+            <a:ext cx="168706" cy="168706"/>
+          </a:xfrm>
+          <a:custGeom>
+            <a:avLst/>
+            <a:gdLst/>
+            <a:ahLst/>
+            <a:cxnLst/>
+            <a:rect l="0" t="0" r="0" b="0"/>
+            <a:pathLst>
+              <a:path w="180975" h="180975">
+                <a:moveTo>
+                  <a:pt x="0" y="0"/>
+                </a:moveTo>
+                <a:lnTo>
+                  <a:pt x="180975" y="0"/>
+                </a:lnTo>
+                <a:lnTo>
+                  <a:pt x="180975" y="180975"/>
+                </a:lnTo>
+                <a:lnTo>
+                  <a:pt x="0" y="180975"/>
+                </a:lnTo>
+                <a:close/>
+              </a:path>
+            </a:pathLst>
+          </a:custGeom>
+          <a:solidFill>
+            <a:srgbClr val="CFDEE7"/>
+          </a:solidFill>
+          <a:ln w="5239">
+            <a:solidFill>
+              <a:srgbClr val="FFFFFF"/>
+            </a:solidFill>
+            <a:prstDash val="solid"/>
+          </a:ln>
+        </p:spPr>
+      </p:sp>
+      <p:sp>
+        <p:nvSpPr>
+          <p:cNvPr id="237" name="path-234">
+            <a:extLst>
+              <a:ext uri="{FF2B5EF4-FFF2-40B4-BE49-F238E27FC236}">
+                <a16:creationId xmlns:a16="http://schemas.microsoft.com/office/drawing/2014/main" id="{4F3CFFC0-D9E5-4618-B090-764D2DDBBABD}"/>
+              </a:ext>
+            </a:extLst>
+          </p:cNvPr>
+          <p:cNvSpPr>
+            <a:spLocks noGrp="1"/>
+          </p:cNvSpPr>
+          <p:nvPr/>
+        </p:nvSpPr>
+        <p:spPr>
+          <a:xfrm>
+            <a:off x="15098740" y="6774858"/>
             <a:ext cx="168706" cy="168706"/>
           </a:xfrm>
           <a:custGeom>
@@ -16051,21 +17464,21 @@
       </p:sp>
       <p:sp>
         <p:nvSpPr>
-          <p:cNvPr id="208" name="path-205">
-            <a:extLst>
-              <a:ext uri="{FF2B5EF4-FFF2-40B4-BE49-F238E27FC236}">
-                <a16:creationId xmlns:a16="http://schemas.microsoft.com/office/drawing/2014/main" id="{FB3C05F5-A496-4DAD-A7C0-41732FDA33AA}"/>
-              </a:ext>
-            </a:extLst>
-          </p:cNvPr>
-          <p:cNvSpPr>
-            <a:spLocks noGrp="1"/>
-          </p:cNvSpPr>
-          <p:nvPr/>
-        </p:nvSpPr>
-        <p:spPr>
-          <a:xfrm>
-            <a:off x="14033231" y="6348655"/>
+          <p:cNvPr id="238" name="path-235">
+            <a:extLst>
+              <a:ext uri="{FF2B5EF4-FFF2-40B4-BE49-F238E27FC236}">
+                <a16:creationId xmlns:a16="http://schemas.microsoft.com/office/drawing/2014/main" id="{0C03BAC7-661D-4CDD-8759-2FCC376EA4E2}"/>
+              </a:ext>
+            </a:extLst>
+          </p:cNvPr>
+          <p:cNvSpPr>
+            <a:spLocks noGrp="1"/>
+          </p:cNvSpPr>
+          <p:nvPr/>
+        </p:nvSpPr>
+        <p:spPr>
+          <a:xfrm>
+            <a:off x="15311841" y="6774858"/>
             <a:ext cx="168706" cy="168706"/>
           </a:xfrm>
           <a:custGeom>
@@ -16093,7 +17506,7 @@
             </a:pathLst>
           </a:custGeom>
           <a:solidFill>
-            <a:srgbClr val="CEDDE6"/>
+            <a:srgbClr val="C5D7E2"/>
           </a:solidFill>
           <a:ln w="5239">
             <a:solidFill>
@@ -16105,21 +17518,21 @@
       </p:sp>
       <p:sp>
         <p:nvSpPr>
-          <p:cNvPr id="209" name="path-206">
-            <a:extLst>
-              <a:ext uri="{FF2B5EF4-FFF2-40B4-BE49-F238E27FC236}">
-                <a16:creationId xmlns:a16="http://schemas.microsoft.com/office/drawing/2014/main" id="{4FF21ACA-5F35-4F6B-8986-6EAE7DA890C3}"/>
-              </a:ext>
-            </a:extLst>
-          </p:cNvPr>
-          <p:cNvSpPr>
-            <a:spLocks noGrp="1"/>
-          </p:cNvSpPr>
-          <p:nvPr/>
-        </p:nvSpPr>
-        <p:spPr>
-          <a:xfrm>
-            <a:off x="14246333" y="6348655"/>
+          <p:cNvPr id="239" name="path-236">
+            <a:extLst>
+              <a:ext uri="{FF2B5EF4-FFF2-40B4-BE49-F238E27FC236}">
+                <a16:creationId xmlns:a16="http://schemas.microsoft.com/office/drawing/2014/main" id="{8B8A0C85-1D5E-4A4C-A95F-D33E5A7A9B44}"/>
+              </a:ext>
+            </a:extLst>
+          </p:cNvPr>
+          <p:cNvSpPr>
+            <a:spLocks noGrp="1"/>
+          </p:cNvSpPr>
+          <p:nvPr/>
+        </p:nvSpPr>
+        <p:spPr>
+          <a:xfrm>
+            <a:off x="15524943" y="6774858"/>
             <a:ext cx="168706" cy="168706"/>
           </a:xfrm>
           <a:custGeom>
@@ -16147,7 +17560,7 @@
             </a:pathLst>
           </a:custGeom>
           <a:solidFill>
-            <a:srgbClr val="9FBBCC"/>
+            <a:srgbClr val="81A5BB"/>
           </a:solidFill>
           <a:ln w="5239">
             <a:solidFill>
@@ -16159,21 +17572,21 @@
       </p:sp>
       <p:sp>
         <p:nvSpPr>
-          <p:cNvPr id="210" name="path-207">
-            <a:extLst>
-              <a:ext uri="{FF2B5EF4-FFF2-40B4-BE49-F238E27FC236}">
-                <a16:creationId xmlns:a16="http://schemas.microsoft.com/office/drawing/2014/main" id="{C4F1E675-60D7-4D50-8064-90587D0B9620}"/>
-              </a:ext>
-            </a:extLst>
-          </p:cNvPr>
-          <p:cNvSpPr>
-            <a:spLocks noGrp="1"/>
-          </p:cNvSpPr>
-          <p:nvPr/>
-        </p:nvSpPr>
-        <p:spPr>
-          <a:xfrm>
-            <a:off x="14459435" y="6348655"/>
+          <p:cNvPr id="240" name="path-237">
+            <a:extLst>
+              <a:ext uri="{FF2B5EF4-FFF2-40B4-BE49-F238E27FC236}">
+                <a16:creationId xmlns:a16="http://schemas.microsoft.com/office/drawing/2014/main" id="{20F84EAF-C54F-4D9F-8DB1-A9A2ECA54194}"/>
+              </a:ext>
+            </a:extLst>
+          </p:cNvPr>
+          <p:cNvSpPr>
+            <a:spLocks noGrp="1"/>
+          </p:cNvSpPr>
+          <p:nvPr/>
+        </p:nvSpPr>
+        <p:spPr>
+          <a:xfrm>
+            <a:off x="15738045" y="6774858"/>
             <a:ext cx="168706" cy="168706"/>
           </a:xfrm>
           <a:custGeom>
@@ -16201,7 +17614,7 @@
             </a:pathLst>
           </a:custGeom>
           <a:solidFill>
-            <a:srgbClr val="497B9C"/>
+            <a:srgbClr val="386F92"/>
           </a:solidFill>
           <a:ln w="5239">
             <a:solidFill>
@@ -16213,21 +17626,21 @@
       </p:sp>
       <p:sp>
         <p:nvSpPr>
-          <p:cNvPr id="211" name="path-208">
-            <a:extLst>
-              <a:ext uri="{FF2B5EF4-FFF2-40B4-BE49-F238E27FC236}">
-                <a16:creationId xmlns:a16="http://schemas.microsoft.com/office/drawing/2014/main" id="{EB7AA31C-ED5B-495D-B004-A1BCA2E7C087}"/>
-              </a:ext>
-            </a:extLst>
-          </p:cNvPr>
-          <p:cNvSpPr>
-            <a:spLocks noGrp="1"/>
-          </p:cNvSpPr>
-          <p:nvPr/>
-        </p:nvSpPr>
-        <p:spPr>
-          <a:xfrm>
-            <a:off x="14672536" y="6348655"/>
+          <p:cNvPr id="241" name="path-238">
+            <a:extLst>
+              <a:ext uri="{FF2B5EF4-FFF2-40B4-BE49-F238E27FC236}">
+                <a16:creationId xmlns:a16="http://schemas.microsoft.com/office/drawing/2014/main" id="{4696F3AD-6D16-4494-8128-FE6AAD0DA4E2}"/>
+              </a:ext>
+            </a:extLst>
+          </p:cNvPr>
+          <p:cNvSpPr>
+            <a:spLocks noGrp="1"/>
+          </p:cNvSpPr>
+          <p:nvPr/>
+        </p:nvSpPr>
+        <p:spPr>
+          <a:xfrm>
+            <a:off x="13393926" y="6987960"/>
             <a:ext cx="168706" cy="168706"/>
           </a:xfrm>
           <a:custGeom>
@@ -16255,7 +17668,7 @@
             </a:pathLst>
           </a:custGeom>
           <a:solidFill>
-            <a:srgbClr val="3F7496"/>
+            <a:srgbClr val="D1E0E8"/>
           </a:solidFill>
           <a:ln w="5239">
             <a:solidFill>
@@ -16267,21 +17680,21 @@
       </p:sp>
       <p:sp>
         <p:nvSpPr>
-          <p:cNvPr id="212" name="path-209">
-            <a:extLst>
-              <a:ext uri="{FF2B5EF4-FFF2-40B4-BE49-F238E27FC236}">
-                <a16:creationId xmlns:a16="http://schemas.microsoft.com/office/drawing/2014/main" id="{431EECBF-2B48-4CEA-AB71-56D6F6197C3D}"/>
-              </a:ext>
-            </a:extLst>
-          </p:cNvPr>
-          <p:cNvSpPr>
-            <a:spLocks noGrp="1"/>
-          </p:cNvSpPr>
-          <p:nvPr/>
-        </p:nvSpPr>
-        <p:spPr>
-          <a:xfrm>
-            <a:off x="14885638" y="6348655"/>
+          <p:cNvPr id="243" name="path-240">
+            <a:extLst>
+              <a:ext uri="{FF2B5EF4-FFF2-40B4-BE49-F238E27FC236}">
+                <a16:creationId xmlns:a16="http://schemas.microsoft.com/office/drawing/2014/main" id="{88B30EE5-5B42-42D7-9113-1D8562D48CBA}"/>
+              </a:ext>
+            </a:extLst>
+          </p:cNvPr>
+          <p:cNvSpPr>
+            <a:spLocks noGrp="1"/>
+          </p:cNvSpPr>
+          <p:nvPr/>
+        </p:nvSpPr>
+        <p:spPr>
+          <a:xfrm>
+            <a:off x="13820129" y="6987960"/>
             <a:ext cx="168706" cy="168706"/>
           </a:xfrm>
           <a:custGeom>
@@ -16309,7 +17722,7 @@
             </a:pathLst>
           </a:custGeom>
           <a:solidFill>
-            <a:srgbClr val="91B0C4"/>
+            <a:srgbClr val="A9C2D2"/>
           </a:solidFill>
           <a:ln w="5239">
             <a:solidFill>
@@ -16321,21 +17734,1101 @@
       </p:sp>
       <p:sp>
         <p:nvSpPr>
-          <p:cNvPr id="213" name="path-210">
-            <a:extLst>
-              <a:ext uri="{FF2B5EF4-FFF2-40B4-BE49-F238E27FC236}">
-                <a16:creationId xmlns:a16="http://schemas.microsoft.com/office/drawing/2014/main" id="{0850F9A1-1F1D-4DD2-8090-08DB10C8F8FD}"/>
-              </a:ext>
-            </a:extLst>
-          </p:cNvPr>
-          <p:cNvSpPr>
-            <a:spLocks noGrp="1"/>
-          </p:cNvSpPr>
-          <p:nvPr/>
-        </p:nvSpPr>
-        <p:spPr>
-          <a:xfrm>
-            <a:off x="15098740" y="6348655"/>
+          <p:cNvPr id="244" name="path-241">
+            <a:extLst>
+              <a:ext uri="{FF2B5EF4-FFF2-40B4-BE49-F238E27FC236}">
+                <a16:creationId xmlns:a16="http://schemas.microsoft.com/office/drawing/2014/main" id="{09E7F508-8A4E-46EF-80CE-F5391DD8EC84}"/>
+              </a:ext>
+            </a:extLst>
+          </p:cNvPr>
+          <p:cNvSpPr>
+            <a:spLocks noGrp="1"/>
+          </p:cNvSpPr>
+          <p:nvPr/>
+        </p:nvSpPr>
+        <p:spPr>
+          <a:xfrm>
+            <a:off x="14033231" y="6987960"/>
+            <a:ext cx="168706" cy="168706"/>
+          </a:xfrm>
+          <a:custGeom>
+            <a:avLst/>
+            <a:gdLst/>
+            <a:ahLst/>
+            <a:cxnLst/>
+            <a:rect l="0" t="0" r="0" b="0"/>
+            <a:pathLst>
+              <a:path w="180975" h="180975">
+                <a:moveTo>
+                  <a:pt x="0" y="0"/>
+                </a:moveTo>
+                <a:lnTo>
+                  <a:pt x="180975" y="0"/>
+                </a:lnTo>
+                <a:lnTo>
+                  <a:pt x="180975" y="180975"/>
+                </a:lnTo>
+                <a:lnTo>
+                  <a:pt x="0" y="180975"/>
+                </a:lnTo>
+                <a:close/>
+              </a:path>
+            </a:pathLst>
+          </a:custGeom>
+          <a:solidFill>
+            <a:srgbClr val="5282A1"/>
+          </a:solidFill>
+          <a:ln w="5239">
+            <a:solidFill>
+              <a:srgbClr val="FFFFFF"/>
+            </a:solidFill>
+            <a:prstDash val="solid"/>
+          </a:ln>
+        </p:spPr>
+      </p:sp>
+      <p:sp>
+        <p:nvSpPr>
+          <p:cNvPr id="245" name="path-242">
+            <a:extLst>
+              <a:ext uri="{FF2B5EF4-FFF2-40B4-BE49-F238E27FC236}">
+                <a16:creationId xmlns:a16="http://schemas.microsoft.com/office/drawing/2014/main" id="{2BB86E1B-7150-437E-AA04-F8EAE952BF96}"/>
+              </a:ext>
+            </a:extLst>
+          </p:cNvPr>
+          <p:cNvSpPr>
+            <a:spLocks noGrp="1"/>
+          </p:cNvSpPr>
+          <p:nvPr/>
+        </p:nvSpPr>
+        <p:spPr>
+          <a:xfrm>
+            <a:off x="14246333" y="6987960"/>
+            <a:ext cx="168706" cy="168706"/>
+          </a:xfrm>
+          <a:custGeom>
+            <a:avLst/>
+            <a:gdLst/>
+            <a:ahLst/>
+            <a:cxnLst/>
+            <a:rect l="0" t="0" r="0" b="0"/>
+            <a:pathLst>
+              <a:path w="180975" h="180975">
+                <a:moveTo>
+                  <a:pt x="0" y="0"/>
+                </a:moveTo>
+                <a:lnTo>
+                  <a:pt x="180975" y="0"/>
+                </a:lnTo>
+                <a:lnTo>
+                  <a:pt x="180975" y="180975"/>
+                </a:lnTo>
+                <a:lnTo>
+                  <a:pt x="0" y="180975"/>
+                </a:lnTo>
+                <a:close/>
+              </a:path>
+            </a:pathLst>
+          </a:custGeom>
+          <a:solidFill>
+            <a:srgbClr val="3A7093"/>
+          </a:solidFill>
+          <a:ln w="5239">
+            <a:solidFill>
+              <a:srgbClr val="FFFFFF"/>
+            </a:solidFill>
+            <a:prstDash val="solid"/>
+          </a:ln>
+        </p:spPr>
+      </p:sp>
+      <p:sp>
+        <p:nvSpPr>
+          <p:cNvPr id="246" name="path-243">
+            <a:extLst>
+              <a:ext uri="{FF2B5EF4-FFF2-40B4-BE49-F238E27FC236}">
+                <a16:creationId xmlns:a16="http://schemas.microsoft.com/office/drawing/2014/main" id="{B38FC2CB-F2AF-4742-AC29-A5C791298CB6}"/>
+              </a:ext>
+            </a:extLst>
+          </p:cNvPr>
+          <p:cNvSpPr>
+            <a:spLocks noGrp="1"/>
+          </p:cNvSpPr>
+          <p:nvPr/>
+        </p:nvSpPr>
+        <p:spPr>
+          <a:xfrm>
+            <a:off x="14459435" y="6987960"/>
+            <a:ext cx="168706" cy="168706"/>
+          </a:xfrm>
+          <a:custGeom>
+            <a:avLst/>
+            <a:gdLst/>
+            <a:ahLst/>
+            <a:cxnLst/>
+            <a:rect l="0" t="0" r="0" b="0"/>
+            <a:pathLst>
+              <a:path w="180975" h="180975">
+                <a:moveTo>
+                  <a:pt x="0" y="0"/>
+                </a:moveTo>
+                <a:lnTo>
+                  <a:pt x="180975" y="0"/>
+                </a:lnTo>
+                <a:lnTo>
+                  <a:pt x="180975" y="180975"/>
+                </a:lnTo>
+                <a:lnTo>
+                  <a:pt x="0" y="180975"/>
+                </a:lnTo>
+                <a:close/>
+              </a:path>
+            </a:pathLst>
+          </a:custGeom>
+          <a:solidFill>
+            <a:srgbClr val="86A8BE"/>
+          </a:solidFill>
+          <a:ln w="5239">
+            <a:solidFill>
+              <a:srgbClr val="FFFFFF"/>
+            </a:solidFill>
+            <a:prstDash val="solid"/>
+          </a:ln>
+        </p:spPr>
+      </p:sp>
+      <p:sp>
+        <p:nvSpPr>
+          <p:cNvPr id="247" name="path-244">
+            <a:extLst>
+              <a:ext uri="{FF2B5EF4-FFF2-40B4-BE49-F238E27FC236}">
+                <a16:creationId xmlns:a16="http://schemas.microsoft.com/office/drawing/2014/main" id="{94ECA86C-D002-4EF9-AB70-9279C17DEBF8}"/>
+              </a:ext>
+            </a:extLst>
+          </p:cNvPr>
+          <p:cNvSpPr>
+            <a:spLocks noGrp="1"/>
+          </p:cNvSpPr>
+          <p:nvPr/>
+        </p:nvSpPr>
+        <p:spPr>
+          <a:xfrm>
+            <a:off x="14672536" y="6987960"/>
+            <a:ext cx="168706" cy="168706"/>
+          </a:xfrm>
+          <a:custGeom>
+            <a:avLst/>
+            <a:gdLst/>
+            <a:ahLst/>
+            <a:cxnLst/>
+            <a:rect l="0" t="0" r="0" b="0"/>
+            <a:pathLst>
+              <a:path w="180975" h="180975">
+                <a:moveTo>
+                  <a:pt x="0" y="0"/>
+                </a:moveTo>
+                <a:lnTo>
+                  <a:pt x="180975" y="0"/>
+                </a:lnTo>
+                <a:lnTo>
+                  <a:pt x="180975" y="180975"/>
+                </a:lnTo>
+                <a:lnTo>
+                  <a:pt x="0" y="180975"/>
+                </a:lnTo>
+                <a:close/>
+              </a:path>
+            </a:pathLst>
+          </a:custGeom>
+          <a:solidFill>
+            <a:srgbClr val="C7D8E3"/>
+          </a:solidFill>
+          <a:ln w="5239">
+            <a:solidFill>
+              <a:srgbClr val="FFFFFF"/>
+            </a:solidFill>
+            <a:prstDash val="solid"/>
+          </a:ln>
+        </p:spPr>
+      </p:sp>
+      <p:sp>
+        <p:nvSpPr>
+          <p:cNvPr id="248" name="path-245">
+            <a:extLst>
+              <a:ext uri="{FF2B5EF4-FFF2-40B4-BE49-F238E27FC236}">
+                <a16:creationId xmlns:a16="http://schemas.microsoft.com/office/drawing/2014/main" id="{E27F66F2-4575-45DA-9412-493071161874}"/>
+              </a:ext>
+            </a:extLst>
+          </p:cNvPr>
+          <p:cNvSpPr>
+            <a:spLocks noGrp="1"/>
+          </p:cNvSpPr>
+          <p:nvPr/>
+        </p:nvSpPr>
+        <p:spPr>
+          <a:xfrm>
+            <a:off x="14885638" y="6987960"/>
+            <a:ext cx="168706" cy="168706"/>
+          </a:xfrm>
+          <a:custGeom>
+            <a:avLst/>
+            <a:gdLst/>
+            <a:ahLst/>
+            <a:cxnLst/>
+            <a:rect l="0" t="0" r="0" b="0"/>
+            <a:pathLst>
+              <a:path w="180975" h="180975">
+                <a:moveTo>
+                  <a:pt x="0" y="0"/>
+                </a:moveTo>
+                <a:lnTo>
+                  <a:pt x="180975" y="0"/>
+                </a:lnTo>
+                <a:lnTo>
+                  <a:pt x="180975" y="180975"/>
+                </a:lnTo>
+                <a:lnTo>
+                  <a:pt x="0" y="180975"/>
+                </a:lnTo>
+                <a:close/>
+              </a:path>
+            </a:pathLst>
+          </a:custGeom>
+          <a:solidFill>
+            <a:srgbClr val="D1E0E8"/>
+          </a:solidFill>
+          <a:ln w="5239">
+            <a:solidFill>
+              <a:srgbClr val="FFFFFF"/>
+            </a:solidFill>
+            <a:prstDash val="solid"/>
+          </a:ln>
+        </p:spPr>
+      </p:sp>
+      <p:sp>
+        <p:nvSpPr>
+          <p:cNvPr id="249" name="path-246">
+            <a:extLst>
+              <a:ext uri="{FF2B5EF4-FFF2-40B4-BE49-F238E27FC236}">
+                <a16:creationId xmlns:a16="http://schemas.microsoft.com/office/drawing/2014/main" id="{0711E4D6-CDFC-4A59-B920-AE00DE45235F}"/>
+              </a:ext>
+            </a:extLst>
+          </p:cNvPr>
+          <p:cNvSpPr>
+            <a:spLocks noGrp="1"/>
+          </p:cNvSpPr>
+          <p:nvPr/>
+        </p:nvSpPr>
+        <p:spPr>
+          <a:xfrm>
+            <a:off x="15098740" y="6987960"/>
+            <a:ext cx="168706" cy="168706"/>
+          </a:xfrm>
+          <a:custGeom>
+            <a:avLst/>
+            <a:gdLst/>
+            <a:ahLst/>
+            <a:cxnLst/>
+            <a:rect l="0" t="0" r="0" b="0"/>
+            <a:pathLst>
+              <a:path w="180975" h="180975">
+                <a:moveTo>
+                  <a:pt x="0" y="0"/>
+                </a:moveTo>
+                <a:lnTo>
+                  <a:pt x="180975" y="0"/>
+                </a:lnTo>
+                <a:lnTo>
+                  <a:pt x="180975" y="180975"/>
+                </a:lnTo>
+                <a:lnTo>
+                  <a:pt x="0" y="180975"/>
+                </a:lnTo>
+                <a:close/>
+              </a:path>
+            </a:pathLst>
+          </a:custGeom>
+          <a:solidFill>
+            <a:srgbClr val="CEDDE7"/>
+          </a:solidFill>
+          <a:ln w="5239">
+            <a:solidFill>
+              <a:srgbClr val="FFFFFF"/>
+            </a:solidFill>
+            <a:prstDash val="solid"/>
+          </a:ln>
+        </p:spPr>
+      </p:sp>
+      <p:sp>
+        <p:nvSpPr>
+          <p:cNvPr id="250" name="path-247">
+            <a:extLst>
+              <a:ext uri="{FF2B5EF4-FFF2-40B4-BE49-F238E27FC236}">
+                <a16:creationId xmlns:a16="http://schemas.microsoft.com/office/drawing/2014/main" id="{32920BB1-1D25-49CB-A0DE-975640B0E304}"/>
+              </a:ext>
+            </a:extLst>
+          </p:cNvPr>
+          <p:cNvSpPr>
+            <a:spLocks noGrp="1"/>
+          </p:cNvSpPr>
+          <p:nvPr/>
+        </p:nvSpPr>
+        <p:spPr>
+          <a:xfrm>
+            <a:off x="15311841" y="6987960"/>
+            <a:ext cx="168706" cy="168706"/>
+          </a:xfrm>
+          <a:custGeom>
+            <a:avLst/>
+            <a:gdLst/>
+            <a:ahLst/>
+            <a:cxnLst/>
+            <a:rect l="0" t="0" r="0" b="0"/>
+            <a:pathLst>
+              <a:path w="180975" h="180975">
+                <a:moveTo>
+                  <a:pt x="0" y="0"/>
+                </a:moveTo>
+                <a:lnTo>
+                  <a:pt x="180975" y="0"/>
+                </a:lnTo>
+                <a:lnTo>
+                  <a:pt x="180975" y="180975"/>
+                </a:lnTo>
+                <a:lnTo>
+                  <a:pt x="0" y="180975"/>
+                </a:lnTo>
+                <a:close/>
+              </a:path>
+            </a:pathLst>
+          </a:custGeom>
+          <a:solidFill>
+            <a:srgbClr val="A1BCCD"/>
+          </a:solidFill>
+          <a:ln w="5239">
+            <a:solidFill>
+              <a:srgbClr val="FFFFFF"/>
+            </a:solidFill>
+            <a:prstDash val="solid"/>
+          </a:ln>
+        </p:spPr>
+      </p:sp>
+      <p:sp>
+        <p:nvSpPr>
+          <p:cNvPr id="251" name="path-248">
+            <a:extLst>
+              <a:ext uri="{FF2B5EF4-FFF2-40B4-BE49-F238E27FC236}">
+                <a16:creationId xmlns:a16="http://schemas.microsoft.com/office/drawing/2014/main" id="{544E6C35-6A2B-4124-AFA2-84254FDBF069}"/>
+              </a:ext>
+            </a:extLst>
+          </p:cNvPr>
+          <p:cNvSpPr>
+            <a:spLocks noGrp="1"/>
+          </p:cNvSpPr>
+          <p:nvPr/>
+        </p:nvSpPr>
+        <p:spPr>
+          <a:xfrm>
+            <a:off x="15524943" y="6987960"/>
+            <a:ext cx="168706" cy="168706"/>
+          </a:xfrm>
+          <a:custGeom>
+            <a:avLst/>
+            <a:gdLst/>
+            <a:ahLst/>
+            <a:cxnLst/>
+            <a:rect l="0" t="0" r="0" b="0"/>
+            <a:pathLst>
+              <a:path w="180975" h="180975">
+                <a:moveTo>
+                  <a:pt x="0" y="0"/>
+                </a:moveTo>
+                <a:lnTo>
+                  <a:pt x="180975" y="0"/>
+                </a:lnTo>
+                <a:lnTo>
+                  <a:pt x="180975" y="180975"/>
+                </a:lnTo>
+                <a:lnTo>
+                  <a:pt x="0" y="180975"/>
+                </a:lnTo>
+                <a:close/>
+              </a:path>
+            </a:pathLst>
+          </a:custGeom>
+          <a:solidFill>
+            <a:srgbClr val="4B7D9D"/>
+          </a:solidFill>
+          <a:ln w="5239">
+            <a:solidFill>
+              <a:srgbClr val="FFFFFF"/>
+            </a:solidFill>
+            <a:prstDash val="solid"/>
+          </a:ln>
+        </p:spPr>
+      </p:sp>
+      <p:sp>
+        <p:nvSpPr>
+          <p:cNvPr id="252" name="path-249">
+            <a:extLst>
+              <a:ext uri="{FF2B5EF4-FFF2-40B4-BE49-F238E27FC236}">
+                <a16:creationId xmlns:a16="http://schemas.microsoft.com/office/drawing/2014/main" id="{5C2BEFF0-0193-4524-AF20-92B65DA090A4}"/>
+              </a:ext>
+            </a:extLst>
+          </p:cNvPr>
+          <p:cNvSpPr>
+            <a:spLocks noGrp="1"/>
+          </p:cNvSpPr>
+          <p:nvPr/>
+        </p:nvSpPr>
+        <p:spPr>
+          <a:xfrm>
+            <a:off x="15738045" y="6987960"/>
+            <a:ext cx="168706" cy="168706"/>
+          </a:xfrm>
+          <a:custGeom>
+            <a:avLst/>
+            <a:gdLst/>
+            <a:ahLst/>
+            <a:cxnLst/>
+            <a:rect l="0" t="0" r="0" b="0"/>
+            <a:pathLst>
+              <a:path w="180975" h="180975">
+                <a:moveTo>
+                  <a:pt x="0" y="0"/>
+                </a:moveTo>
+                <a:lnTo>
+                  <a:pt x="180975" y="0"/>
+                </a:lnTo>
+                <a:lnTo>
+                  <a:pt x="180975" y="180975"/>
+                </a:lnTo>
+                <a:lnTo>
+                  <a:pt x="0" y="180975"/>
+                </a:lnTo>
+                <a:close/>
+              </a:path>
+            </a:pathLst>
+          </a:custGeom>
+          <a:solidFill>
+            <a:srgbClr val="3E7395"/>
+          </a:solidFill>
+          <a:ln w="5239">
+            <a:solidFill>
+              <a:srgbClr val="FFFFFF"/>
+            </a:solidFill>
+            <a:prstDash val="solid"/>
+          </a:ln>
+        </p:spPr>
+      </p:sp>
+      <p:sp>
+        <p:nvSpPr>
+          <p:cNvPr id="253" name="path-250">
+            <a:extLst>
+              <a:ext uri="{FF2B5EF4-FFF2-40B4-BE49-F238E27FC236}">
+                <a16:creationId xmlns:a16="http://schemas.microsoft.com/office/drawing/2014/main" id="{CAE6394C-C36B-4F6B-A2F7-584E60561160}"/>
+              </a:ext>
+            </a:extLst>
+          </p:cNvPr>
+          <p:cNvSpPr>
+            <a:spLocks noGrp="1"/>
+          </p:cNvSpPr>
+          <p:nvPr/>
+        </p:nvSpPr>
+        <p:spPr>
+          <a:xfrm>
+            <a:off x="13393926" y="7201062"/>
+            <a:ext cx="168706" cy="168706"/>
+          </a:xfrm>
+          <a:custGeom>
+            <a:avLst/>
+            <a:gdLst/>
+            <a:ahLst/>
+            <a:cxnLst/>
+            <a:rect l="0" t="0" r="0" b="0"/>
+            <a:pathLst>
+              <a:path w="180975" h="180975">
+                <a:moveTo>
+                  <a:pt x="0" y="0"/>
+                </a:moveTo>
+                <a:lnTo>
+                  <a:pt x="180975" y="0"/>
+                </a:lnTo>
+                <a:lnTo>
+                  <a:pt x="180975" y="180975"/>
+                </a:lnTo>
+                <a:lnTo>
+                  <a:pt x="0" y="180975"/>
+                </a:lnTo>
+                <a:close/>
+              </a:path>
+            </a:pathLst>
+          </a:custGeom>
+          <a:solidFill>
+            <a:srgbClr val="D1E0E8"/>
+          </a:solidFill>
+          <a:ln w="5239">
+            <a:solidFill>
+              <a:srgbClr val="FFFFFF"/>
+            </a:solidFill>
+            <a:prstDash val="solid"/>
+          </a:ln>
+        </p:spPr>
+      </p:sp>
+      <p:sp>
+        <p:nvSpPr>
+          <p:cNvPr id="255" name="path-252">
+            <a:extLst>
+              <a:ext uri="{FF2B5EF4-FFF2-40B4-BE49-F238E27FC236}">
+                <a16:creationId xmlns:a16="http://schemas.microsoft.com/office/drawing/2014/main" id="{3FE8A893-73C5-4FFA-BBF1-662AD9A118A2}"/>
+              </a:ext>
+            </a:extLst>
+          </p:cNvPr>
+          <p:cNvSpPr>
+            <a:spLocks noGrp="1"/>
+          </p:cNvSpPr>
+          <p:nvPr/>
+        </p:nvSpPr>
+        <p:spPr>
+          <a:xfrm>
+            <a:off x="13820129" y="7201062"/>
+            <a:ext cx="168706" cy="168706"/>
+          </a:xfrm>
+          <a:custGeom>
+            <a:avLst/>
+            <a:gdLst/>
+            <a:ahLst/>
+            <a:cxnLst/>
+            <a:rect l="0" t="0" r="0" b="0"/>
+            <a:pathLst>
+              <a:path w="180975" h="180975">
+                <a:moveTo>
+                  <a:pt x="0" y="0"/>
+                </a:moveTo>
+                <a:lnTo>
+                  <a:pt x="180975" y="0"/>
+                </a:lnTo>
+                <a:lnTo>
+                  <a:pt x="180975" y="180975"/>
+                </a:lnTo>
+                <a:lnTo>
+                  <a:pt x="0" y="180975"/>
+                </a:lnTo>
+                <a:close/>
+              </a:path>
+            </a:pathLst>
+          </a:custGeom>
+          <a:solidFill>
+            <a:srgbClr val="729AB3"/>
+          </a:solidFill>
+          <a:ln w="5239">
+            <a:solidFill>
+              <a:srgbClr val="FFFFFF"/>
+            </a:solidFill>
+            <a:prstDash val="solid"/>
+          </a:ln>
+        </p:spPr>
+      </p:sp>
+      <p:sp>
+        <p:nvSpPr>
+          <p:cNvPr id="256" name="path-253">
+            <a:extLst>
+              <a:ext uri="{FF2B5EF4-FFF2-40B4-BE49-F238E27FC236}">
+                <a16:creationId xmlns:a16="http://schemas.microsoft.com/office/drawing/2014/main" id="{6D3A056E-302F-4803-BC42-20C536F02A8E}"/>
+              </a:ext>
+            </a:extLst>
+          </p:cNvPr>
+          <p:cNvSpPr>
+            <a:spLocks noGrp="1"/>
+          </p:cNvSpPr>
+          <p:nvPr/>
+        </p:nvSpPr>
+        <p:spPr>
+          <a:xfrm>
+            <a:off x="14033231" y="7201062"/>
+            <a:ext cx="168706" cy="168706"/>
+          </a:xfrm>
+          <a:custGeom>
+            <a:avLst/>
+            <a:gdLst/>
+            <a:ahLst/>
+            <a:cxnLst/>
+            <a:rect l="0" t="0" r="0" b="0"/>
+            <a:pathLst>
+              <a:path w="180975" h="180975">
+                <a:moveTo>
+                  <a:pt x="0" y="0"/>
+                </a:moveTo>
+                <a:lnTo>
+                  <a:pt x="180975" y="0"/>
+                </a:lnTo>
+                <a:lnTo>
+                  <a:pt x="180975" y="180975"/>
+                </a:lnTo>
+                <a:lnTo>
+                  <a:pt x="0" y="180975"/>
+                </a:lnTo>
+                <a:close/>
+              </a:path>
+            </a:pathLst>
+          </a:custGeom>
+          <a:solidFill>
+            <a:srgbClr val="346C90"/>
+          </a:solidFill>
+          <a:ln w="5239">
+            <a:solidFill>
+              <a:srgbClr val="FFFFFF"/>
+            </a:solidFill>
+            <a:prstDash val="solid"/>
+          </a:ln>
+        </p:spPr>
+      </p:sp>
+      <p:sp>
+        <p:nvSpPr>
+          <p:cNvPr id="257" name="path-254">
+            <a:extLst>
+              <a:ext uri="{FF2B5EF4-FFF2-40B4-BE49-F238E27FC236}">
+                <a16:creationId xmlns:a16="http://schemas.microsoft.com/office/drawing/2014/main" id="{E33B8C70-3874-4528-9B4F-6DAFA66C366B}"/>
+              </a:ext>
+            </a:extLst>
+          </p:cNvPr>
+          <p:cNvSpPr>
+            <a:spLocks noGrp="1"/>
+          </p:cNvSpPr>
+          <p:nvPr/>
+        </p:nvSpPr>
+        <p:spPr>
+          <a:xfrm>
+            <a:off x="14246333" y="7201062"/>
+            <a:ext cx="168706" cy="168706"/>
+          </a:xfrm>
+          <a:custGeom>
+            <a:avLst/>
+            <a:gdLst/>
+            <a:ahLst/>
+            <a:cxnLst/>
+            <a:rect l="0" t="0" r="0" b="0"/>
+            <a:pathLst>
+              <a:path w="180975" h="180975">
+                <a:moveTo>
+                  <a:pt x="0" y="0"/>
+                </a:moveTo>
+                <a:lnTo>
+                  <a:pt x="180975" y="0"/>
+                </a:lnTo>
+                <a:lnTo>
+                  <a:pt x="180975" y="180975"/>
+                </a:lnTo>
+                <a:lnTo>
+                  <a:pt x="0" y="180975"/>
+                </a:lnTo>
+                <a:close/>
+              </a:path>
+            </a:pathLst>
+          </a:custGeom>
+          <a:solidFill>
+            <a:srgbClr val="648FAB"/>
+          </a:solidFill>
+          <a:ln w="5239">
+            <a:solidFill>
+              <a:srgbClr val="FFFFFF"/>
+            </a:solidFill>
+            <a:prstDash val="solid"/>
+          </a:ln>
+        </p:spPr>
+      </p:sp>
+      <p:sp>
+        <p:nvSpPr>
+          <p:cNvPr id="258" name="path-255">
+            <a:extLst>
+              <a:ext uri="{FF2B5EF4-FFF2-40B4-BE49-F238E27FC236}">
+                <a16:creationId xmlns:a16="http://schemas.microsoft.com/office/drawing/2014/main" id="{7864529E-D628-42C3-AE0B-7FAA5CD876CF}"/>
+              </a:ext>
+            </a:extLst>
+          </p:cNvPr>
+          <p:cNvSpPr>
+            <a:spLocks noGrp="1"/>
+          </p:cNvSpPr>
+          <p:nvPr/>
+        </p:nvSpPr>
+        <p:spPr>
+          <a:xfrm>
+            <a:off x="14459435" y="7201062"/>
+            <a:ext cx="168706" cy="168706"/>
+          </a:xfrm>
+          <a:custGeom>
+            <a:avLst/>
+            <a:gdLst/>
+            <a:ahLst/>
+            <a:cxnLst/>
+            <a:rect l="0" t="0" r="0" b="0"/>
+            <a:pathLst>
+              <a:path w="180975" h="180975">
+                <a:moveTo>
+                  <a:pt x="0" y="0"/>
+                </a:moveTo>
+                <a:lnTo>
+                  <a:pt x="180975" y="0"/>
+                </a:lnTo>
+                <a:lnTo>
+                  <a:pt x="180975" y="180975"/>
+                </a:lnTo>
+                <a:lnTo>
+                  <a:pt x="0" y="180975"/>
+                </a:lnTo>
+                <a:close/>
+              </a:path>
+            </a:pathLst>
+          </a:custGeom>
+          <a:solidFill>
+            <a:srgbClr val="B7CCD9"/>
+          </a:solidFill>
+          <a:ln w="5239">
+            <a:solidFill>
+              <a:srgbClr val="FFFFFF"/>
+            </a:solidFill>
+            <a:prstDash val="solid"/>
+          </a:ln>
+        </p:spPr>
+      </p:sp>
+      <p:sp>
+        <p:nvSpPr>
+          <p:cNvPr id="259" name="path-256">
+            <a:extLst>
+              <a:ext uri="{FF2B5EF4-FFF2-40B4-BE49-F238E27FC236}">
+                <a16:creationId xmlns:a16="http://schemas.microsoft.com/office/drawing/2014/main" id="{FB194D82-BE35-47F0-9EBC-B54B50C06CCE}"/>
+              </a:ext>
+            </a:extLst>
+          </p:cNvPr>
+          <p:cNvSpPr>
+            <a:spLocks noGrp="1"/>
+          </p:cNvSpPr>
+          <p:nvPr/>
+        </p:nvSpPr>
+        <p:spPr>
+          <a:xfrm>
+            <a:off x="14672536" y="7201062"/>
+            <a:ext cx="168706" cy="168706"/>
+          </a:xfrm>
+          <a:custGeom>
+            <a:avLst/>
+            <a:gdLst/>
+            <a:ahLst/>
+            <a:cxnLst/>
+            <a:rect l="0" t="0" r="0" b="0"/>
+            <a:pathLst>
+              <a:path w="180975" h="180975">
+                <a:moveTo>
+                  <a:pt x="0" y="0"/>
+                </a:moveTo>
+                <a:lnTo>
+                  <a:pt x="180975" y="0"/>
+                </a:lnTo>
+                <a:lnTo>
+                  <a:pt x="180975" y="180975"/>
+                </a:lnTo>
+                <a:lnTo>
+                  <a:pt x="0" y="180975"/>
+                </a:lnTo>
+                <a:close/>
+              </a:path>
+            </a:pathLst>
+          </a:custGeom>
+          <a:solidFill>
+            <a:srgbClr val="D1DFE8"/>
+          </a:solidFill>
+          <a:ln w="5239">
+            <a:solidFill>
+              <a:srgbClr val="FFFFFF"/>
+            </a:solidFill>
+            <a:prstDash val="solid"/>
+          </a:ln>
+        </p:spPr>
+      </p:sp>
+      <p:sp>
+        <p:nvSpPr>
+          <p:cNvPr id="260" name="path-257">
+            <a:extLst>
+              <a:ext uri="{FF2B5EF4-FFF2-40B4-BE49-F238E27FC236}">
+                <a16:creationId xmlns:a16="http://schemas.microsoft.com/office/drawing/2014/main" id="{816A66D4-AAEB-44E9-AC44-8A47810DF776}"/>
+              </a:ext>
+            </a:extLst>
+          </p:cNvPr>
+          <p:cNvSpPr>
+            <a:spLocks noGrp="1"/>
+          </p:cNvSpPr>
+          <p:nvPr/>
+        </p:nvSpPr>
+        <p:spPr>
+          <a:xfrm>
+            <a:off x="14885638" y="7201062"/>
+            <a:ext cx="168706" cy="168706"/>
+          </a:xfrm>
+          <a:custGeom>
+            <a:avLst/>
+            <a:gdLst/>
+            <a:ahLst/>
+            <a:cxnLst/>
+            <a:rect l="0" t="0" r="0" b="0"/>
+            <a:pathLst>
+              <a:path w="180975" h="180975">
+                <a:moveTo>
+                  <a:pt x="0" y="0"/>
+                </a:moveTo>
+                <a:lnTo>
+                  <a:pt x="180975" y="0"/>
+                </a:lnTo>
+                <a:lnTo>
+                  <a:pt x="180975" y="180975"/>
+                </a:lnTo>
+                <a:lnTo>
+                  <a:pt x="0" y="180975"/>
+                </a:lnTo>
+                <a:close/>
+              </a:path>
+            </a:pathLst>
+          </a:custGeom>
+          <a:solidFill>
+            <a:srgbClr val="D1DFE8"/>
+          </a:solidFill>
+          <a:ln w="5239">
+            <a:solidFill>
+              <a:srgbClr val="FFFFFF"/>
+            </a:solidFill>
+            <a:prstDash val="solid"/>
+          </a:ln>
+        </p:spPr>
+      </p:sp>
+      <p:sp>
+        <p:nvSpPr>
+          <p:cNvPr id="261" name="path-258">
+            <a:extLst>
+              <a:ext uri="{FF2B5EF4-FFF2-40B4-BE49-F238E27FC236}">
+                <a16:creationId xmlns:a16="http://schemas.microsoft.com/office/drawing/2014/main" id="{06D7380D-6A53-4BA2-8963-A97235FF6056}"/>
+              </a:ext>
+            </a:extLst>
+          </p:cNvPr>
+          <p:cNvSpPr>
+            <a:spLocks noGrp="1"/>
+          </p:cNvSpPr>
+          <p:nvPr/>
+        </p:nvSpPr>
+        <p:spPr>
+          <a:xfrm>
+            <a:off x="15098740" y="7201062"/>
+            <a:ext cx="168706" cy="168706"/>
+          </a:xfrm>
+          <a:custGeom>
+            <a:avLst/>
+            <a:gdLst/>
+            <a:ahLst/>
+            <a:cxnLst/>
+            <a:rect l="0" t="0" r="0" b="0"/>
+            <a:pathLst>
+              <a:path w="180975" h="180975">
+                <a:moveTo>
+                  <a:pt x="0" y="0"/>
+                </a:moveTo>
+                <a:lnTo>
+                  <a:pt x="180975" y="0"/>
+                </a:lnTo>
+                <a:lnTo>
+                  <a:pt x="180975" y="180975"/>
+                </a:lnTo>
+                <a:lnTo>
+                  <a:pt x="0" y="180975"/>
+                </a:lnTo>
+                <a:close/>
+              </a:path>
+            </a:pathLst>
+          </a:custGeom>
+          <a:solidFill>
+            <a:srgbClr val="BACFDB"/>
+          </a:solidFill>
+          <a:ln w="5239">
+            <a:solidFill>
+              <a:srgbClr val="FFFFFF"/>
+            </a:solidFill>
+            <a:prstDash val="solid"/>
+          </a:ln>
+        </p:spPr>
+      </p:sp>
+      <p:sp>
+        <p:nvSpPr>
+          <p:cNvPr id="262" name="path-259">
+            <a:extLst>
+              <a:ext uri="{FF2B5EF4-FFF2-40B4-BE49-F238E27FC236}">
+                <a16:creationId xmlns:a16="http://schemas.microsoft.com/office/drawing/2014/main" id="{ABBFF461-3C13-4C59-87E7-1BA3BBDA51E9}"/>
+              </a:ext>
+            </a:extLst>
+          </p:cNvPr>
+          <p:cNvSpPr>
+            <a:spLocks noGrp="1"/>
+          </p:cNvSpPr>
+          <p:nvPr/>
+        </p:nvSpPr>
+        <p:spPr>
+          <a:xfrm>
+            <a:off x="15311841" y="7201062"/>
+            <a:ext cx="168706" cy="168706"/>
+          </a:xfrm>
+          <a:custGeom>
+            <a:avLst/>
+            <a:gdLst/>
+            <a:ahLst/>
+            <a:cxnLst/>
+            <a:rect l="0" t="0" r="0" b="0"/>
+            <a:pathLst>
+              <a:path w="180975" h="180975">
+                <a:moveTo>
+                  <a:pt x="0" y="0"/>
+                </a:moveTo>
+                <a:lnTo>
+                  <a:pt x="180975" y="0"/>
+                </a:lnTo>
+                <a:lnTo>
+                  <a:pt x="180975" y="180975"/>
+                </a:lnTo>
+                <a:lnTo>
+                  <a:pt x="0" y="180975"/>
+                </a:lnTo>
+                <a:close/>
+              </a:path>
+            </a:pathLst>
+          </a:custGeom>
+          <a:solidFill>
+            <a:srgbClr val="6A93AE"/>
+          </a:solidFill>
+          <a:ln w="5239">
+            <a:solidFill>
+              <a:srgbClr val="FFFFFF"/>
+            </a:solidFill>
+            <a:prstDash val="solid"/>
+          </a:ln>
+        </p:spPr>
+      </p:sp>
+      <p:sp>
+        <p:nvSpPr>
+          <p:cNvPr id="263" name="path-260">
+            <a:extLst>
+              <a:ext uri="{FF2B5EF4-FFF2-40B4-BE49-F238E27FC236}">
+                <a16:creationId xmlns:a16="http://schemas.microsoft.com/office/drawing/2014/main" id="{6ED4C75B-CD8B-4229-AA0A-74F30A9C1A0F}"/>
+              </a:ext>
+            </a:extLst>
+          </p:cNvPr>
+          <p:cNvSpPr>
+            <a:spLocks noGrp="1"/>
+          </p:cNvSpPr>
+          <p:nvPr/>
+        </p:nvSpPr>
+        <p:spPr>
+          <a:xfrm>
+            <a:off x="15524943" y="7201062"/>
+            <a:ext cx="168706" cy="168706"/>
+          </a:xfrm>
+          <a:custGeom>
+            <a:avLst/>
+            <a:gdLst/>
+            <a:ahLst/>
+            <a:cxnLst/>
+            <a:rect l="0" t="0" r="0" b="0"/>
+            <a:pathLst>
+              <a:path w="180975" h="180975">
+                <a:moveTo>
+                  <a:pt x="0" y="0"/>
+                </a:moveTo>
+                <a:lnTo>
+                  <a:pt x="180975" y="0"/>
+                </a:lnTo>
+                <a:lnTo>
+                  <a:pt x="180975" y="180975"/>
+                </a:lnTo>
+                <a:lnTo>
+                  <a:pt x="0" y="180975"/>
+                </a:lnTo>
+                <a:close/>
+              </a:path>
+            </a:pathLst>
+          </a:custGeom>
+          <a:solidFill>
+            <a:srgbClr val="346C90"/>
+          </a:solidFill>
+          <a:ln w="5239">
+            <a:solidFill>
+              <a:srgbClr val="FFFFFF"/>
+            </a:solidFill>
+            <a:prstDash val="solid"/>
+          </a:ln>
+        </p:spPr>
+      </p:sp>
+      <p:sp>
+        <p:nvSpPr>
+          <p:cNvPr id="264" name="path-261">
+            <a:extLst>
+              <a:ext uri="{FF2B5EF4-FFF2-40B4-BE49-F238E27FC236}">
+                <a16:creationId xmlns:a16="http://schemas.microsoft.com/office/drawing/2014/main" id="{5ECA6C2F-A8FF-43DC-A664-6D00438B75BE}"/>
+              </a:ext>
+            </a:extLst>
+          </p:cNvPr>
+          <p:cNvSpPr>
+            <a:spLocks noGrp="1"/>
+          </p:cNvSpPr>
+          <p:nvPr/>
+        </p:nvSpPr>
+        <p:spPr>
+          <a:xfrm>
+            <a:off x="15738045" y="7201062"/>
+            <a:ext cx="168706" cy="168706"/>
+          </a:xfrm>
+          <a:custGeom>
+            <a:avLst/>
+            <a:gdLst/>
+            <a:ahLst/>
+            <a:cxnLst/>
+            <a:rect l="0" t="0" r="0" b="0"/>
+            <a:pathLst>
+              <a:path w="180975" h="180975">
+                <a:moveTo>
+                  <a:pt x="0" y="0"/>
+                </a:moveTo>
+                <a:lnTo>
+                  <a:pt x="180975" y="0"/>
+                </a:lnTo>
+                <a:lnTo>
+                  <a:pt x="180975" y="180975"/>
+                </a:lnTo>
+                <a:lnTo>
+                  <a:pt x="0" y="180975"/>
+                </a:lnTo>
+                <a:close/>
+              </a:path>
+            </a:pathLst>
+          </a:custGeom>
+          <a:solidFill>
+            <a:srgbClr val="6C95B0"/>
+          </a:solidFill>
+          <a:ln w="5239">
+            <a:solidFill>
+              <a:srgbClr val="FFFFFF"/>
+            </a:solidFill>
+            <a:prstDash val="solid"/>
+          </a:ln>
+        </p:spPr>
+      </p:sp>
+      <p:sp>
+        <p:nvSpPr>
+          <p:cNvPr id="265" name="path-262">
+            <a:extLst>
+              <a:ext uri="{FF2B5EF4-FFF2-40B4-BE49-F238E27FC236}">
+                <a16:creationId xmlns:a16="http://schemas.microsoft.com/office/drawing/2014/main" id="{7C9FA821-9E0D-4702-9778-E3F90F56A594}"/>
+              </a:ext>
+            </a:extLst>
+          </p:cNvPr>
+          <p:cNvSpPr>
+            <a:spLocks noGrp="1"/>
+          </p:cNvSpPr>
+          <p:nvPr/>
+        </p:nvSpPr>
+        <p:spPr>
+          <a:xfrm>
+            <a:off x="13393926" y="7414163"/>
             <a:ext cx="168706" cy="168706"/>
           </a:xfrm>
           <a:custGeom>
@@ -16375,21 +18868,237 @@
       </p:sp>
       <p:sp>
         <p:nvSpPr>
-          <p:cNvPr id="214" name="path-211">
-            <a:extLst>
-              <a:ext uri="{FF2B5EF4-FFF2-40B4-BE49-F238E27FC236}">
-                <a16:creationId xmlns:a16="http://schemas.microsoft.com/office/drawing/2014/main" id="{903ABD25-E7F1-4D39-9C8B-C48D12462F17}"/>
-              </a:ext>
-            </a:extLst>
-          </p:cNvPr>
-          <p:cNvSpPr>
-            <a:spLocks noGrp="1"/>
-          </p:cNvSpPr>
-          <p:nvPr/>
-        </p:nvSpPr>
-        <p:spPr>
-          <a:xfrm>
-            <a:off x="15311841" y="6348655"/>
+          <p:cNvPr id="267" name="path-264">
+            <a:extLst>
+              <a:ext uri="{FF2B5EF4-FFF2-40B4-BE49-F238E27FC236}">
+                <a16:creationId xmlns:a16="http://schemas.microsoft.com/office/drawing/2014/main" id="{5DE1C58E-1143-4C3A-A784-81AB74D2ECBE}"/>
+              </a:ext>
+            </a:extLst>
+          </p:cNvPr>
+          <p:cNvSpPr>
+            <a:spLocks noGrp="1"/>
+          </p:cNvSpPr>
+          <p:nvPr/>
+        </p:nvSpPr>
+        <p:spPr>
+          <a:xfrm>
+            <a:off x="13820129" y="7414163"/>
+            <a:ext cx="168706" cy="168706"/>
+          </a:xfrm>
+          <a:custGeom>
+            <a:avLst/>
+            <a:gdLst/>
+            <a:ahLst/>
+            <a:cxnLst/>
+            <a:rect l="0" t="0" r="0" b="0"/>
+            <a:pathLst>
+              <a:path w="180975" h="180975">
+                <a:moveTo>
+                  <a:pt x="0" y="0"/>
+                </a:moveTo>
+                <a:lnTo>
+                  <a:pt x="180975" y="0"/>
+                </a:lnTo>
+                <a:lnTo>
+                  <a:pt x="180975" y="180975"/>
+                </a:lnTo>
+                <a:lnTo>
+                  <a:pt x="0" y="180975"/>
+                </a:lnTo>
+                <a:close/>
+              </a:path>
+            </a:pathLst>
+          </a:custGeom>
+          <a:solidFill>
+            <a:srgbClr val="417697"/>
+          </a:solidFill>
+          <a:ln w="5239">
+            <a:solidFill>
+              <a:srgbClr val="FFFFFF"/>
+            </a:solidFill>
+            <a:prstDash val="solid"/>
+          </a:ln>
+        </p:spPr>
+      </p:sp>
+      <p:sp>
+        <p:nvSpPr>
+          <p:cNvPr id="268" name="path-265">
+            <a:extLst>
+              <a:ext uri="{FF2B5EF4-FFF2-40B4-BE49-F238E27FC236}">
+                <a16:creationId xmlns:a16="http://schemas.microsoft.com/office/drawing/2014/main" id="{69EC55F9-57D7-4212-A3AB-3970324A0675}"/>
+              </a:ext>
+            </a:extLst>
+          </p:cNvPr>
+          <p:cNvSpPr>
+            <a:spLocks noGrp="1"/>
+          </p:cNvSpPr>
+          <p:nvPr/>
+        </p:nvSpPr>
+        <p:spPr>
+          <a:xfrm>
+            <a:off x="14033231" y="7414163"/>
+            <a:ext cx="168706" cy="168706"/>
+          </a:xfrm>
+          <a:custGeom>
+            <a:avLst/>
+            <a:gdLst/>
+            <a:ahLst/>
+            <a:cxnLst/>
+            <a:rect l="0" t="0" r="0" b="0"/>
+            <a:pathLst>
+              <a:path w="180975" h="180975">
+                <a:moveTo>
+                  <a:pt x="0" y="0"/>
+                </a:moveTo>
+                <a:lnTo>
+                  <a:pt x="180975" y="0"/>
+                </a:lnTo>
+                <a:lnTo>
+                  <a:pt x="180975" y="180975"/>
+                </a:lnTo>
+                <a:lnTo>
+                  <a:pt x="0" y="180975"/>
+                </a:lnTo>
+                <a:close/>
+              </a:path>
+            </a:pathLst>
+          </a:custGeom>
+          <a:solidFill>
+            <a:srgbClr val="467A9A"/>
+          </a:solidFill>
+          <a:ln w="5239">
+            <a:solidFill>
+              <a:srgbClr val="FFFFFF"/>
+            </a:solidFill>
+            <a:prstDash val="solid"/>
+          </a:ln>
+        </p:spPr>
+      </p:sp>
+      <p:sp>
+        <p:nvSpPr>
+          <p:cNvPr id="269" name="path-266">
+            <a:extLst>
+              <a:ext uri="{FF2B5EF4-FFF2-40B4-BE49-F238E27FC236}">
+                <a16:creationId xmlns:a16="http://schemas.microsoft.com/office/drawing/2014/main" id="{91C6DB8C-0C8E-4CE2-BD4D-9CB79619D046}"/>
+              </a:ext>
+            </a:extLst>
+          </p:cNvPr>
+          <p:cNvSpPr>
+            <a:spLocks noGrp="1"/>
+          </p:cNvSpPr>
+          <p:nvPr/>
+        </p:nvSpPr>
+        <p:spPr>
+          <a:xfrm>
+            <a:off x="14246333" y="7414163"/>
+            <a:ext cx="168706" cy="168706"/>
+          </a:xfrm>
+          <a:custGeom>
+            <a:avLst/>
+            <a:gdLst/>
+            <a:ahLst/>
+            <a:cxnLst/>
+            <a:rect l="0" t="0" r="0" b="0"/>
+            <a:pathLst>
+              <a:path w="180975" h="180975">
+                <a:moveTo>
+                  <a:pt x="0" y="0"/>
+                </a:moveTo>
+                <a:lnTo>
+                  <a:pt x="180975" y="0"/>
+                </a:lnTo>
+                <a:lnTo>
+                  <a:pt x="180975" y="180975"/>
+                </a:lnTo>
+                <a:lnTo>
+                  <a:pt x="0" y="180975"/>
+                </a:lnTo>
+                <a:close/>
+              </a:path>
+            </a:pathLst>
+          </a:custGeom>
+          <a:solidFill>
+            <a:srgbClr val="9CB8CA"/>
+          </a:solidFill>
+          <a:ln w="5239">
+            <a:solidFill>
+              <a:srgbClr val="FFFFFF"/>
+            </a:solidFill>
+            <a:prstDash val="solid"/>
+          </a:ln>
+        </p:spPr>
+      </p:sp>
+      <p:sp>
+        <p:nvSpPr>
+          <p:cNvPr id="270" name="path-267">
+            <a:extLst>
+              <a:ext uri="{FF2B5EF4-FFF2-40B4-BE49-F238E27FC236}">
+                <a16:creationId xmlns:a16="http://schemas.microsoft.com/office/drawing/2014/main" id="{96176644-D097-44A8-8F27-A2634A23EC18}"/>
+              </a:ext>
+            </a:extLst>
+          </p:cNvPr>
+          <p:cNvSpPr>
+            <a:spLocks noGrp="1"/>
+          </p:cNvSpPr>
+          <p:nvPr/>
+        </p:nvSpPr>
+        <p:spPr>
+          <a:xfrm>
+            <a:off x="14459435" y="7414163"/>
+            <a:ext cx="168706" cy="168706"/>
+          </a:xfrm>
+          <a:custGeom>
+            <a:avLst/>
+            <a:gdLst/>
+            <a:ahLst/>
+            <a:cxnLst/>
+            <a:rect l="0" t="0" r="0" b="0"/>
+            <a:pathLst>
+              <a:path w="180975" h="180975">
+                <a:moveTo>
+                  <a:pt x="0" y="0"/>
+                </a:moveTo>
+                <a:lnTo>
+                  <a:pt x="180975" y="0"/>
+                </a:lnTo>
+                <a:lnTo>
+                  <a:pt x="180975" y="180975"/>
+                </a:lnTo>
+                <a:lnTo>
+                  <a:pt x="0" y="180975"/>
+                </a:lnTo>
+                <a:close/>
+              </a:path>
+            </a:pathLst>
+          </a:custGeom>
+          <a:solidFill>
+            <a:srgbClr val="CDDDE6"/>
+          </a:solidFill>
+          <a:ln w="5239">
+            <a:solidFill>
+              <a:srgbClr val="FFFFFF"/>
+            </a:solidFill>
+            <a:prstDash val="solid"/>
+          </a:ln>
+        </p:spPr>
+      </p:sp>
+      <p:sp>
+        <p:nvSpPr>
+          <p:cNvPr id="271" name="path-268">
+            <a:extLst>
+              <a:ext uri="{FF2B5EF4-FFF2-40B4-BE49-F238E27FC236}">
+                <a16:creationId xmlns:a16="http://schemas.microsoft.com/office/drawing/2014/main" id="{41545B2A-2A0A-45B2-A878-91DC6AD97053}"/>
+              </a:ext>
+            </a:extLst>
+          </p:cNvPr>
+          <p:cNvSpPr>
+            <a:spLocks noGrp="1"/>
+          </p:cNvSpPr>
+          <p:nvPr/>
+        </p:nvSpPr>
+        <p:spPr>
+          <a:xfrm>
+            <a:off x="14672536" y="7414163"/>
             <a:ext cx="168706" cy="168706"/>
           </a:xfrm>
           <a:custGeom>
@@ -16429,21 +19138,21 @@
       </p:sp>
       <p:sp>
         <p:nvSpPr>
-          <p:cNvPr id="215" name="path-212">
-            <a:extLst>
-              <a:ext uri="{FF2B5EF4-FFF2-40B4-BE49-F238E27FC236}">
-                <a16:creationId xmlns:a16="http://schemas.microsoft.com/office/drawing/2014/main" id="{2E25A650-7FAB-4ED1-88A7-248475CCB60B}"/>
-              </a:ext>
-            </a:extLst>
-          </p:cNvPr>
-          <p:cNvSpPr>
-            <a:spLocks noGrp="1"/>
-          </p:cNvSpPr>
-          <p:nvPr/>
-        </p:nvSpPr>
-        <p:spPr>
-          <a:xfrm>
-            <a:off x="15524943" y="6348655"/>
+          <p:cNvPr id="272" name="path-269">
+            <a:extLst>
+              <a:ext uri="{FF2B5EF4-FFF2-40B4-BE49-F238E27FC236}">
+                <a16:creationId xmlns:a16="http://schemas.microsoft.com/office/drawing/2014/main" id="{91FF800E-D048-4B3A-AF38-1EEA4883FE9A}"/>
+              </a:ext>
+            </a:extLst>
+          </p:cNvPr>
+          <p:cNvSpPr>
+            <a:spLocks noGrp="1"/>
+          </p:cNvSpPr>
+          <p:nvPr/>
+        </p:nvSpPr>
+        <p:spPr>
+          <a:xfrm>
+            <a:off x="14885638" y="7414163"/>
             <a:ext cx="168706" cy="168706"/>
           </a:xfrm>
           <a:custGeom>
@@ -16471,7 +19180,7 @@
             </a:pathLst>
           </a:custGeom>
           <a:solidFill>
-            <a:srgbClr val="CCDCE6"/>
+            <a:srgbClr val="C9DAE4"/>
           </a:solidFill>
           <a:ln w="5239">
             <a:solidFill>
@@ -16483,21 +19192,21 @@
       </p:sp>
       <p:sp>
         <p:nvSpPr>
-          <p:cNvPr id="216" name="path-213">
-            <a:extLst>
-              <a:ext uri="{FF2B5EF4-FFF2-40B4-BE49-F238E27FC236}">
-                <a16:creationId xmlns:a16="http://schemas.microsoft.com/office/drawing/2014/main" id="{756439CF-CB40-458F-832F-798FFD943376}"/>
-              </a:ext>
-            </a:extLst>
-          </p:cNvPr>
-          <p:cNvSpPr>
-            <a:spLocks noGrp="1"/>
-          </p:cNvSpPr>
-          <p:nvPr/>
-        </p:nvSpPr>
-        <p:spPr>
-          <a:xfrm>
-            <a:off x="15738045" y="6348655"/>
+          <p:cNvPr id="273" name="path-270">
+            <a:extLst>
+              <a:ext uri="{FF2B5EF4-FFF2-40B4-BE49-F238E27FC236}">
+                <a16:creationId xmlns:a16="http://schemas.microsoft.com/office/drawing/2014/main" id="{426CE33E-8D31-45D0-99C3-BF5B943874EF}"/>
+              </a:ext>
+            </a:extLst>
+          </p:cNvPr>
+          <p:cNvSpPr>
+            <a:spLocks noGrp="1"/>
+          </p:cNvSpPr>
+          <p:nvPr/>
+        </p:nvSpPr>
+        <p:spPr>
+          <a:xfrm>
+            <a:off x="15098740" y="7414163"/>
             <a:ext cx="168706" cy="168706"/>
           </a:xfrm>
           <a:custGeom>
@@ -16525,7 +19234,7 @@
             </a:pathLst>
           </a:custGeom>
           <a:solidFill>
-            <a:srgbClr val="97B5C8"/>
+            <a:srgbClr val="8CADC1"/>
           </a:solidFill>
           <a:ln w="5239">
             <a:solidFill>
@@ -16537,21 +19246,21 @@
       </p:sp>
       <p:sp>
         <p:nvSpPr>
-          <p:cNvPr id="217" name="path-214">
-            <a:extLst>
-              <a:ext uri="{FF2B5EF4-FFF2-40B4-BE49-F238E27FC236}">
-                <a16:creationId xmlns:a16="http://schemas.microsoft.com/office/drawing/2014/main" id="{C94F6480-92ED-4D57-9B49-E301AFEF0B14}"/>
-              </a:ext>
-            </a:extLst>
-          </p:cNvPr>
-          <p:cNvSpPr>
-            <a:spLocks noGrp="1"/>
-          </p:cNvSpPr>
-          <p:nvPr/>
-        </p:nvSpPr>
-        <p:spPr>
-          <a:xfrm>
-            <a:off x="13393926" y="6561757"/>
+          <p:cNvPr id="274" name="path-271">
+            <a:extLst>
+              <a:ext uri="{FF2B5EF4-FFF2-40B4-BE49-F238E27FC236}">
+                <a16:creationId xmlns:a16="http://schemas.microsoft.com/office/drawing/2014/main" id="{31EFE6C8-CE3F-4B0C-B72C-A5A700C17C6E}"/>
+              </a:ext>
+            </a:extLst>
+          </p:cNvPr>
+          <p:cNvSpPr>
+            <a:spLocks noGrp="1"/>
+          </p:cNvSpPr>
+          <p:nvPr/>
+        </p:nvSpPr>
+        <p:spPr>
+          <a:xfrm>
+            <a:off x="15311841" y="7414163"/>
             <a:ext cx="168706" cy="168706"/>
           </a:xfrm>
           <a:custGeom>
@@ -16579,7 +19288,7 @@
             </a:pathLst>
           </a:custGeom>
           <a:solidFill>
-            <a:srgbClr val="B8CDDA"/>
+            <a:srgbClr val="3C7295"/>
           </a:solidFill>
           <a:ln w="5239">
             <a:solidFill>
@@ -16591,21 +19300,21 @@
       </p:sp>
       <p:sp>
         <p:nvSpPr>
-          <p:cNvPr id="218" name="path-215">
-            <a:extLst>
-              <a:ext uri="{FF2B5EF4-FFF2-40B4-BE49-F238E27FC236}">
-                <a16:creationId xmlns:a16="http://schemas.microsoft.com/office/drawing/2014/main" id="{87FDE4F7-B6F6-4666-84B0-BA9FF7C888EA}"/>
-              </a:ext>
-            </a:extLst>
-          </p:cNvPr>
-          <p:cNvSpPr>
-            <a:spLocks noGrp="1"/>
-          </p:cNvSpPr>
-          <p:nvPr/>
-        </p:nvSpPr>
-        <p:spPr>
-          <a:xfrm>
-            <a:off x="13607028" y="6561757"/>
+          <p:cNvPr id="275" name="path-272">
+            <a:extLst>
+              <a:ext uri="{FF2B5EF4-FFF2-40B4-BE49-F238E27FC236}">
+                <a16:creationId xmlns:a16="http://schemas.microsoft.com/office/drawing/2014/main" id="{14A0AD83-FDC0-47A0-908B-ED60BE2C6CA7}"/>
+              </a:ext>
+            </a:extLst>
+          </p:cNvPr>
+          <p:cNvSpPr>
+            <a:spLocks noGrp="1"/>
+          </p:cNvSpPr>
+          <p:nvPr/>
+        </p:nvSpPr>
+        <p:spPr>
+          <a:xfrm>
+            <a:off x="15524943" y="7414163"/>
             <a:ext cx="168706" cy="168706"/>
           </a:xfrm>
           <a:custGeom>
@@ -16633,7 +19342,7 @@
             </a:pathLst>
           </a:custGeom>
           <a:solidFill>
-            <a:srgbClr val="D1DFE8"/>
+            <a:srgbClr val="4D7E9E"/>
           </a:solidFill>
           <a:ln w="5239">
             <a:solidFill>
@@ -16645,21 +19354,21 @@
       </p:sp>
       <p:sp>
         <p:nvSpPr>
-          <p:cNvPr id="219" name="path-216">
-            <a:extLst>
-              <a:ext uri="{FF2B5EF4-FFF2-40B4-BE49-F238E27FC236}">
-                <a16:creationId xmlns:a16="http://schemas.microsoft.com/office/drawing/2014/main" id="{0C081246-D774-4CC8-AA2B-BFCB2047DA64}"/>
-              </a:ext>
-            </a:extLst>
-          </p:cNvPr>
-          <p:cNvSpPr>
-            <a:spLocks noGrp="1"/>
-          </p:cNvSpPr>
-          <p:nvPr/>
-        </p:nvSpPr>
-        <p:spPr>
-          <a:xfrm>
-            <a:off x="13820129" y="6561757"/>
+          <p:cNvPr id="276" name="path-273">
+            <a:extLst>
+              <a:ext uri="{FF2B5EF4-FFF2-40B4-BE49-F238E27FC236}">
+                <a16:creationId xmlns:a16="http://schemas.microsoft.com/office/drawing/2014/main" id="{74AC32C3-5D37-4092-98A2-09F1DCD95427}"/>
+              </a:ext>
+            </a:extLst>
+          </p:cNvPr>
+          <p:cNvSpPr>
+            <a:spLocks noGrp="1"/>
+          </p:cNvSpPr>
+          <p:nvPr/>
+        </p:nvSpPr>
+        <p:spPr>
+          <a:xfrm>
+            <a:off x="15738045" y="7414163"/>
             <a:ext cx="168706" cy="168706"/>
           </a:xfrm>
           <a:custGeom>
@@ -16687,7 +19396,7 @@
             </a:pathLst>
           </a:custGeom>
           <a:solidFill>
-            <a:srgbClr val="D1DFE8"/>
+            <a:srgbClr val="A4BECF"/>
           </a:solidFill>
           <a:ln w="5239">
             <a:solidFill>
@@ -16699,21 +19408,21 @@
       </p:sp>
       <p:sp>
         <p:nvSpPr>
-          <p:cNvPr id="220" name="path-217">
-            <a:extLst>
-              <a:ext uri="{FF2B5EF4-FFF2-40B4-BE49-F238E27FC236}">
-                <a16:creationId xmlns:a16="http://schemas.microsoft.com/office/drawing/2014/main" id="{AD69E60A-9C77-4B3A-82CB-6509EEF44847}"/>
-              </a:ext>
-            </a:extLst>
-          </p:cNvPr>
-          <p:cNvSpPr>
-            <a:spLocks noGrp="1"/>
-          </p:cNvSpPr>
-          <p:nvPr/>
-        </p:nvSpPr>
-        <p:spPr>
-          <a:xfrm>
-            <a:off x="14033231" y="6561757"/>
+          <p:cNvPr id="277" name="path-274">
+            <a:extLst>
+              <a:ext uri="{FF2B5EF4-FFF2-40B4-BE49-F238E27FC236}">
+                <a16:creationId xmlns:a16="http://schemas.microsoft.com/office/drawing/2014/main" id="{F02E5EF3-976B-4EE3-87F1-0854C8337281}"/>
+              </a:ext>
+            </a:extLst>
+          </p:cNvPr>
+          <p:cNvSpPr>
+            <a:spLocks noGrp="1"/>
+          </p:cNvSpPr>
+          <p:nvPr/>
+        </p:nvSpPr>
+        <p:spPr>
+          <a:xfrm>
+            <a:off x="13393926" y="7627265"/>
             <a:ext cx="168706" cy="168706"/>
           </a:xfrm>
           <a:custGeom>
@@ -16741,7 +19450,7 @@
             </a:pathLst>
           </a:custGeom>
           <a:solidFill>
-            <a:srgbClr val="B9CEDB"/>
+            <a:srgbClr val="B1C8D6"/>
           </a:solidFill>
           <a:ln w="5239">
             <a:solidFill>
@@ -16753,21 +19462,21 @@
       </p:sp>
       <p:sp>
         <p:nvSpPr>
-          <p:cNvPr id="221" name="path-218">
-            <a:extLst>
-              <a:ext uri="{FF2B5EF4-FFF2-40B4-BE49-F238E27FC236}">
-                <a16:creationId xmlns:a16="http://schemas.microsoft.com/office/drawing/2014/main" id="{DA44EA3F-1FD3-4D9B-91AE-FDCEBB3A81B4}"/>
-              </a:ext>
-            </a:extLst>
-          </p:cNvPr>
-          <p:cNvSpPr>
-            <a:spLocks noGrp="1"/>
-          </p:cNvSpPr>
-          <p:nvPr/>
-        </p:nvSpPr>
-        <p:spPr>
-          <a:xfrm>
-            <a:off x="14246333" y="6561757"/>
+          <p:cNvPr id="279" name="path-276">
+            <a:extLst>
+              <a:ext uri="{FF2B5EF4-FFF2-40B4-BE49-F238E27FC236}">
+                <a16:creationId xmlns:a16="http://schemas.microsoft.com/office/drawing/2014/main" id="{7C5DEC7F-4551-4360-8165-DC68DA815532}"/>
+              </a:ext>
+            </a:extLst>
+          </p:cNvPr>
+          <p:cNvSpPr>
+            <a:spLocks noGrp="1"/>
+          </p:cNvSpPr>
+          <p:nvPr/>
+        </p:nvSpPr>
+        <p:spPr>
+          <a:xfrm>
+            <a:off x="13820129" y="7627265"/>
             <a:ext cx="168706" cy="168706"/>
           </a:xfrm>
           <a:custGeom>
@@ -16795,7 +19504,7 @@
             </a:pathLst>
           </a:custGeom>
           <a:solidFill>
-            <a:srgbClr val="6792AD"/>
+            <a:srgbClr val="366D91"/>
           </a:solidFill>
           <a:ln w="5239">
             <a:solidFill>
@@ -16807,21 +19516,21 @@
       </p:sp>
       <p:sp>
         <p:nvSpPr>
-          <p:cNvPr id="222" name="path-219">
-            <a:extLst>
-              <a:ext uri="{FF2B5EF4-FFF2-40B4-BE49-F238E27FC236}">
-                <a16:creationId xmlns:a16="http://schemas.microsoft.com/office/drawing/2014/main" id="{9B9960B2-2C0B-4B26-A4C8-3FF4AF486CE7}"/>
-              </a:ext>
-            </a:extLst>
-          </p:cNvPr>
-          <p:cNvSpPr>
-            <a:spLocks noGrp="1"/>
-          </p:cNvSpPr>
-          <p:nvPr/>
-        </p:nvSpPr>
-        <p:spPr>
-          <a:xfrm>
-            <a:off x="14459435" y="6561757"/>
+          <p:cNvPr id="280" name="path-277">
+            <a:extLst>
+              <a:ext uri="{FF2B5EF4-FFF2-40B4-BE49-F238E27FC236}">
+                <a16:creationId xmlns:a16="http://schemas.microsoft.com/office/drawing/2014/main" id="{95009EA3-76AE-4F28-AABE-8529C85ACB47}"/>
+              </a:ext>
+            </a:extLst>
+          </p:cNvPr>
+          <p:cNvSpPr>
+            <a:spLocks noGrp="1"/>
+          </p:cNvSpPr>
+          <p:nvPr/>
+        </p:nvSpPr>
+        <p:spPr>
+          <a:xfrm>
+            <a:off x="14033231" y="7627265"/>
             <a:ext cx="168706" cy="168706"/>
           </a:xfrm>
           <a:custGeom>
@@ -16849,7 +19558,7 @@
             </a:pathLst>
           </a:custGeom>
           <a:solidFill>
-            <a:srgbClr val="346C90"/>
+            <a:srgbClr val="7BA0B8"/>
           </a:solidFill>
           <a:ln w="5239">
             <a:solidFill>
@@ -16861,21 +19570,21 @@
       </p:sp>
       <p:sp>
         <p:nvSpPr>
-          <p:cNvPr id="223" name="path-220">
-            <a:extLst>
-              <a:ext uri="{FF2B5EF4-FFF2-40B4-BE49-F238E27FC236}">
-                <a16:creationId xmlns:a16="http://schemas.microsoft.com/office/drawing/2014/main" id="{D191754F-60F3-44BE-ACB8-0098E6E5DFC0}"/>
-              </a:ext>
-            </a:extLst>
-          </p:cNvPr>
-          <p:cNvSpPr>
-            <a:spLocks noGrp="1"/>
-          </p:cNvSpPr>
-          <p:nvPr/>
-        </p:nvSpPr>
-        <p:spPr>
-          <a:xfrm>
-            <a:off x="14672536" y="6561757"/>
+          <p:cNvPr id="281" name="path-278">
+            <a:extLst>
+              <a:ext uri="{FF2B5EF4-FFF2-40B4-BE49-F238E27FC236}">
+                <a16:creationId xmlns:a16="http://schemas.microsoft.com/office/drawing/2014/main" id="{03D0A6A1-5285-45EF-BC7A-05406E33CA09}"/>
+              </a:ext>
+            </a:extLst>
+          </p:cNvPr>
+          <p:cNvSpPr>
+            <a:spLocks noGrp="1"/>
+          </p:cNvSpPr>
+          <p:nvPr/>
+        </p:nvSpPr>
+        <p:spPr>
+          <a:xfrm>
+            <a:off x="14246333" y="7627265"/>
             <a:ext cx="168706" cy="168706"/>
           </a:xfrm>
           <a:custGeom>
@@ -16903,7 +19612,7 @@
             </a:pathLst>
           </a:custGeom>
           <a:solidFill>
-            <a:srgbClr val="6F97B1"/>
+            <a:srgbClr val="C3D5E0"/>
           </a:solidFill>
           <a:ln w="5239">
             <a:solidFill>
@@ -16915,21 +19624,21 @@
       </p:sp>
       <p:sp>
         <p:nvSpPr>
-          <p:cNvPr id="224" name="path-221">
-            <a:extLst>
-              <a:ext uri="{FF2B5EF4-FFF2-40B4-BE49-F238E27FC236}">
-                <a16:creationId xmlns:a16="http://schemas.microsoft.com/office/drawing/2014/main" id="{A8A347D8-C89E-4EA8-8030-1E9A994354CD}"/>
-              </a:ext>
-            </a:extLst>
-          </p:cNvPr>
-          <p:cNvSpPr>
-            <a:spLocks noGrp="1"/>
-          </p:cNvSpPr>
-          <p:nvPr/>
-        </p:nvSpPr>
-        <p:spPr>
-          <a:xfrm>
-            <a:off x="14885638" y="6561757"/>
+          <p:cNvPr id="282" name="path-279">
+            <a:extLst>
+              <a:ext uri="{FF2B5EF4-FFF2-40B4-BE49-F238E27FC236}">
+                <a16:creationId xmlns:a16="http://schemas.microsoft.com/office/drawing/2014/main" id="{EF5B97F9-F360-4DCB-AED3-759B9BABA919}"/>
+              </a:ext>
+            </a:extLst>
+          </p:cNvPr>
+          <p:cNvSpPr>
+            <a:spLocks noGrp="1"/>
+          </p:cNvSpPr>
+          <p:nvPr/>
+        </p:nvSpPr>
+        <p:spPr>
+          <a:xfrm>
+            <a:off x="14459435" y="7627265"/>
             <a:ext cx="168706" cy="168706"/>
           </a:xfrm>
           <a:custGeom>
@@ -16957,7 +19666,7 @@
             </a:pathLst>
           </a:custGeom>
           <a:solidFill>
-            <a:srgbClr val="BDD1DD"/>
+            <a:srgbClr val="D1E0E8"/>
           </a:solidFill>
           <a:ln w="5239">
             <a:solidFill>
@@ -16969,21 +19678,21 @@
       </p:sp>
       <p:sp>
         <p:nvSpPr>
-          <p:cNvPr id="225" name="path-222">
-            <a:extLst>
-              <a:ext uri="{FF2B5EF4-FFF2-40B4-BE49-F238E27FC236}">
-                <a16:creationId xmlns:a16="http://schemas.microsoft.com/office/drawing/2014/main" id="{B9562C8E-0078-4E32-B846-6F2518024D04}"/>
-              </a:ext>
-            </a:extLst>
-          </p:cNvPr>
-          <p:cNvSpPr>
-            <a:spLocks noGrp="1"/>
-          </p:cNvSpPr>
-          <p:nvPr/>
-        </p:nvSpPr>
-        <p:spPr>
-          <a:xfrm>
-            <a:off x="15098740" y="6561757"/>
+          <p:cNvPr id="283" name="path-280">
+            <a:extLst>
+              <a:ext uri="{FF2B5EF4-FFF2-40B4-BE49-F238E27FC236}">
+                <a16:creationId xmlns:a16="http://schemas.microsoft.com/office/drawing/2014/main" id="{A7E66C71-ADEA-4272-8294-1E10617FE99A}"/>
+              </a:ext>
+            </a:extLst>
+          </p:cNvPr>
+          <p:cNvSpPr>
+            <a:spLocks noGrp="1"/>
+          </p:cNvSpPr>
+          <p:nvPr/>
+        </p:nvSpPr>
+        <p:spPr>
+          <a:xfrm>
+            <a:off x="14672536" y="7627265"/>
             <a:ext cx="168706" cy="168706"/>
           </a:xfrm>
           <a:custGeom>
@@ -17011,7 +19720,7 @@
             </a:pathLst>
           </a:custGeom>
           <a:solidFill>
-            <a:srgbClr val="D1DFE8"/>
+            <a:srgbClr val="D0DEE7"/>
           </a:solidFill>
           <a:ln w="5239">
             <a:solidFill>
@@ -17023,21 +19732,453 @@
       </p:sp>
       <p:sp>
         <p:nvSpPr>
-          <p:cNvPr id="226" name="path-223">
-            <a:extLst>
-              <a:ext uri="{FF2B5EF4-FFF2-40B4-BE49-F238E27FC236}">
-                <a16:creationId xmlns:a16="http://schemas.microsoft.com/office/drawing/2014/main" id="{A7CC0CB1-96BC-413D-AE81-CE89FB4751A8}"/>
-              </a:ext>
-            </a:extLst>
-          </p:cNvPr>
-          <p:cNvSpPr>
-            <a:spLocks noGrp="1"/>
-          </p:cNvSpPr>
-          <p:nvPr/>
-        </p:nvSpPr>
-        <p:spPr>
-          <a:xfrm>
-            <a:off x="15311841" y="6561757"/>
+          <p:cNvPr id="284" name="path-281">
+            <a:extLst>
+              <a:ext uri="{FF2B5EF4-FFF2-40B4-BE49-F238E27FC236}">
+                <a16:creationId xmlns:a16="http://schemas.microsoft.com/office/drawing/2014/main" id="{B756F57F-EDFA-4DA6-9991-FDEE14562617}"/>
+              </a:ext>
+            </a:extLst>
+          </p:cNvPr>
+          <p:cNvSpPr>
+            <a:spLocks noGrp="1"/>
+          </p:cNvSpPr>
+          <p:nvPr/>
+        </p:nvSpPr>
+        <p:spPr>
+          <a:xfrm>
+            <a:off x="14885638" y="7627265"/>
+            <a:ext cx="168706" cy="168706"/>
+          </a:xfrm>
+          <a:custGeom>
+            <a:avLst/>
+            <a:gdLst/>
+            <a:ahLst/>
+            <a:cxnLst/>
+            <a:rect l="0" t="0" r="0" b="0"/>
+            <a:pathLst>
+              <a:path w="180975" h="180975">
+                <a:moveTo>
+                  <a:pt x="0" y="0"/>
+                </a:moveTo>
+                <a:lnTo>
+                  <a:pt x="180975" y="0"/>
+                </a:lnTo>
+                <a:lnTo>
+                  <a:pt x="180975" y="180975"/>
+                </a:lnTo>
+                <a:lnTo>
+                  <a:pt x="0" y="180975"/>
+                </a:lnTo>
+                <a:close/>
+              </a:path>
+            </a:pathLst>
+          </a:custGeom>
+          <a:solidFill>
+            <a:srgbClr val="AAC3D3"/>
+          </a:solidFill>
+          <a:ln w="5239">
+            <a:solidFill>
+              <a:srgbClr val="FFFFFF"/>
+            </a:solidFill>
+            <a:prstDash val="solid"/>
+          </a:ln>
+        </p:spPr>
+      </p:sp>
+      <p:sp>
+        <p:nvSpPr>
+          <p:cNvPr id="285" name="path-282">
+            <a:extLst>
+              <a:ext uri="{FF2B5EF4-FFF2-40B4-BE49-F238E27FC236}">
+                <a16:creationId xmlns:a16="http://schemas.microsoft.com/office/drawing/2014/main" id="{6FCB5EE0-F4AD-4378-837E-1426F0F25812}"/>
+              </a:ext>
+            </a:extLst>
+          </p:cNvPr>
+          <p:cNvSpPr>
+            <a:spLocks noGrp="1"/>
+          </p:cNvSpPr>
+          <p:nvPr/>
+        </p:nvSpPr>
+        <p:spPr>
+          <a:xfrm>
+            <a:off x="15098740" y="7627265"/>
+            <a:ext cx="168706" cy="168706"/>
+          </a:xfrm>
+          <a:custGeom>
+            <a:avLst/>
+            <a:gdLst/>
+            <a:ahLst/>
+            <a:cxnLst/>
+            <a:rect l="0" t="0" r="0" b="0"/>
+            <a:pathLst>
+              <a:path w="180975" h="180975">
+                <a:moveTo>
+                  <a:pt x="0" y="0"/>
+                </a:moveTo>
+                <a:lnTo>
+                  <a:pt x="180975" y="0"/>
+                </a:lnTo>
+                <a:lnTo>
+                  <a:pt x="180975" y="180975"/>
+                </a:lnTo>
+                <a:lnTo>
+                  <a:pt x="0" y="180975"/>
+                </a:lnTo>
+                <a:close/>
+              </a:path>
+            </a:pathLst>
+          </a:custGeom>
+          <a:solidFill>
+            <a:srgbClr val="5483A2"/>
+          </a:solidFill>
+          <a:ln w="5239">
+            <a:solidFill>
+              <a:srgbClr val="FFFFFF"/>
+            </a:solidFill>
+            <a:prstDash val="solid"/>
+          </a:ln>
+        </p:spPr>
+      </p:sp>
+      <p:sp>
+        <p:nvSpPr>
+          <p:cNvPr id="286" name="path-283">
+            <a:extLst>
+              <a:ext uri="{FF2B5EF4-FFF2-40B4-BE49-F238E27FC236}">
+                <a16:creationId xmlns:a16="http://schemas.microsoft.com/office/drawing/2014/main" id="{B952173E-00C9-4B0E-98E5-006F63AC2D2A}"/>
+              </a:ext>
+            </a:extLst>
+          </p:cNvPr>
+          <p:cNvSpPr>
+            <a:spLocks noGrp="1"/>
+          </p:cNvSpPr>
+          <p:nvPr/>
+        </p:nvSpPr>
+        <p:spPr>
+          <a:xfrm>
+            <a:off x="15311841" y="7627265"/>
+            <a:ext cx="168706" cy="168706"/>
+          </a:xfrm>
+          <a:custGeom>
+            <a:avLst/>
+            <a:gdLst/>
+            <a:ahLst/>
+            <a:cxnLst/>
+            <a:rect l="0" t="0" r="0" b="0"/>
+            <a:pathLst>
+              <a:path w="180975" h="180975">
+                <a:moveTo>
+                  <a:pt x="0" y="0"/>
+                </a:moveTo>
+                <a:lnTo>
+                  <a:pt x="180975" y="0"/>
+                </a:lnTo>
+                <a:lnTo>
+                  <a:pt x="180975" y="180975"/>
+                </a:lnTo>
+                <a:lnTo>
+                  <a:pt x="0" y="180975"/>
+                </a:lnTo>
+                <a:close/>
+              </a:path>
+            </a:pathLst>
+          </a:custGeom>
+          <a:solidFill>
+            <a:srgbClr val="396F93"/>
+          </a:solidFill>
+          <a:ln w="5239">
+            <a:solidFill>
+              <a:srgbClr val="FFFFFF"/>
+            </a:solidFill>
+            <a:prstDash val="solid"/>
+          </a:ln>
+        </p:spPr>
+      </p:sp>
+      <p:sp>
+        <p:nvSpPr>
+          <p:cNvPr id="287" name="path-284">
+            <a:extLst>
+              <a:ext uri="{FF2B5EF4-FFF2-40B4-BE49-F238E27FC236}">
+                <a16:creationId xmlns:a16="http://schemas.microsoft.com/office/drawing/2014/main" id="{040669C0-580E-495C-A637-C69098E4AEA8}"/>
+              </a:ext>
+            </a:extLst>
+          </p:cNvPr>
+          <p:cNvSpPr>
+            <a:spLocks noGrp="1"/>
+          </p:cNvSpPr>
+          <p:nvPr/>
+        </p:nvSpPr>
+        <p:spPr>
+          <a:xfrm>
+            <a:off x="15524943" y="7627265"/>
+            <a:ext cx="168706" cy="168706"/>
+          </a:xfrm>
+          <a:custGeom>
+            <a:avLst/>
+            <a:gdLst/>
+            <a:ahLst/>
+            <a:cxnLst/>
+            <a:rect l="0" t="0" r="0" b="0"/>
+            <a:pathLst>
+              <a:path w="180975" h="180975">
+                <a:moveTo>
+                  <a:pt x="0" y="0"/>
+                </a:moveTo>
+                <a:lnTo>
+                  <a:pt x="180975" y="0"/>
+                </a:lnTo>
+                <a:lnTo>
+                  <a:pt x="180975" y="180975"/>
+                </a:lnTo>
+                <a:lnTo>
+                  <a:pt x="0" y="180975"/>
+                </a:lnTo>
+                <a:close/>
+              </a:path>
+            </a:pathLst>
+          </a:custGeom>
+          <a:solidFill>
+            <a:srgbClr val="84A7BD"/>
+          </a:solidFill>
+          <a:ln w="5239">
+            <a:solidFill>
+              <a:srgbClr val="FFFFFF"/>
+            </a:solidFill>
+            <a:prstDash val="solid"/>
+          </a:ln>
+        </p:spPr>
+      </p:sp>
+      <p:sp>
+        <p:nvSpPr>
+          <p:cNvPr id="288" name="path-285">
+            <a:extLst>
+              <a:ext uri="{FF2B5EF4-FFF2-40B4-BE49-F238E27FC236}">
+                <a16:creationId xmlns:a16="http://schemas.microsoft.com/office/drawing/2014/main" id="{11371DA0-52EA-40FB-ADE2-300427B586AA}"/>
+              </a:ext>
+            </a:extLst>
+          </p:cNvPr>
+          <p:cNvSpPr>
+            <a:spLocks noGrp="1"/>
+          </p:cNvSpPr>
+          <p:nvPr/>
+        </p:nvSpPr>
+        <p:spPr>
+          <a:xfrm>
+            <a:off x="15738045" y="7627265"/>
+            <a:ext cx="168706" cy="168706"/>
+          </a:xfrm>
+          <a:custGeom>
+            <a:avLst/>
+            <a:gdLst/>
+            <a:ahLst/>
+            <a:cxnLst/>
+            <a:rect l="0" t="0" r="0" b="0"/>
+            <a:pathLst>
+              <a:path w="180975" h="180975">
+                <a:moveTo>
+                  <a:pt x="0" y="0"/>
+                </a:moveTo>
+                <a:lnTo>
+                  <a:pt x="180975" y="0"/>
+                </a:lnTo>
+                <a:lnTo>
+                  <a:pt x="180975" y="180975"/>
+                </a:lnTo>
+                <a:lnTo>
+                  <a:pt x="0" y="180975"/>
+                </a:lnTo>
+                <a:close/>
+              </a:path>
+            </a:pathLst>
+          </a:custGeom>
+          <a:solidFill>
+            <a:srgbClr val="C6D8E2"/>
+          </a:solidFill>
+          <a:ln w="5239">
+            <a:solidFill>
+              <a:srgbClr val="FFFFFF"/>
+            </a:solidFill>
+            <a:prstDash val="solid"/>
+          </a:ln>
+        </p:spPr>
+      </p:sp>
+      <p:sp>
+        <p:nvSpPr>
+          <p:cNvPr id="289" name="path-286">
+            <a:extLst>
+              <a:ext uri="{FF2B5EF4-FFF2-40B4-BE49-F238E27FC236}">
+                <a16:creationId xmlns:a16="http://schemas.microsoft.com/office/drawing/2014/main" id="{10F75A8B-8B88-4E28-A1C3-D26D654E940D}"/>
+              </a:ext>
+            </a:extLst>
+          </p:cNvPr>
+          <p:cNvSpPr>
+            <a:spLocks noGrp="1"/>
+          </p:cNvSpPr>
+          <p:nvPr/>
+        </p:nvSpPr>
+        <p:spPr>
+          <a:xfrm>
+            <a:off x="13393926" y="7840367"/>
+            <a:ext cx="168706" cy="168706"/>
+          </a:xfrm>
+          <a:custGeom>
+            <a:avLst/>
+            <a:gdLst/>
+            <a:ahLst/>
+            <a:cxnLst/>
+            <a:rect l="0" t="0" r="0" b="0"/>
+            <a:pathLst>
+              <a:path w="180975" h="180975">
+                <a:moveTo>
+                  <a:pt x="0" y="0"/>
+                </a:moveTo>
+                <a:lnTo>
+                  <a:pt x="180975" y="0"/>
+                </a:lnTo>
+                <a:lnTo>
+                  <a:pt x="180975" y="180975"/>
+                </a:lnTo>
+                <a:lnTo>
+                  <a:pt x="0" y="180975"/>
+                </a:lnTo>
+                <a:close/>
+              </a:path>
+            </a:pathLst>
+          </a:custGeom>
+          <a:solidFill>
+            <a:srgbClr val="7DA2B9"/>
+          </a:solidFill>
+          <a:ln w="5239">
+            <a:solidFill>
+              <a:srgbClr val="FFFFFF"/>
+            </a:solidFill>
+            <a:prstDash val="solid"/>
+          </a:ln>
+        </p:spPr>
+      </p:sp>
+      <p:sp>
+        <p:nvSpPr>
+          <p:cNvPr id="291" name="path-288">
+            <a:extLst>
+              <a:ext uri="{FF2B5EF4-FFF2-40B4-BE49-F238E27FC236}">
+                <a16:creationId xmlns:a16="http://schemas.microsoft.com/office/drawing/2014/main" id="{E8B691FB-FEB4-4242-BFD9-879A204509EE}"/>
+              </a:ext>
+            </a:extLst>
+          </p:cNvPr>
+          <p:cNvSpPr>
+            <a:spLocks noGrp="1"/>
+          </p:cNvSpPr>
+          <p:nvPr/>
+        </p:nvSpPr>
+        <p:spPr>
+          <a:xfrm>
+            <a:off x="13820129" y="7840367"/>
+            <a:ext cx="168706" cy="168706"/>
+          </a:xfrm>
+          <a:custGeom>
+            <a:avLst/>
+            <a:gdLst/>
+            <a:ahLst/>
+            <a:cxnLst/>
+            <a:rect l="0" t="0" r="0" b="0"/>
+            <a:pathLst>
+              <a:path w="180975" h="180975">
+                <a:moveTo>
+                  <a:pt x="0" y="0"/>
+                </a:moveTo>
+                <a:lnTo>
+                  <a:pt x="180975" y="0"/>
+                </a:lnTo>
+                <a:lnTo>
+                  <a:pt x="180975" y="180975"/>
+                </a:lnTo>
+                <a:lnTo>
+                  <a:pt x="0" y="180975"/>
+                </a:lnTo>
+                <a:close/>
+              </a:path>
+            </a:pathLst>
+          </a:custGeom>
+          <a:solidFill>
+            <a:srgbClr val="5987A5"/>
+          </a:solidFill>
+          <a:ln w="5239">
+            <a:solidFill>
+              <a:srgbClr val="FFFFFF"/>
+            </a:solidFill>
+            <a:prstDash val="solid"/>
+          </a:ln>
+        </p:spPr>
+      </p:sp>
+      <p:sp>
+        <p:nvSpPr>
+          <p:cNvPr id="292" name="path-289">
+            <a:extLst>
+              <a:ext uri="{FF2B5EF4-FFF2-40B4-BE49-F238E27FC236}">
+                <a16:creationId xmlns:a16="http://schemas.microsoft.com/office/drawing/2014/main" id="{BE4B980F-7F97-4DD2-B426-607201EAA0B6}"/>
+              </a:ext>
+            </a:extLst>
+          </p:cNvPr>
+          <p:cNvSpPr>
+            <a:spLocks noGrp="1"/>
+          </p:cNvSpPr>
+          <p:nvPr/>
+        </p:nvSpPr>
+        <p:spPr>
+          <a:xfrm>
+            <a:off x="14033231" y="7840367"/>
+            <a:ext cx="168706" cy="168706"/>
+          </a:xfrm>
+          <a:custGeom>
+            <a:avLst/>
+            <a:gdLst/>
+            <a:ahLst/>
+            <a:cxnLst/>
+            <a:rect l="0" t="0" r="0" b="0"/>
+            <a:pathLst>
+              <a:path w="180975" h="180975">
+                <a:moveTo>
+                  <a:pt x="0" y="0"/>
+                </a:moveTo>
+                <a:lnTo>
+                  <a:pt x="180975" y="0"/>
+                </a:lnTo>
+                <a:lnTo>
+                  <a:pt x="180975" y="180975"/>
+                </a:lnTo>
+                <a:lnTo>
+                  <a:pt x="0" y="180975"/>
+                </a:lnTo>
+                <a:close/>
+              </a:path>
+            </a:pathLst>
+          </a:custGeom>
+          <a:solidFill>
+            <a:srgbClr val="AFC6D5"/>
+          </a:solidFill>
+          <a:ln w="5239">
+            <a:solidFill>
+              <a:srgbClr val="FFFFFF"/>
+            </a:solidFill>
+            <a:prstDash val="solid"/>
+          </a:ln>
+        </p:spPr>
+      </p:sp>
+      <p:sp>
+        <p:nvSpPr>
+          <p:cNvPr id="293" name="path-290">
+            <a:extLst>
+              <a:ext uri="{FF2B5EF4-FFF2-40B4-BE49-F238E27FC236}">
+                <a16:creationId xmlns:a16="http://schemas.microsoft.com/office/drawing/2014/main" id="{CD6005E3-8A05-49D0-94DF-F071400DC96E}"/>
+              </a:ext>
+            </a:extLst>
+          </p:cNvPr>
+          <p:cNvSpPr>
+            <a:spLocks noGrp="1"/>
+          </p:cNvSpPr>
+          <p:nvPr/>
+        </p:nvSpPr>
+        <p:spPr>
+          <a:xfrm>
+            <a:off x="14246333" y="7840367"/>
             <a:ext cx="168706" cy="168706"/>
           </a:xfrm>
           <a:custGeom>
@@ -17077,183 +20218,21 @@
       </p:sp>
       <p:sp>
         <p:nvSpPr>
-          <p:cNvPr id="227" name="path-224">
-            <a:extLst>
-              <a:ext uri="{FF2B5EF4-FFF2-40B4-BE49-F238E27FC236}">
-                <a16:creationId xmlns:a16="http://schemas.microsoft.com/office/drawing/2014/main" id="{1BE63697-5AE8-478D-BD34-0966AB505B16}"/>
-              </a:ext>
-            </a:extLst>
-          </p:cNvPr>
-          <p:cNvSpPr>
-            <a:spLocks noGrp="1"/>
-          </p:cNvSpPr>
-          <p:nvPr/>
-        </p:nvSpPr>
-        <p:spPr>
-          <a:xfrm>
-            <a:off x="15524943" y="6561757"/>
-            <a:ext cx="168706" cy="168706"/>
-          </a:xfrm>
-          <a:custGeom>
-            <a:avLst/>
-            <a:gdLst/>
-            <a:ahLst/>
-            <a:cxnLst/>
-            <a:rect l="0" t="0" r="0" b="0"/>
-            <a:pathLst>
-              <a:path w="180975" h="180975">
-                <a:moveTo>
-                  <a:pt x="0" y="0"/>
-                </a:moveTo>
-                <a:lnTo>
-                  <a:pt x="180975" y="0"/>
-                </a:lnTo>
-                <a:lnTo>
-                  <a:pt x="180975" y="180975"/>
-                </a:lnTo>
-                <a:lnTo>
-                  <a:pt x="0" y="180975"/>
-                </a:lnTo>
-                <a:close/>
-              </a:path>
-            </a:pathLst>
-          </a:custGeom>
-          <a:solidFill>
-            <a:srgbClr val="B3C9D7"/>
-          </a:solidFill>
-          <a:ln w="5239">
-            <a:solidFill>
-              <a:srgbClr val="FFFFFF"/>
-            </a:solidFill>
-            <a:prstDash val="solid"/>
-          </a:ln>
-        </p:spPr>
-      </p:sp>
-      <p:sp>
-        <p:nvSpPr>
-          <p:cNvPr id="228" name="path-225">
-            <a:extLst>
-              <a:ext uri="{FF2B5EF4-FFF2-40B4-BE49-F238E27FC236}">
-                <a16:creationId xmlns:a16="http://schemas.microsoft.com/office/drawing/2014/main" id="{1A0418B3-742E-4684-B155-3E8A103D6260}"/>
-              </a:ext>
-            </a:extLst>
-          </p:cNvPr>
-          <p:cNvSpPr>
-            <a:spLocks noGrp="1"/>
-          </p:cNvSpPr>
-          <p:nvPr/>
-        </p:nvSpPr>
-        <p:spPr>
-          <a:xfrm>
-            <a:off x="15738045" y="6561757"/>
-            <a:ext cx="168706" cy="168706"/>
-          </a:xfrm>
-          <a:custGeom>
-            <a:avLst/>
-            <a:gdLst/>
-            <a:ahLst/>
-            <a:cxnLst/>
-            <a:rect l="0" t="0" r="0" b="0"/>
-            <a:pathLst>
-              <a:path w="180975" h="180975">
-                <a:moveTo>
-                  <a:pt x="0" y="0"/>
-                </a:moveTo>
-                <a:lnTo>
-                  <a:pt x="180975" y="0"/>
-                </a:lnTo>
-                <a:lnTo>
-                  <a:pt x="180975" y="180975"/>
-                </a:lnTo>
-                <a:lnTo>
-                  <a:pt x="0" y="180975"/>
-                </a:lnTo>
-                <a:close/>
-              </a:path>
-            </a:pathLst>
-          </a:custGeom>
-          <a:solidFill>
-            <a:srgbClr val="5F8BA8"/>
-          </a:solidFill>
-          <a:ln w="5239">
-            <a:solidFill>
-              <a:srgbClr val="FFFFFF"/>
-            </a:solidFill>
-            <a:prstDash val="solid"/>
-          </a:ln>
-        </p:spPr>
-      </p:sp>
-      <p:sp>
-        <p:nvSpPr>
-          <p:cNvPr id="229" name="path-226">
-            <a:extLst>
-              <a:ext uri="{FF2B5EF4-FFF2-40B4-BE49-F238E27FC236}">
-                <a16:creationId xmlns:a16="http://schemas.microsoft.com/office/drawing/2014/main" id="{54DF4B84-F4DE-49C4-A6E0-A6A2CE796FD6}"/>
-              </a:ext>
-            </a:extLst>
-          </p:cNvPr>
-          <p:cNvSpPr>
-            <a:spLocks noGrp="1"/>
-          </p:cNvSpPr>
-          <p:nvPr/>
-        </p:nvSpPr>
-        <p:spPr>
-          <a:xfrm>
-            <a:off x="13393926" y="6774858"/>
-            <a:ext cx="168706" cy="168706"/>
-          </a:xfrm>
-          <a:custGeom>
-            <a:avLst/>
-            <a:gdLst/>
-            <a:ahLst/>
-            <a:cxnLst/>
-            <a:rect l="0" t="0" r="0" b="0"/>
-            <a:pathLst>
-              <a:path w="180975" h="180975">
-                <a:moveTo>
-                  <a:pt x="0" y="0"/>
-                </a:moveTo>
-                <a:lnTo>
-                  <a:pt x="180975" y="0"/>
-                </a:lnTo>
-                <a:lnTo>
-                  <a:pt x="180975" y="180975"/>
-                </a:lnTo>
-                <a:lnTo>
-                  <a:pt x="0" y="180975"/>
-                </a:lnTo>
-                <a:close/>
-              </a:path>
-            </a:pathLst>
-          </a:custGeom>
-          <a:solidFill>
-            <a:srgbClr val="CEDDE6"/>
-          </a:solidFill>
-          <a:ln w="5239">
-            <a:solidFill>
-              <a:srgbClr val="FFFFFF"/>
-            </a:solidFill>
-            <a:prstDash val="solid"/>
-          </a:ln>
-        </p:spPr>
-      </p:sp>
-      <p:sp>
-        <p:nvSpPr>
-          <p:cNvPr id="230" name="path-227">
-            <a:extLst>
-              <a:ext uri="{FF2B5EF4-FFF2-40B4-BE49-F238E27FC236}">
-                <a16:creationId xmlns:a16="http://schemas.microsoft.com/office/drawing/2014/main" id="{F87020B7-673A-49EB-B975-D06097D55561}"/>
-              </a:ext>
-            </a:extLst>
-          </p:cNvPr>
-          <p:cNvSpPr>
-            <a:spLocks noGrp="1"/>
-          </p:cNvSpPr>
-          <p:nvPr/>
-        </p:nvSpPr>
-        <p:spPr>
-          <a:xfrm>
-            <a:off x="13607028" y="6774858"/>
+          <p:cNvPr id="294" name="path-291">
+            <a:extLst>
+              <a:ext uri="{FF2B5EF4-FFF2-40B4-BE49-F238E27FC236}">
+                <a16:creationId xmlns:a16="http://schemas.microsoft.com/office/drawing/2014/main" id="{CD3FE049-9C5C-48E5-A5FF-F7EB2F616F53}"/>
+              </a:ext>
+            </a:extLst>
+          </p:cNvPr>
+          <p:cNvSpPr>
+            <a:spLocks noGrp="1"/>
+          </p:cNvSpPr>
+          <p:nvPr/>
+        </p:nvSpPr>
+        <p:spPr>
+          <a:xfrm>
+            <a:off x="14459435" y="7840367"/>
             <a:ext cx="168706" cy="168706"/>
           </a:xfrm>
           <a:custGeom>
@@ -17293,3462 +20272,6 @@
       </p:sp>
       <p:sp>
         <p:nvSpPr>
-          <p:cNvPr id="231" name="path-228">
-            <a:extLst>
-              <a:ext uri="{FF2B5EF4-FFF2-40B4-BE49-F238E27FC236}">
-                <a16:creationId xmlns:a16="http://schemas.microsoft.com/office/drawing/2014/main" id="{A3360EEB-D9AA-45C4-B033-921F5A18F457}"/>
-              </a:ext>
-            </a:extLst>
-          </p:cNvPr>
-          <p:cNvSpPr>
-            <a:spLocks noGrp="1"/>
-          </p:cNvSpPr>
-          <p:nvPr/>
-        </p:nvSpPr>
-        <p:spPr>
-          <a:xfrm>
-            <a:off x="13820129" y="6774858"/>
-            <a:ext cx="168706" cy="168706"/>
-          </a:xfrm>
-          <a:custGeom>
-            <a:avLst/>
-            <a:gdLst/>
-            <a:ahLst/>
-            <a:cxnLst/>
-            <a:rect l="0" t="0" r="0" b="0"/>
-            <a:pathLst>
-              <a:path w="180975" h="180975">
-                <a:moveTo>
-                  <a:pt x="0" y="0"/>
-                </a:moveTo>
-                <a:lnTo>
-                  <a:pt x="180975" y="0"/>
-                </a:lnTo>
-                <a:lnTo>
-                  <a:pt x="180975" y="180975"/>
-                </a:lnTo>
-                <a:lnTo>
-                  <a:pt x="0" y="180975"/>
-                </a:lnTo>
-                <a:close/>
-              </a:path>
-            </a:pathLst>
-          </a:custGeom>
-          <a:solidFill>
-            <a:srgbClr val="C8D9E3"/>
-          </a:solidFill>
-          <a:ln w="5239">
-            <a:solidFill>
-              <a:srgbClr val="FFFFFF"/>
-            </a:solidFill>
-            <a:prstDash val="solid"/>
-          </a:ln>
-        </p:spPr>
-      </p:sp>
-      <p:sp>
-        <p:nvSpPr>
-          <p:cNvPr id="232" name="path-229">
-            <a:extLst>
-              <a:ext uri="{FF2B5EF4-FFF2-40B4-BE49-F238E27FC236}">
-                <a16:creationId xmlns:a16="http://schemas.microsoft.com/office/drawing/2014/main" id="{E718D3F1-FCFE-47DA-8E53-91B60E011ADA}"/>
-              </a:ext>
-            </a:extLst>
-          </p:cNvPr>
-          <p:cNvSpPr>
-            <a:spLocks noGrp="1"/>
-          </p:cNvSpPr>
-          <p:nvPr/>
-        </p:nvSpPr>
-        <p:spPr>
-          <a:xfrm>
-            <a:off x="14033231" y="6774858"/>
-            <a:ext cx="168706" cy="168706"/>
-          </a:xfrm>
-          <a:custGeom>
-            <a:avLst/>
-            <a:gdLst/>
-            <a:ahLst/>
-            <a:cxnLst/>
-            <a:rect l="0" t="0" r="0" b="0"/>
-            <a:pathLst>
-              <a:path w="180975" h="180975">
-                <a:moveTo>
-                  <a:pt x="0" y="0"/>
-                </a:moveTo>
-                <a:lnTo>
-                  <a:pt x="180975" y="0"/>
-                </a:lnTo>
-                <a:lnTo>
-                  <a:pt x="180975" y="180975"/>
-                </a:lnTo>
-                <a:lnTo>
-                  <a:pt x="0" y="180975"/>
-                </a:lnTo>
-                <a:close/>
-              </a:path>
-            </a:pathLst>
-          </a:custGeom>
-          <a:solidFill>
-            <a:srgbClr val="8AABC0"/>
-          </a:solidFill>
-          <a:ln w="5239">
-            <a:solidFill>
-              <a:srgbClr val="FFFFFF"/>
-            </a:solidFill>
-            <a:prstDash val="solid"/>
-          </a:ln>
-        </p:spPr>
-      </p:sp>
-      <p:sp>
-        <p:nvSpPr>
-          <p:cNvPr id="233" name="path-230">
-            <a:extLst>
-              <a:ext uri="{FF2B5EF4-FFF2-40B4-BE49-F238E27FC236}">
-                <a16:creationId xmlns:a16="http://schemas.microsoft.com/office/drawing/2014/main" id="{DF6CA084-178C-492D-B4AC-5E76AA043AD6}"/>
-              </a:ext>
-            </a:extLst>
-          </p:cNvPr>
-          <p:cNvSpPr>
-            <a:spLocks noGrp="1"/>
-          </p:cNvSpPr>
-          <p:nvPr/>
-        </p:nvSpPr>
-        <p:spPr>
-          <a:xfrm>
-            <a:off x="14246333" y="6774858"/>
-            <a:ext cx="168706" cy="168706"/>
-          </a:xfrm>
-          <a:custGeom>
-            <a:avLst/>
-            <a:gdLst/>
-            <a:ahLst/>
-            <a:cxnLst/>
-            <a:rect l="0" t="0" r="0" b="0"/>
-            <a:pathLst>
-              <a:path w="180975" h="180975">
-                <a:moveTo>
-                  <a:pt x="0" y="0"/>
-                </a:moveTo>
-                <a:lnTo>
-                  <a:pt x="180975" y="0"/>
-                </a:lnTo>
-                <a:lnTo>
-                  <a:pt x="180975" y="180975"/>
-                </a:lnTo>
-                <a:lnTo>
-                  <a:pt x="0" y="180975"/>
-                </a:lnTo>
-                <a:close/>
-              </a:path>
-            </a:pathLst>
-          </a:custGeom>
-          <a:solidFill>
-            <a:srgbClr val="3B7194"/>
-          </a:solidFill>
-          <a:ln w="5239">
-            <a:solidFill>
-              <a:srgbClr val="FFFFFF"/>
-            </a:solidFill>
-            <a:prstDash val="solid"/>
-          </a:ln>
-        </p:spPr>
-      </p:sp>
-      <p:sp>
-        <p:nvSpPr>
-          <p:cNvPr id="234" name="path-231">
-            <a:extLst>
-              <a:ext uri="{FF2B5EF4-FFF2-40B4-BE49-F238E27FC236}">
-                <a16:creationId xmlns:a16="http://schemas.microsoft.com/office/drawing/2014/main" id="{35EDD18A-DB29-4240-8398-E7D73DF1F95B}"/>
-              </a:ext>
-            </a:extLst>
-          </p:cNvPr>
-          <p:cNvSpPr>
-            <a:spLocks noGrp="1"/>
-          </p:cNvSpPr>
-          <p:nvPr/>
-        </p:nvSpPr>
-        <p:spPr>
-          <a:xfrm>
-            <a:off x="14459435" y="6774858"/>
-            <a:ext cx="168706" cy="168706"/>
-          </a:xfrm>
-          <a:custGeom>
-            <a:avLst/>
-            <a:gdLst/>
-            <a:ahLst/>
-            <a:cxnLst/>
-            <a:rect l="0" t="0" r="0" b="0"/>
-            <a:pathLst>
-              <a:path w="180975" h="180975">
-                <a:moveTo>
-                  <a:pt x="0" y="0"/>
-                </a:moveTo>
-                <a:lnTo>
-                  <a:pt x="180975" y="0"/>
-                </a:lnTo>
-                <a:lnTo>
-                  <a:pt x="180975" y="180975"/>
-                </a:lnTo>
-                <a:lnTo>
-                  <a:pt x="0" y="180975"/>
-                </a:lnTo>
-                <a:close/>
-              </a:path>
-            </a:pathLst>
-          </a:custGeom>
-          <a:solidFill>
-            <a:srgbClr val="4F809F"/>
-          </a:solidFill>
-          <a:ln w="5239">
-            <a:solidFill>
-              <a:srgbClr val="FFFFFF"/>
-            </a:solidFill>
-            <a:prstDash val="solid"/>
-          </a:ln>
-        </p:spPr>
-      </p:sp>
-      <p:sp>
-        <p:nvSpPr>
-          <p:cNvPr id="235" name="path-232">
-            <a:extLst>
-              <a:ext uri="{FF2B5EF4-FFF2-40B4-BE49-F238E27FC236}">
-                <a16:creationId xmlns:a16="http://schemas.microsoft.com/office/drawing/2014/main" id="{16736BC8-8C77-4459-8DC7-06292733D613}"/>
-              </a:ext>
-            </a:extLst>
-          </p:cNvPr>
-          <p:cNvSpPr>
-            <a:spLocks noGrp="1"/>
-          </p:cNvSpPr>
-          <p:nvPr/>
-        </p:nvSpPr>
-        <p:spPr>
-          <a:xfrm>
-            <a:off x="14672536" y="6774858"/>
-            <a:ext cx="168706" cy="168706"/>
-          </a:xfrm>
-          <a:custGeom>
-            <a:avLst/>
-            <a:gdLst/>
-            <a:ahLst/>
-            <a:cxnLst/>
-            <a:rect l="0" t="0" r="0" b="0"/>
-            <a:pathLst>
-              <a:path w="180975" h="180975">
-                <a:moveTo>
-                  <a:pt x="0" y="0"/>
-                </a:moveTo>
-                <a:lnTo>
-                  <a:pt x="180975" y="0"/>
-                </a:lnTo>
-                <a:lnTo>
-                  <a:pt x="180975" y="180975"/>
-                </a:lnTo>
-                <a:lnTo>
-                  <a:pt x="0" y="180975"/>
-                </a:lnTo>
-                <a:close/>
-              </a:path>
-            </a:pathLst>
-          </a:custGeom>
-          <a:solidFill>
-            <a:srgbClr val="A6BFD0"/>
-          </a:solidFill>
-          <a:ln w="5239">
-            <a:solidFill>
-              <a:srgbClr val="FFFFFF"/>
-            </a:solidFill>
-            <a:prstDash val="solid"/>
-          </a:ln>
-        </p:spPr>
-      </p:sp>
-      <p:sp>
-        <p:nvSpPr>
-          <p:cNvPr id="236" name="path-233">
-            <a:extLst>
-              <a:ext uri="{FF2B5EF4-FFF2-40B4-BE49-F238E27FC236}">
-                <a16:creationId xmlns:a16="http://schemas.microsoft.com/office/drawing/2014/main" id="{7E15F708-18F7-40B6-B79E-54535952E845}"/>
-              </a:ext>
-            </a:extLst>
-          </p:cNvPr>
-          <p:cNvSpPr>
-            <a:spLocks noGrp="1"/>
-          </p:cNvSpPr>
-          <p:nvPr/>
-        </p:nvSpPr>
-        <p:spPr>
-          <a:xfrm>
-            <a:off x="14885638" y="6774858"/>
-            <a:ext cx="168706" cy="168706"/>
-          </a:xfrm>
-          <a:custGeom>
-            <a:avLst/>
-            <a:gdLst/>
-            <a:ahLst/>
-            <a:cxnLst/>
-            <a:rect l="0" t="0" r="0" b="0"/>
-            <a:pathLst>
-              <a:path w="180975" h="180975">
-                <a:moveTo>
-                  <a:pt x="0" y="0"/>
-                </a:moveTo>
-                <a:lnTo>
-                  <a:pt x="180975" y="0"/>
-                </a:lnTo>
-                <a:lnTo>
-                  <a:pt x="180975" y="180975"/>
-                </a:lnTo>
-                <a:lnTo>
-                  <a:pt x="0" y="180975"/>
-                </a:lnTo>
-                <a:close/>
-              </a:path>
-            </a:pathLst>
-          </a:custGeom>
-          <a:solidFill>
-            <a:srgbClr val="CFDEE7"/>
-          </a:solidFill>
-          <a:ln w="5239">
-            <a:solidFill>
-              <a:srgbClr val="FFFFFF"/>
-            </a:solidFill>
-            <a:prstDash val="solid"/>
-          </a:ln>
-        </p:spPr>
-      </p:sp>
-      <p:sp>
-        <p:nvSpPr>
-          <p:cNvPr id="237" name="path-234">
-            <a:extLst>
-              <a:ext uri="{FF2B5EF4-FFF2-40B4-BE49-F238E27FC236}">
-                <a16:creationId xmlns:a16="http://schemas.microsoft.com/office/drawing/2014/main" id="{4F3CFFC0-D9E5-4618-B090-764D2DDBBABD}"/>
-              </a:ext>
-            </a:extLst>
-          </p:cNvPr>
-          <p:cNvSpPr>
-            <a:spLocks noGrp="1"/>
-          </p:cNvSpPr>
-          <p:nvPr/>
-        </p:nvSpPr>
-        <p:spPr>
-          <a:xfrm>
-            <a:off x="15098740" y="6774858"/>
-            <a:ext cx="168706" cy="168706"/>
-          </a:xfrm>
-          <a:custGeom>
-            <a:avLst/>
-            <a:gdLst/>
-            <a:ahLst/>
-            <a:cxnLst/>
-            <a:rect l="0" t="0" r="0" b="0"/>
-            <a:pathLst>
-              <a:path w="180975" h="180975">
-                <a:moveTo>
-                  <a:pt x="0" y="0"/>
-                </a:moveTo>
-                <a:lnTo>
-                  <a:pt x="180975" y="0"/>
-                </a:lnTo>
-                <a:lnTo>
-                  <a:pt x="180975" y="180975"/>
-                </a:lnTo>
-                <a:lnTo>
-                  <a:pt x="0" y="180975"/>
-                </a:lnTo>
-                <a:close/>
-              </a:path>
-            </a:pathLst>
-          </a:custGeom>
-          <a:solidFill>
-            <a:srgbClr val="D1E0E8"/>
-          </a:solidFill>
-          <a:ln w="5239">
-            <a:solidFill>
-              <a:srgbClr val="FFFFFF"/>
-            </a:solidFill>
-            <a:prstDash val="solid"/>
-          </a:ln>
-        </p:spPr>
-      </p:sp>
-      <p:sp>
-        <p:nvSpPr>
-          <p:cNvPr id="238" name="path-235">
-            <a:extLst>
-              <a:ext uri="{FF2B5EF4-FFF2-40B4-BE49-F238E27FC236}">
-                <a16:creationId xmlns:a16="http://schemas.microsoft.com/office/drawing/2014/main" id="{0C03BAC7-661D-4CDD-8759-2FCC376EA4E2}"/>
-              </a:ext>
-            </a:extLst>
-          </p:cNvPr>
-          <p:cNvSpPr>
-            <a:spLocks noGrp="1"/>
-          </p:cNvSpPr>
-          <p:nvPr/>
-        </p:nvSpPr>
-        <p:spPr>
-          <a:xfrm>
-            <a:off x="15311841" y="6774858"/>
-            <a:ext cx="168706" cy="168706"/>
-          </a:xfrm>
-          <a:custGeom>
-            <a:avLst/>
-            <a:gdLst/>
-            <a:ahLst/>
-            <a:cxnLst/>
-            <a:rect l="0" t="0" r="0" b="0"/>
-            <a:pathLst>
-              <a:path w="180975" h="180975">
-                <a:moveTo>
-                  <a:pt x="0" y="0"/>
-                </a:moveTo>
-                <a:lnTo>
-                  <a:pt x="180975" y="0"/>
-                </a:lnTo>
-                <a:lnTo>
-                  <a:pt x="180975" y="180975"/>
-                </a:lnTo>
-                <a:lnTo>
-                  <a:pt x="0" y="180975"/>
-                </a:lnTo>
-                <a:close/>
-              </a:path>
-            </a:pathLst>
-          </a:custGeom>
-          <a:solidFill>
-            <a:srgbClr val="C5D7E2"/>
-          </a:solidFill>
-          <a:ln w="5239">
-            <a:solidFill>
-              <a:srgbClr val="FFFFFF"/>
-            </a:solidFill>
-            <a:prstDash val="solid"/>
-          </a:ln>
-        </p:spPr>
-      </p:sp>
-      <p:sp>
-        <p:nvSpPr>
-          <p:cNvPr id="239" name="path-236">
-            <a:extLst>
-              <a:ext uri="{FF2B5EF4-FFF2-40B4-BE49-F238E27FC236}">
-                <a16:creationId xmlns:a16="http://schemas.microsoft.com/office/drawing/2014/main" id="{8B8A0C85-1D5E-4A4C-A95F-D33E5A7A9B44}"/>
-              </a:ext>
-            </a:extLst>
-          </p:cNvPr>
-          <p:cNvSpPr>
-            <a:spLocks noGrp="1"/>
-          </p:cNvSpPr>
-          <p:nvPr/>
-        </p:nvSpPr>
-        <p:spPr>
-          <a:xfrm>
-            <a:off x="15524943" y="6774858"/>
-            <a:ext cx="168706" cy="168706"/>
-          </a:xfrm>
-          <a:custGeom>
-            <a:avLst/>
-            <a:gdLst/>
-            <a:ahLst/>
-            <a:cxnLst/>
-            <a:rect l="0" t="0" r="0" b="0"/>
-            <a:pathLst>
-              <a:path w="180975" h="180975">
-                <a:moveTo>
-                  <a:pt x="0" y="0"/>
-                </a:moveTo>
-                <a:lnTo>
-                  <a:pt x="180975" y="0"/>
-                </a:lnTo>
-                <a:lnTo>
-                  <a:pt x="180975" y="180975"/>
-                </a:lnTo>
-                <a:lnTo>
-                  <a:pt x="0" y="180975"/>
-                </a:lnTo>
-                <a:close/>
-              </a:path>
-            </a:pathLst>
-          </a:custGeom>
-          <a:solidFill>
-            <a:srgbClr val="81A5BB"/>
-          </a:solidFill>
-          <a:ln w="5239">
-            <a:solidFill>
-              <a:srgbClr val="FFFFFF"/>
-            </a:solidFill>
-            <a:prstDash val="solid"/>
-          </a:ln>
-        </p:spPr>
-      </p:sp>
-      <p:sp>
-        <p:nvSpPr>
-          <p:cNvPr id="240" name="path-237">
-            <a:extLst>
-              <a:ext uri="{FF2B5EF4-FFF2-40B4-BE49-F238E27FC236}">
-                <a16:creationId xmlns:a16="http://schemas.microsoft.com/office/drawing/2014/main" id="{20F84EAF-C54F-4D9F-8DB1-A9A2ECA54194}"/>
-              </a:ext>
-            </a:extLst>
-          </p:cNvPr>
-          <p:cNvSpPr>
-            <a:spLocks noGrp="1"/>
-          </p:cNvSpPr>
-          <p:nvPr/>
-        </p:nvSpPr>
-        <p:spPr>
-          <a:xfrm>
-            <a:off x="15738045" y="6774858"/>
-            <a:ext cx="168706" cy="168706"/>
-          </a:xfrm>
-          <a:custGeom>
-            <a:avLst/>
-            <a:gdLst/>
-            <a:ahLst/>
-            <a:cxnLst/>
-            <a:rect l="0" t="0" r="0" b="0"/>
-            <a:pathLst>
-              <a:path w="180975" h="180975">
-                <a:moveTo>
-                  <a:pt x="0" y="0"/>
-                </a:moveTo>
-                <a:lnTo>
-                  <a:pt x="180975" y="0"/>
-                </a:lnTo>
-                <a:lnTo>
-                  <a:pt x="180975" y="180975"/>
-                </a:lnTo>
-                <a:lnTo>
-                  <a:pt x="0" y="180975"/>
-                </a:lnTo>
-                <a:close/>
-              </a:path>
-            </a:pathLst>
-          </a:custGeom>
-          <a:solidFill>
-            <a:srgbClr val="386F92"/>
-          </a:solidFill>
-          <a:ln w="5239">
-            <a:solidFill>
-              <a:srgbClr val="FFFFFF"/>
-            </a:solidFill>
-            <a:prstDash val="solid"/>
-          </a:ln>
-        </p:spPr>
-      </p:sp>
-      <p:sp>
-        <p:nvSpPr>
-          <p:cNvPr id="241" name="path-238">
-            <a:extLst>
-              <a:ext uri="{FF2B5EF4-FFF2-40B4-BE49-F238E27FC236}">
-                <a16:creationId xmlns:a16="http://schemas.microsoft.com/office/drawing/2014/main" id="{4696F3AD-6D16-4494-8128-FE6AAD0DA4E2}"/>
-              </a:ext>
-            </a:extLst>
-          </p:cNvPr>
-          <p:cNvSpPr>
-            <a:spLocks noGrp="1"/>
-          </p:cNvSpPr>
-          <p:nvPr/>
-        </p:nvSpPr>
-        <p:spPr>
-          <a:xfrm>
-            <a:off x="13393926" y="6987960"/>
-            <a:ext cx="168706" cy="168706"/>
-          </a:xfrm>
-          <a:custGeom>
-            <a:avLst/>
-            <a:gdLst/>
-            <a:ahLst/>
-            <a:cxnLst/>
-            <a:rect l="0" t="0" r="0" b="0"/>
-            <a:pathLst>
-              <a:path w="180975" h="180975">
-                <a:moveTo>
-                  <a:pt x="0" y="0"/>
-                </a:moveTo>
-                <a:lnTo>
-                  <a:pt x="180975" y="0"/>
-                </a:lnTo>
-                <a:lnTo>
-                  <a:pt x="180975" y="180975"/>
-                </a:lnTo>
-                <a:lnTo>
-                  <a:pt x="0" y="180975"/>
-                </a:lnTo>
-                <a:close/>
-              </a:path>
-            </a:pathLst>
-          </a:custGeom>
-          <a:solidFill>
-            <a:srgbClr val="D1E0E8"/>
-          </a:solidFill>
-          <a:ln w="5239">
-            <a:solidFill>
-              <a:srgbClr val="FFFFFF"/>
-            </a:solidFill>
-            <a:prstDash val="solid"/>
-          </a:ln>
-        </p:spPr>
-      </p:sp>
-      <p:sp>
-        <p:nvSpPr>
-          <p:cNvPr id="242" name="path-239">
-            <a:extLst>
-              <a:ext uri="{FF2B5EF4-FFF2-40B4-BE49-F238E27FC236}">
-                <a16:creationId xmlns:a16="http://schemas.microsoft.com/office/drawing/2014/main" id="{A39C50C2-AB57-4B41-B80E-EE0B53B7A33A}"/>
-              </a:ext>
-            </a:extLst>
-          </p:cNvPr>
-          <p:cNvSpPr>
-            <a:spLocks noGrp="1"/>
-          </p:cNvSpPr>
-          <p:nvPr/>
-        </p:nvSpPr>
-        <p:spPr>
-          <a:xfrm>
-            <a:off x="13607028" y="6987960"/>
-            <a:ext cx="168706" cy="168706"/>
-          </a:xfrm>
-          <a:custGeom>
-            <a:avLst/>
-            <a:gdLst/>
-            <a:ahLst/>
-            <a:cxnLst/>
-            <a:rect l="0" t="0" r="0" b="0"/>
-            <a:pathLst>
-              <a:path w="180975" h="180975">
-                <a:moveTo>
-                  <a:pt x="0" y="0"/>
-                </a:moveTo>
-                <a:lnTo>
-                  <a:pt x="180975" y="0"/>
-                </a:lnTo>
-                <a:lnTo>
-                  <a:pt x="180975" y="180975"/>
-                </a:lnTo>
-                <a:lnTo>
-                  <a:pt x="0" y="180975"/>
-                </a:lnTo>
-                <a:close/>
-              </a:path>
-            </a:pathLst>
-          </a:custGeom>
-          <a:solidFill>
-            <a:srgbClr val="CFDEE7"/>
-          </a:solidFill>
-          <a:ln w="5239">
-            <a:solidFill>
-              <a:srgbClr val="FFFFFF"/>
-            </a:solidFill>
-            <a:prstDash val="solid"/>
-          </a:ln>
-        </p:spPr>
-      </p:sp>
-      <p:sp>
-        <p:nvSpPr>
-          <p:cNvPr id="243" name="path-240">
-            <a:extLst>
-              <a:ext uri="{FF2B5EF4-FFF2-40B4-BE49-F238E27FC236}">
-                <a16:creationId xmlns:a16="http://schemas.microsoft.com/office/drawing/2014/main" id="{88B30EE5-5B42-42D7-9113-1D8562D48CBA}"/>
-              </a:ext>
-            </a:extLst>
-          </p:cNvPr>
-          <p:cNvSpPr>
-            <a:spLocks noGrp="1"/>
-          </p:cNvSpPr>
-          <p:nvPr/>
-        </p:nvSpPr>
-        <p:spPr>
-          <a:xfrm>
-            <a:off x="13820129" y="6987960"/>
-            <a:ext cx="168706" cy="168706"/>
-          </a:xfrm>
-          <a:custGeom>
-            <a:avLst/>
-            <a:gdLst/>
-            <a:ahLst/>
-            <a:cxnLst/>
-            <a:rect l="0" t="0" r="0" b="0"/>
-            <a:pathLst>
-              <a:path w="180975" h="180975">
-                <a:moveTo>
-                  <a:pt x="0" y="0"/>
-                </a:moveTo>
-                <a:lnTo>
-                  <a:pt x="180975" y="0"/>
-                </a:lnTo>
-                <a:lnTo>
-                  <a:pt x="180975" y="180975"/>
-                </a:lnTo>
-                <a:lnTo>
-                  <a:pt x="0" y="180975"/>
-                </a:lnTo>
-                <a:close/>
-              </a:path>
-            </a:pathLst>
-          </a:custGeom>
-          <a:solidFill>
-            <a:srgbClr val="A9C2D2"/>
-          </a:solidFill>
-          <a:ln w="5239">
-            <a:solidFill>
-              <a:srgbClr val="FFFFFF"/>
-            </a:solidFill>
-            <a:prstDash val="solid"/>
-          </a:ln>
-        </p:spPr>
-      </p:sp>
-      <p:sp>
-        <p:nvSpPr>
-          <p:cNvPr id="244" name="path-241">
-            <a:extLst>
-              <a:ext uri="{FF2B5EF4-FFF2-40B4-BE49-F238E27FC236}">
-                <a16:creationId xmlns:a16="http://schemas.microsoft.com/office/drawing/2014/main" id="{09E7F508-8A4E-46EF-80CE-F5391DD8EC84}"/>
-              </a:ext>
-            </a:extLst>
-          </p:cNvPr>
-          <p:cNvSpPr>
-            <a:spLocks noGrp="1"/>
-          </p:cNvSpPr>
-          <p:nvPr/>
-        </p:nvSpPr>
-        <p:spPr>
-          <a:xfrm>
-            <a:off x="14033231" y="6987960"/>
-            <a:ext cx="168706" cy="168706"/>
-          </a:xfrm>
-          <a:custGeom>
-            <a:avLst/>
-            <a:gdLst/>
-            <a:ahLst/>
-            <a:cxnLst/>
-            <a:rect l="0" t="0" r="0" b="0"/>
-            <a:pathLst>
-              <a:path w="180975" h="180975">
-                <a:moveTo>
-                  <a:pt x="0" y="0"/>
-                </a:moveTo>
-                <a:lnTo>
-                  <a:pt x="180975" y="0"/>
-                </a:lnTo>
-                <a:lnTo>
-                  <a:pt x="180975" y="180975"/>
-                </a:lnTo>
-                <a:lnTo>
-                  <a:pt x="0" y="180975"/>
-                </a:lnTo>
-                <a:close/>
-              </a:path>
-            </a:pathLst>
-          </a:custGeom>
-          <a:solidFill>
-            <a:srgbClr val="5282A1"/>
-          </a:solidFill>
-          <a:ln w="5239">
-            <a:solidFill>
-              <a:srgbClr val="FFFFFF"/>
-            </a:solidFill>
-            <a:prstDash val="solid"/>
-          </a:ln>
-        </p:spPr>
-      </p:sp>
-      <p:sp>
-        <p:nvSpPr>
-          <p:cNvPr id="245" name="path-242">
-            <a:extLst>
-              <a:ext uri="{FF2B5EF4-FFF2-40B4-BE49-F238E27FC236}">
-                <a16:creationId xmlns:a16="http://schemas.microsoft.com/office/drawing/2014/main" id="{2BB86E1B-7150-437E-AA04-F8EAE952BF96}"/>
-              </a:ext>
-            </a:extLst>
-          </p:cNvPr>
-          <p:cNvSpPr>
-            <a:spLocks noGrp="1"/>
-          </p:cNvSpPr>
-          <p:nvPr/>
-        </p:nvSpPr>
-        <p:spPr>
-          <a:xfrm>
-            <a:off x="14246333" y="6987960"/>
-            <a:ext cx="168706" cy="168706"/>
-          </a:xfrm>
-          <a:custGeom>
-            <a:avLst/>
-            <a:gdLst/>
-            <a:ahLst/>
-            <a:cxnLst/>
-            <a:rect l="0" t="0" r="0" b="0"/>
-            <a:pathLst>
-              <a:path w="180975" h="180975">
-                <a:moveTo>
-                  <a:pt x="0" y="0"/>
-                </a:moveTo>
-                <a:lnTo>
-                  <a:pt x="180975" y="0"/>
-                </a:lnTo>
-                <a:lnTo>
-                  <a:pt x="180975" y="180975"/>
-                </a:lnTo>
-                <a:lnTo>
-                  <a:pt x="0" y="180975"/>
-                </a:lnTo>
-                <a:close/>
-              </a:path>
-            </a:pathLst>
-          </a:custGeom>
-          <a:solidFill>
-            <a:srgbClr val="3A7093"/>
-          </a:solidFill>
-          <a:ln w="5239">
-            <a:solidFill>
-              <a:srgbClr val="FFFFFF"/>
-            </a:solidFill>
-            <a:prstDash val="solid"/>
-          </a:ln>
-        </p:spPr>
-      </p:sp>
-      <p:sp>
-        <p:nvSpPr>
-          <p:cNvPr id="246" name="path-243">
-            <a:extLst>
-              <a:ext uri="{FF2B5EF4-FFF2-40B4-BE49-F238E27FC236}">
-                <a16:creationId xmlns:a16="http://schemas.microsoft.com/office/drawing/2014/main" id="{B38FC2CB-F2AF-4742-AC29-A5C791298CB6}"/>
-              </a:ext>
-            </a:extLst>
-          </p:cNvPr>
-          <p:cNvSpPr>
-            <a:spLocks noGrp="1"/>
-          </p:cNvSpPr>
-          <p:nvPr/>
-        </p:nvSpPr>
-        <p:spPr>
-          <a:xfrm>
-            <a:off x="14459435" y="6987960"/>
-            <a:ext cx="168706" cy="168706"/>
-          </a:xfrm>
-          <a:custGeom>
-            <a:avLst/>
-            <a:gdLst/>
-            <a:ahLst/>
-            <a:cxnLst/>
-            <a:rect l="0" t="0" r="0" b="0"/>
-            <a:pathLst>
-              <a:path w="180975" h="180975">
-                <a:moveTo>
-                  <a:pt x="0" y="0"/>
-                </a:moveTo>
-                <a:lnTo>
-                  <a:pt x="180975" y="0"/>
-                </a:lnTo>
-                <a:lnTo>
-                  <a:pt x="180975" y="180975"/>
-                </a:lnTo>
-                <a:lnTo>
-                  <a:pt x="0" y="180975"/>
-                </a:lnTo>
-                <a:close/>
-              </a:path>
-            </a:pathLst>
-          </a:custGeom>
-          <a:solidFill>
-            <a:srgbClr val="86A8BE"/>
-          </a:solidFill>
-          <a:ln w="5239">
-            <a:solidFill>
-              <a:srgbClr val="FFFFFF"/>
-            </a:solidFill>
-            <a:prstDash val="solid"/>
-          </a:ln>
-        </p:spPr>
-      </p:sp>
-      <p:sp>
-        <p:nvSpPr>
-          <p:cNvPr id="247" name="path-244">
-            <a:extLst>
-              <a:ext uri="{FF2B5EF4-FFF2-40B4-BE49-F238E27FC236}">
-                <a16:creationId xmlns:a16="http://schemas.microsoft.com/office/drawing/2014/main" id="{94ECA86C-D002-4EF9-AB70-9279C17DEBF8}"/>
-              </a:ext>
-            </a:extLst>
-          </p:cNvPr>
-          <p:cNvSpPr>
-            <a:spLocks noGrp="1"/>
-          </p:cNvSpPr>
-          <p:nvPr/>
-        </p:nvSpPr>
-        <p:spPr>
-          <a:xfrm>
-            <a:off x="14672536" y="6987960"/>
-            <a:ext cx="168706" cy="168706"/>
-          </a:xfrm>
-          <a:custGeom>
-            <a:avLst/>
-            <a:gdLst/>
-            <a:ahLst/>
-            <a:cxnLst/>
-            <a:rect l="0" t="0" r="0" b="0"/>
-            <a:pathLst>
-              <a:path w="180975" h="180975">
-                <a:moveTo>
-                  <a:pt x="0" y="0"/>
-                </a:moveTo>
-                <a:lnTo>
-                  <a:pt x="180975" y="0"/>
-                </a:lnTo>
-                <a:lnTo>
-                  <a:pt x="180975" y="180975"/>
-                </a:lnTo>
-                <a:lnTo>
-                  <a:pt x="0" y="180975"/>
-                </a:lnTo>
-                <a:close/>
-              </a:path>
-            </a:pathLst>
-          </a:custGeom>
-          <a:solidFill>
-            <a:srgbClr val="C7D8E3"/>
-          </a:solidFill>
-          <a:ln w="5239">
-            <a:solidFill>
-              <a:srgbClr val="FFFFFF"/>
-            </a:solidFill>
-            <a:prstDash val="solid"/>
-          </a:ln>
-        </p:spPr>
-      </p:sp>
-      <p:sp>
-        <p:nvSpPr>
-          <p:cNvPr id="248" name="path-245">
-            <a:extLst>
-              <a:ext uri="{FF2B5EF4-FFF2-40B4-BE49-F238E27FC236}">
-                <a16:creationId xmlns:a16="http://schemas.microsoft.com/office/drawing/2014/main" id="{E27F66F2-4575-45DA-9412-493071161874}"/>
-              </a:ext>
-            </a:extLst>
-          </p:cNvPr>
-          <p:cNvSpPr>
-            <a:spLocks noGrp="1"/>
-          </p:cNvSpPr>
-          <p:nvPr/>
-        </p:nvSpPr>
-        <p:spPr>
-          <a:xfrm>
-            <a:off x="14885638" y="6987960"/>
-            <a:ext cx="168706" cy="168706"/>
-          </a:xfrm>
-          <a:custGeom>
-            <a:avLst/>
-            <a:gdLst/>
-            <a:ahLst/>
-            <a:cxnLst/>
-            <a:rect l="0" t="0" r="0" b="0"/>
-            <a:pathLst>
-              <a:path w="180975" h="180975">
-                <a:moveTo>
-                  <a:pt x="0" y="0"/>
-                </a:moveTo>
-                <a:lnTo>
-                  <a:pt x="180975" y="0"/>
-                </a:lnTo>
-                <a:lnTo>
-                  <a:pt x="180975" y="180975"/>
-                </a:lnTo>
-                <a:lnTo>
-                  <a:pt x="0" y="180975"/>
-                </a:lnTo>
-                <a:close/>
-              </a:path>
-            </a:pathLst>
-          </a:custGeom>
-          <a:solidFill>
-            <a:srgbClr val="D1E0E8"/>
-          </a:solidFill>
-          <a:ln w="5239">
-            <a:solidFill>
-              <a:srgbClr val="FFFFFF"/>
-            </a:solidFill>
-            <a:prstDash val="solid"/>
-          </a:ln>
-        </p:spPr>
-      </p:sp>
-      <p:sp>
-        <p:nvSpPr>
-          <p:cNvPr id="249" name="path-246">
-            <a:extLst>
-              <a:ext uri="{FF2B5EF4-FFF2-40B4-BE49-F238E27FC236}">
-                <a16:creationId xmlns:a16="http://schemas.microsoft.com/office/drawing/2014/main" id="{0711E4D6-CDFC-4A59-B920-AE00DE45235F}"/>
-              </a:ext>
-            </a:extLst>
-          </p:cNvPr>
-          <p:cNvSpPr>
-            <a:spLocks noGrp="1"/>
-          </p:cNvSpPr>
-          <p:nvPr/>
-        </p:nvSpPr>
-        <p:spPr>
-          <a:xfrm>
-            <a:off x="15098740" y="6987960"/>
-            <a:ext cx="168706" cy="168706"/>
-          </a:xfrm>
-          <a:custGeom>
-            <a:avLst/>
-            <a:gdLst/>
-            <a:ahLst/>
-            <a:cxnLst/>
-            <a:rect l="0" t="0" r="0" b="0"/>
-            <a:pathLst>
-              <a:path w="180975" h="180975">
-                <a:moveTo>
-                  <a:pt x="0" y="0"/>
-                </a:moveTo>
-                <a:lnTo>
-                  <a:pt x="180975" y="0"/>
-                </a:lnTo>
-                <a:lnTo>
-                  <a:pt x="180975" y="180975"/>
-                </a:lnTo>
-                <a:lnTo>
-                  <a:pt x="0" y="180975"/>
-                </a:lnTo>
-                <a:close/>
-              </a:path>
-            </a:pathLst>
-          </a:custGeom>
-          <a:solidFill>
-            <a:srgbClr val="CEDDE7"/>
-          </a:solidFill>
-          <a:ln w="5239">
-            <a:solidFill>
-              <a:srgbClr val="FFFFFF"/>
-            </a:solidFill>
-            <a:prstDash val="solid"/>
-          </a:ln>
-        </p:spPr>
-      </p:sp>
-      <p:sp>
-        <p:nvSpPr>
-          <p:cNvPr id="250" name="path-247">
-            <a:extLst>
-              <a:ext uri="{FF2B5EF4-FFF2-40B4-BE49-F238E27FC236}">
-                <a16:creationId xmlns:a16="http://schemas.microsoft.com/office/drawing/2014/main" id="{32920BB1-1D25-49CB-A0DE-975640B0E304}"/>
-              </a:ext>
-            </a:extLst>
-          </p:cNvPr>
-          <p:cNvSpPr>
-            <a:spLocks noGrp="1"/>
-          </p:cNvSpPr>
-          <p:nvPr/>
-        </p:nvSpPr>
-        <p:spPr>
-          <a:xfrm>
-            <a:off x="15311841" y="6987960"/>
-            <a:ext cx="168706" cy="168706"/>
-          </a:xfrm>
-          <a:custGeom>
-            <a:avLst/>
-            <a:gdLst/>
-            <a:ahLst/>
-            <a:cxnLst/>
-            <a:rect l="0" t="0" r="0" b="0"/>
-            <a:pathLst>
-              <a:path w="180975" h="180975">
-                <a:moveTo>
-                  <a:pt x="0" y="0"/>
-                </a:moveTo>
-                <a:lnTo>
-                  <a:pt x="180975" y="0"/>
-                </a:lnTo>
-                <a:lnTo>
-                  <a:pt x="180975" y="180975"/>
-                </a:lnTo>
-                <a:lnTo>
-                  <a:pt x="0" y="180975"/>
-                </a:lnTo>
-                <a:close/>
-              </a:path>
-            </a:pathLst>
-          </a:custGeom>
-          <a:solidFill>
-            <a:srgbClr val="A1BCCD"/>
-          </a:solidFill>
-          <a:ln w="5239">
-            <a:solidFill>
-              <a:srgbClr val="FFFFFF"/>
-            </a:solidFill>
-            <a:prstDash val="solid"/>
-          </a:ln>
-        </p:spPr>
-      </p:sp>
-      <p:sp>
-        <p:nvSpPr>
-          <p:cNvPr id="251" name="path-248">
-            <a:extLst>
-              <a:ext uri="{FF2B5EF4-FFF2-40B4-BE49-F238E27FC236}">
-                <a16:creationId xmlns:a16="http://schemas.microsoft.com/office/drawing/2014/main" id="{544E6C35-6A2B-4124-AFA2-84254FDBF069}"/>
-              </a:ext>
-            </a:extLst>
-          </p:cNvPr>
-          <p:cNvSpPr>
-            <a:spLocks noGrp="1"/>
-          </p:cNvSpPr>
-          <p:nvPr/>
-        </p:nvSpPr>
-        <p:spPr>
-          <a:xfrm>
-            <a:off x="15524943" y="6987960"/>
-            <a:ext cx="168706" cy="168706"/>
-          </a:xfrm>
-          <a:custGeom>
-            <a:avLst/>
-            <a:gdLst/>
-            <a:ahLst/>
-            <a:cxnLst/>
-            <a:rect l="0" t="0" r="0" b="0"/>
-            <a:pathLst>
-              <a:path w="180975" h="180975">
-                <a:moveTo>
-                  <a:pt x="0" y="0"/>
-                </a:moveTo>
-                <a:lnTo>
-                  <a:pt x="180975" y="0"/>
-                </a:lnTo>
-                <a:lnTo>
-                  <a:pt x="180975" y="180975"/>
-                </a:lnTo>
-                <a:lnTo>
-                  <a:pt x="0" y="180975"/>
-                </a:lnTo>
-                <a:close/>
-              </a:path>
-            </a:pathLst>
-          </a:custGeom>
-          <a:solidFill>
-            <a:srgbClr val="4B7D9D"/>
-          </a:solidFill>
-          <a:ln w="5239">
-            <a:solidFill>
-              <a:srgbClr val="FFFFFF"/>
-            </a:solidFill>
-            <a:prstDash val="solid"/>
-          </a:ln>
-        </p:spPr>
-      </p:sp>
-      <p:sp>
-        <p:nvSpPr>
-          <p:cNvPr id="252" name="path-249">
-            <a:extLst>
-              <a:ext uri="{FF2B5EF4-FFF2-40B4-BE49-F238E27FC236}">
-                <a16:creationId xmlns:a16="http://schemas.microsoft.com/office/drawing/2014/main" id="{5C2BEFF0-0193-4524-AF20-92B65DA090A4}"/>
-              </a:ext>
-            </a:extLst>
-          </p:cNvPr>
-          <p:cNvSpPr>
-            <a:spLocks noGrp="1"/>
-          </p:cNvSpPr>
-          <p:nvPr/>
-        </p:nvSpPr>
-        <p:spPr>
-          <a:xfrm>
-            <a:off x="15738045" y="6987960"/>
-            <a:ext cx="168706" cy="168706"/>
-          </a:xfrm>
-          <a:custGeom>
-            <a:avLst/>
-            <a:gdLst/>
-            <a:ahLst/>
-            <a:cxnLst/>
-            <a:rect l="0" t="0" r="0" b="0"/>
-            <a:pathLst>
-              <a:path w="180975" h="180975">
-                <a:moveTo>
-                  <a:pt x="0" y="0"/>
-                </a:moveTo>
-                <a:lnTo>
-                  <a:pt x="180975" y="0"/>
-                </a:lnTo>
-                <a:lnTo>
-                  <a:pt x="180975" y="180975"/>
-                </a:lnTo>
-                <a:lnTo>
-                  <a:pt x="0" y="180975"/>
-                </a:lnTo>
-                <a:close/>
-              </a:path>
-            </a:pathLst>
-          </a:custGeom>
-          <a:solidFill>
-            <a:srgbClr val="3E7395"/>
-          </a:solidFill>
-          <a:ln w="5239">
-            <a:solidFill>
-              <a:srgbClr val="FFFFFF"/>
-            </a:solidFill>
-            <a:prstDash val="solid"/>
-          </a:ln>
-        </p:spPr>
-      </p:sp>
-      <p:sp>
-        <p:nvSpPr>
-          <p:cNvPr id="253" name="path-250">
-            <a:extLst>
-              <a:ext uri="{FF2B5EF4-FFF2-40B4-BE49-F238E27FC236}">
-                <a16:creationId xmlns:a16="http://schemas.microsoft.com/office/drawing/2014/main" id="{CAE6394C-C36B-4F6B-A2F7-584E60561160}"/>
-              </a:ext>
-            </a:extLst>
-          </p:cNvPr>
-          <p:cNvSpPr>
-            <a:spLocks noGrp="1"/>
-          </p:cNvSpPr>
-          <p:nvPr/>
-        </p:nvSpPr>
-        <p:spPr>
-          <a:xfrm>
-            <a:off x="13393926" y="7201062"/>
-            <a:ext cx="168706" cy="168706"/>
-          </a:xfrm>
-          <a:custGeom>
-            <a:avLst/>
-            <a:gdLst/>
-            <a:ahLst/>
-            <a:cxnLst/>
-            <a:rect l="0" t="0" r="0" b="0"/>
-            <a:pathLst>
-              <a:path w="180975" h="180975">
-                <a:moveTo>
-                  <a:pt x="0" y="0"/>
-                </a:moveTo>
-                <a:lnTo>
-                  <a:pt x="180975" y="0"/>
-                </a:lnTo>
-                <a:lnTo>
-                  <a:pt x="180975" y="180975"/>
-                </a:lnTo>
-                <a:lnTo>
-                  <a:pt x="0" y="180975"/>
-                </a:lnTo>
-                <a:close/>
-              </a:path>
-            </a:pathLst>
-          </a:custGeom>
-          <a:solidFill>
-            <a:srgbClr val="D1E0E8"/>
-          </a:solidFill>
-          <a:ln w="5239">
-            <a:solidFill>
-              <a:srgbClr val="FFFFFF"/>
-            </a:solidFill>
-            <a:prstDash val="solid"/>
-          </a:ln>
-        </p:spPr>
-      </p:sp>
-      <p:sp>
-        <p:nvSpPr>
-          <p:cNvPr id="254" name="path-251">
-            <a:extLst>
-              <a:ext uri="{FF2B5EF4-FFF2-40B4-BE49-F238E27FC236}">
-                <a16:creationId xmlns:a16="http://schemas.microsoft.com/office/drawing/2014/main" id="{8CC6DC41-D64D-470E-9945-BFC37E6AE1F6}"/>
-              </a:ext>
-            </a:extLst>
-          </p:cNvPr>
-          <p:cNvSpPr>
-            <a:spLocks noGrp="1"/>
-          </p:cNvSpPr>
-          <p:nvPr/>
-        </p:nvSpPr>
-        <p:spPr>
-          <a:xfrm>
-            <a:off x="13607028" y="7201062"/>
-            <a:ext cx="168706" cy="168706"/>
-          </a:xfrm>
-          <a:custGeom>
-            <a:avLst/>
-            <a:gdLst/>
-            <a:ahLst/>
-            <a:cxnLst/>
-            <a:rect l="0" t="0" r="0" b="0"/>
-            <a:pathLst>
-              <a:path w="180975" h="180975">
-                <a:moveTo>
-                  <a:pt x="0" y="0"/>
-                </a:moveTo>
-                <a:lnTo>
-                  <a:pt x="180975" y="0"/>
-                </a:lnTo>
-                <a:lnTo>
-                  <a:pt x="180975" y="180975"/>
-                </a:lnTo>
-                <a:lnTo>
-                  <a:pt x="0" y="180975"/>
-                </a:lnTo>
-                <a:close/>
-              </a:path>
-            </a:pathLst>
-          </a:custGeom>
-          <a:solidFill>
-            <a:srgbClr val="BFD2DE"/>
-          </a:solidFill>
-          <a:ln w="5239">
-            <a:solidFill>
-              <a:srgbClr val="FFFFFF"/>
-            </a:solidFill>
-            <a:prstDash val="solid"/>
-          </a:ln>
-        </p:spPr>
-      </p:sp>
-      <p:sp>
-        <p:nvSpPr>
-          <p:cNvPr id="255" name="path-252">
-            <a:extLst>
-              <a:ext uri="{FF2B5EF4-FFF2-40B4-BE49-F238E27FC236}">
-                <a16:creationId xmlns:a16="http://schemas.microsoft.com/office/drawing/2014/main" id="{3FE8A893-73C5-4FFA-BBF1-662AD9A118A2}"/>
-              </a:ext>
-            </a:extLst>
-          </p:cNvPr>
-          <p:cNvSpPr>
-            <a:spLocks noGrp="1"/>
-          </p:cNvSpPr>
-          <p:nvPr/>
-        </p:nvSpPr>
-        <p:spPr>
-          <a:xfrm>
-            <a:off x="13820129" y="7201062"/>
-            <a:ext cx="168706" cy="168706"/>
-          </a:xfrm>
-          <a:custGeom>
-            <a:avLst/>
-            <a:gdLst/>
-            <a:ahLst/>
-            <a:cxnLst/>
-            <a:rect l="0" t="0" r="0" b="0"/>
-            <a:pathLst>
-              <a:path w="180975" h="180975">
-                <a:moveTo>
-                  <a:pt x="0" y="0"/>
-                </a:moveTo>
-                <a:lnTo>
-                  <a:pt x="180975" y="0"/>
-                </a:lnTo>
-                <a:lnTo>
-                  <a:pt x="180975" y="180975"/>
-                </a:lnTo>
-                <a:lnTo>
-                  <a:pt x="0" y="180975"/>
-                </a:lnTo>
-                <a:close/>
-              </a:path>
-            </a:pathLst>
-          </a:custGeom>
-          <a:solidFill>
-            <a:srgbClr val="729AB3"/>
-          </a:solidFill>
-          <a:ln w="5239">
-            <a:solidFill>
-              <a:srgbClr val="FFFFFF"/>
-            </a:solidFill>
-            <a:prstDash val="solid"/>
-          </a:ln>
-        </p:spPr>
-      </p:sp>
-      <p:sp>
-        <p:nvSpPr>
-          <p:cNvPr id="256" name="path-253">
-            <a:extLst>
-              <a:ext uri="{FF2B5EF4-FFF2-40B4-BE49-F238E27FC236}">
-                <a16:creationId xmlns:a16="http://schemas.microsoft.com/office/drawing/2014/main" id="{6D3A056E-302F-4803-BC42-20C536F02A8E}"/>
-              </a:ext>
-            </a:extLst>
-          </p:cNvPr>
-          <p:cNvSpPr>
-            <a:spLocks noGrp="1"/>
-          </p:cNvSpPr>
-          <p:nvPr/>
-        </p:nvSpPr>
-        <p:spPr>
-          <a:xfrm>
-            <a:off x="14033231" y="7201062"/>
-            <a:ext cx="168706" cy="168706"/>
-          </a:xfrm>
-          <a:custGeom>
-            <a:avLst/>
-            <a:gdLst/>
-            <a:ahLst/>
-            <a:cxnLst/>
-            <a:rect l="0" t="0" r="0" b="0"/>
-            <a:pathLst>
-              <a:path w="180975" h="180975">
-                <a:moveTo>
-                  <a:pt x="0" y="0"/>
-                </a:moveTo>
-                <a:lnTo>
-                  <a:pt x="180975" y="0"/>
-                </a:lnTo>
-                <a:lnTo>
-                  <a:pt x="180975" y="180975"/>
-                </a:lnTo>
-                <a:lnTo>
-                  <a:pt x="0" y="180975"/>
-                </a:lnTo>
-                <a:close/>
-              </a:path>
-            </a:pathLst>
-          </a:custGeom>
-          <a:solidFill>
-            <a:srgbClr val="346C90"/>
-          </a:solidFill>
-          <a:ln w="5239">
-            <a:solidFill>
-              <a:srgbClr val="FFFFFF"/>
-            </a:solidFill>
-            <a:prstDash val="solid"/>
-          </a:ln>
-        </p:spPr>
-      </p:sp>
-      <p:sp>
-        <p:nvSpPr>
-          <p:cNvPr id="257" name="path-254">
-            <a:extLst>
-              <a:ext uri="{FF2B5EF4-FFF2-40B4-BE49-F238E27FC236}">
-                <a16:creationId xmlns:a16="http://schemas.microsoft.com/office/drawing/2014/main" id="{E33B8C70-3874-4528-9B4F-6DAFA66C366B}"/>
-              </a:ext>
-            </a:extLst>
-          </p:cNvPr>
-          <p:cNvSpPr>
-            <a:spLocks noGrp="1"/>
-          </p:cNvSpPr>
-          <p:nvPr/>
-        </p:nvSpPr>
-        <p:spPr>
-          <a:xfrm>
-            <a:off x="14246333" y="7201062"/>
-            <a:ext cx="168706" cy="168706"/>
-          </a:xfrm>
-          <a:custGeom>
-            <a:avLst/>
-            <a:gdLst/>
-            <a:ahLst/>
-            <a:cxnLst/>
-            <a:rect l="0" t="0" r="0" b="0"/>
-            <a:pathLst>
-              <a:path w="180975" h="180975">
-                <a:moveTo>
-                  <a:pt x="0" y="0"/>
-                </a:moveTo>
-                <a:lnTo>
-                  <a:pt x="180975" y="0"/>
-                </a:lnTo>
-                <a:lnTo>
-                  <a:pt x="180975" y="180975"/>
-                </a:lnTo>
-                <a:lnTo>
-                  <a:pt x="0" y="180975"/>
-                </a:lnTo>
-                <a:close/>
-              </a:path>
-            </a:pathLst>
-          </a:custGeom>
-          <a:solidFill>
-            <a:srgbClr val="648FAB"/>
-          </a:solidFill>
-          <a:ln w="5239">
-            <a:solidFill>
-              <a:srgbClr val="FFFFFF"/>
-            </a:solidFill>
-            <a:prstDash val="solid"/>
-          </a:ln>
-        </p:spPr>
-      </p:sp>
-      <p:sp>
-        <p:nvSpPr>
-          <p:cNvPr id="258" name="path-255">
-            <a:extLst>
-              <a:ext uri="{FF2B5EF4-FFF2-40B4-BE49-F238E27FC236}">
-                <a16:creationId xmlns:a16="http://schemas.microsoft.com/office/drawing/2014/main" id="{7864529E-D628-42C3-AE0B-7FAA5CD876CF}"/>
-              </a:ext>
-            </a:extLst>
-          </p:cNvPr>
-          <p:cNvSpPr>
-            <a:spLocks noGrp="1"/>
-          </p:cNvSpPr>
-          <p:nvPr/>
-        </p:nvSpPr>
-        <p:spPr>
-          <a:xfrm>
-            <a:off x="14459435" y="7201062"/>
-            <a:ext cx="168706" cy="168706"/>
-          </a:xfrm>
-          <a:custGeom>
-            <a:avLst/>
-            <a:gdLst/>
-            <a:ahLst/>
-            <a:cxnLst/>
-            <a:rect l="0" t="0" r="0" b="0"/>
-            <a:pathLst>
-              <a:path w="180975" h="180975">
-                <a:moveTo>
-                  <a:pt x="0" y="0"/>
-                </a:moveTo>
-                <a:lnTo>
-                  <a:pt x="180975" y="0"/>
-                </a:lnTo>
-                <a:lnTo>
-                  <a:pt x="180975" y="180975"/>
-                </a:lnTo>
-                <a:lnTo>
-                  <a:pt x="0" y="180975"/>
-                </a:lnTo>
-                <a:close/>
-              </a:path>
-            </a:pathLst>
-          </a:custGeom>
-          <a:solidFill>
-            <a:srgbClr val="B7CCD9"/>
-          </a:solidFill>
-          <a:ln w="5239">
-            <a:solidFill>
-              <a:srgbClr val="FFFFFF"/>
-            </a:solidFill>
-            <a:prstDash val="solid"/>
-          </a:ln>
-        </p:spPr>
-      </p:sp>
-      <p:sp>
-        <p:nvSpPr>
-          <p:cNvPr id="259" name="path-256">
-            <a:extLst>
-              <a:ext uri="{FF2B5EF4-FFF2-40B4-BE49-F238E27FC236}">
-                <a16:creationId xmlns:a16="http://schemas.microsoft.com/office/drawing/2014/main" id="{FB194D82-BE35-47F0-9EBC-B54B50C06CCE}"/>
-              </a:ext>
-            </a:extLst>
-          </p:cNvPr>
-          <p:cNvSpPr>
-            <a:spLocks noGrp="1"/>
-          </p:cNvSpPr>
-          <p:nvPr/>
-        </p:nvSpPr>
-        <p:spPr>
-          <a:xfrm>
-            <a:off x="14672536" y="7201062"/>
-            <a:ext cx="168706" cy="168706"/>
-          </a:xfrm>
-          <a:custGeom>
-            <a:avLst/>
-            <a:gdLst/>
-            <a:ahLst/>
-            <a:cxnLst/>
-            <a:rect l="0" t="0" r="0" b="0"/>
-            <a:pathLst>
-              <a:path w="180975" h="180975">
-                <a:moveTo>
-                  <a:pt x="0" y="0"/>
-                </a:moveTo>
-                <a:lnTo>
-                  <a:pt x="180975" y="0"/>
-                </a:lnTo>
-                <a:lnTo>
-                  <a:pt x="180975" y="180975"/>
-                </a:lnTo>
-                <a:lnTo>
-                  <a:pt x="0" y="180975"/>
-                </a:lnTo>
-                <a:close/>
-              </a:path>
-            </a:pathLst>
-          </a:custGeom>
-          <a:solidFill>
-            <a:srgbClr val="D1DFE8"/>
-          </a:solidFill>
-          <a:ln w="5239">
-            <a:solidFill>
-              <a:srgbClr val="FFFFFF"/>
-            </a:solidFill>
-            <a:prstDash val="solid"/>
-          </a:ln>
-        </p:spPr>
-      </p:sp>
-      <p:sp>
-        <p:nvSpPr>
-          <p:cNvPr id="260" name="path-257">
-            <a:extLst>
-              <a:ext uri="{FF2B5EF4-FFF2-40B4-BE49-F238E27FC236}">
-                <a16:creationId xmlns:a16="http://schemas.microsoft.com/office/drawing/2014/main" id="{816A66D4-AAEB-44E9-AC44-8A47810DF776}"/>
-              </a:ext>
-            </a:extLst>
-          </p:cNvPr>
-          <p:cNvSpPr>
-            <a:spLocks noGrp="1"/>
-          </p:cNvSpPr>
-          <p:nvPr/>
-        </p:nvSpPr>
-        <p:spPr>
-          <a:xfrm>
-            <a:off x="14885638" y="7201062"/>
-            <a:ext cx="168706" cy="168706"/>
-          </a:xfrm>
-          <a:custGeom>
-            <a:avLst/>
-            <a:gdLst/>
-            <a:ahLst/>
-            <a:cxnLst/>
-            <a:rect l="0" t="0" r="0" b="0"/>
-            <a:pathLst>
-              <a:path w="180975" h="180975">
-                <a:moveTo>
-                  <a:pt x="0" y="0"/>
-                </a:moveTo>
-                <a:lnTo>
-                  <a:pt x="180975" y="0"/>
-                </a:lnTo>
-                <a:lnTo>
-                  <a:pt x="180975" y="180975"/>
-                </a:lnTo>
-                <a:lnTo>
-                  <a:pt x="0" y="180975"/>
-                </a:lnTo>
-                <a:close/>
-              </a:path>
-            </a:pathLst>
-          </a:custGeom>
-          <a:solidFill>
-            <a:srgbClr val="D1DFE8"/>
-          </a:solidFill>
-          <a:ln w="5239">
-            <a:solidFill>
-              <a:srgbClr val="FFFFFF"/>
-            </a:solidFill>
-            <a:prstDash val="solid"/>
-          </a:ln>
-        </p:spPr>
-      </p:sp>
-      <p:sp>
-        <p:nvSpPr>
-          <p:cNvPr id="261" name="path-258">
-            <a:extLst>
-              <a:ext uri="{FF2B5EF4-FFF2-40B4-BE49-F238E27FC236}">
-                <a16:creationId xmlns:a16="http://schemas.microsoft.com/office/drawing/2014/main" id="{06D7380D-6A53-4BA2-8963-A97235FF6056}"/>
-              </a:ext>
-            </a:extLst>
-          </p:cNvPr>
-          <p:cNvSpPr>
-            <a:spLocks noGrp="1"/>
-          </p:cNvSpPr>
-          <p:nvPr/>
-        </p:nvSpPr>
-        <p:spPr>
-          <a:xfrm>
-            <a:off x="15098740" y="7201062"/>
-            <a:ext cx="168706" cy="168706"/>
-          </a:xfrm>
-          <a:custGeom>
-            <a:avLst/>
-            <a:gdLst/>
-            <a:ahLst/>
-            <a:cxnLst/>
-            <a:rect l="0" t="0" r="0" b="0"/>
-            <a:pathLst>
-              <a:path w="180975" h="180975">
-                <a:moveTo>
-                  <a:pt x="0" y="0"/>
-                </a:moveTo>
-                <a:lnTo>
-                  <a:pt x="180975" y="0"/>
-                </a:lnTo>
-                <a:lnTo>
-                  <a:pt x="180975" y="180975"/>
-                </a:lnTo>
-                <a:lnTo>
-                  <a:pt x="0" y="180975"/>
-                </a:lnTo>
-                <a:close/>
-              </a:path>
-            </a:pathLst>
-          </a:custGeom>
-          <a:solidFill>
-            <a:srgbClr val="BACFDB"/>
-          </a:solidFill>
-          <a:ln w="5239">
-            <a:solidFill>
-              <a:srgbClr val="FFFFFF"/>
-            </a:solidFill>
-            <a:prstDash val="solid"/>
-          </a:ln>
-        </p:spPr>
-      </p:sp>
-      <p:sp>
-        <p:nvSpPr>
-          <p:cNvPr id="262" name="path-259">
-            <a:extLst>
-              <a:ext uri="{FF2B5EF4-FFF2-40B4-BE49-F238E27FC236}">
-                <a16:creationId xmlns:a16="http://schemas.microsoft.com/office/drawing/2014/main" id="{ABBFF461-3C13-4C59-87E7-1BA3BBDA51E9}"/>
-              </a:ext>
-            </a:extLst>
-          </p:cNvPr>
-          <p:cNvSpPr>
-            <a:spLocks noGrp="1"/>
-          </p:cNvSpPr>
-          <p:nvPr/>
-        </p:nvSpPr>
-        <p:spPr>
-          <a:xfrm>
-            <a:off x="15311841" y="7201062"/>
-            <a:ext cx="168706" cy="168706"/>
-          </a:xfrm>
-          <a:custGeom>
-            <a:avLst/>
-            <a:gdLst/>
-            <a:ahLst/>
-            <a:cxnLst/>
-            <a:rect l="0" t="0" r="0" b="0"/>
-            <a:pathLst>
-              <a:path w="180975" h="180975">
-                <a:moveTo>
-                  <a:pt x="0" y="0"/>
-                </a:moveTo>
-                <a:lnTo>
-                  <a:pt x="180975" y="0"/>
-                </a:lnTo>
-                <a:lnTo>
-                  <a:pt x="180975" y="180975"/>
-                </a:lnTo>
-                <a:lnTo>
-                  <a:pt x="0" y="180975"/>
-                </a:lnTo>
-                <a:close/>
-              </a:path>
-            </a:pathLst>
-          </a:custGeom>
-          <a:solidFill>
-            <a:srgbClr val="6A93AE"/>
-          </a:solidFill>
-          <a:ln w="5239">
-            <a:solidFill>
-              <a:srgbClr val="FFFFFF"/>
-            </a:solidFill>
-            <a:prstDash val="solid"/>
-          </a:ln>
-        </p:spPr>
-      </p:sp>
-      <p:sp>
-        <p:nvSpPr>
-          <p:cNvPr id="263" name="path-260">
-            <a:extLst>
-              <a:ext uri="{FF2B5EF4-FFF2-40B4-BE49-F238E27FC236}">
-                <a16:creationId xmlns:a16="http://schemas.microsoft.com/office/drawing/2014/main" id="{6ED4C75B-CD8B-4229-AA0A-74F30A9C1A0F}"/>
-              </a:ext>
-            </a:extLst>
-          </p:cNvPr>
-          <p:cNvSpPr>
-            <a:spLocks noGrp="1"/>
-          </p:cNvSpPr>
-          <p:nvPr/>
-        </p:nvSpPr>
-        <p:spPr>
-          <a:xfrm>
-            <a:off x="15524943" y="7201062"/>
-            <a:ext cx="168706" cy="168706"/>
-          </a:xfrm>
-          <a:custGeom>
-            <a:avLst/>
-            <a:gdLst/>
-            <a:ahLst/>
-            <a:cxnLst/>
-            <a:rect l="0" t="0" r="0" b="0"/>
-            <a:pathLst>
-              <a:path w="180975" h="180975">
-                <a:moveTo>
-                  <a:pt x="0" y="0"/>
-                </a:moveTo>
-                <a:lnTo>
-                  <a:pt x="180975" y="0"/>
-                </a:lnTo>
-                <a:lnTo>
-                  <a:pt x="180975" y="180975"/>
-                </a:lnTo>
-                <a:lnTo>
-                  <a:pt x="0" y="180975"/>
-                </a:lnTo>
-                <a:close/>
-              </a:path>
-            </a:pathLst>
-          </a:custGeom>
-          <a:solidFill>
-            <a:srgbClr val="346C90"/>
-          </a:solidFill>
-          <a:ln w="5239">
-            <a:solidFill>
-              <a:srgbClr val="FFFFFF"/>
-            </a:solidFill>
-            <a:prstDash val="solid"/>
-          </a:ln>
-        </p:spPr>
-      </p:sp>
-      <p:sp>
-        <p:nvSpPr>
-          <p:cNvPr id="264" name="path-261">
-            <a:extLst>
-              <a:ext uri="{FF2B5EF4-FFF2-40B4-BE49-F238E27FC236}">
-                <a16:creationId xmlns:a16="http://schemas.microsoft.com/office/drawing/2014/main" id="{5ECA6C2F-A8FF-43DC-A664-6D00438B75BE}"/>
-              </a:ext>
-            </a:extLst>
-          </p:cNvPr>
-          <p:cNvSpPr>
-            <a:spLocks noGrp="1"/>
-          </p:cNvSpPr>
-          <p:nvPr/>
-        </p:nvSpPr>
-        <p:spPr>
-          <a:xfrm>
-            <a:off x="15738045" y="7201062"/>
-            <a:ext cx="168706" cy="168706"/>
-          </a:xfrm>
-          <a:custGeom>
-            <a:avLst/>
-            <a:gdLst/>
-            <a:ahLst/>
-            <a:cxnLst/>
-            <a:rect l="0" t="0" r="0" b="0"/>
-            <a:pathLst>
-              <a:path w="180975" h="180975">
-                <a:moveTo>
-                  <a:pt x="0" y="0"/>
-                </a:moveTo>
-                <a:lnTo>
-                  <a:pt x="180975" y="0"/>
-                </a:lnTo>
-                <a:lnTo>
-                  <a:pt x="180975" y="180975"/>
-                </a:lnTo>
-                <a:lnTo>
-                  <a:pt x="0" y="180975"/>
-                </a:lnTo>
-                <a:close/>
-              </a:path>
-            </a:pathLst>
-          </a:custGeom>
-          <a:solidFill>
-            <a:srgbClr val="6C95B0"/>
-          </a:solidFill>
-          <a:ln w="5239">
-            <a:solidFill>
-              <a:srgbClr val="FFFFFF"/>
-            </a:solidFill>
-            <a:prstDash val="solid"/>
-          </a:ln>
-        </p:spPr>
-      </p:sp>
-      <p:sp>
-        <p:nvSpPr>
-          <p:cNvPr id="265" name="path-262">
-            <a:extLst>
-              <a:ext uri="{FF2B5EF4-FFF2-40B4-BE49-F238E27FC236}">
-                <a16:creationId xmlns:a16="http://schemas.microsoft.com/office/drawing/2014/main" id="{7C9FA821-9E0D-4702-9778-E3F90F56A594}"/>
-              </a:ext>
-            </a:extLst>
-          </p:cNvPr>
-          <p:cNvSpPr>
-            <a:spLocks noGrp="1"/>
-          </p:cNvSpPr>
-          <p:nvPr/>
-        </p:nvSpPr>
-        <p:spPr>
-          <a:xfrm>
-            <a:off x="13393926" y="7414163"/>
-            <a:ext cx="168706" cy="168706"/>
-          </a:xfrm>
-          <a:custGeom>
-            <a:avLst/>
-            <a:gdLst/>
-            <a:ahLst/>
-            <a:cxnLst/>
-            <a:rect l="0" t="0" r="0" b="0"/>
-            <a:pathLst>
-              <a:path w="180975" h="180975">
-                <a:moveTo>
-                  <a:pt x="0" y="0"/>
-                </a:moveTo>
-                <a:lnTo>
-                  <a:pt x="180975" y="0"/>
-                </a:lnTo>
-                <a:lnTo>
-                  <a:pt x="180975" y="180975"/>
-                </a:lnTo>
-                <a:lnTo>
-                  <a:pt x="0" y="180975"/>
-                </a:lnTo>
-                <a:close/>
-              </a:path>
-            </a:pathLst>
-          </a:custGeom>
-          <a:solidFill>
-            <a:srgbClr val="CBDBE5"/>
-          </a:solidFill>
-          <a:ln w="5239">
-            <a:solidFill>
-              <a:srgbClr val="FFFFFF"/>
-            </a:solidFill>
-            <a:prstDash val="solid"/>
-          </a:ln>
-        </p:spPr>
-      </p:sp>
-      <p:sp>
-        <p:nvSpPr>
-          <p:cNvPr id="266" name="path-263">
-            <a:extLst>
-              <a:ext uri="{FF2B5EF4-FFF2-40B4-BE49-F238E27FC236}">
-                <a16:creationId xmlns:a16="http://schemas.microsoft.com/office/drawing/2014/main" id="{C877292D-4FE9-4ACE-9DCA-BEE6D166CD97}"/>
-              </a:ext>
-            </a:extLst>
-          </p:cNvPr>
-          <p:cNvSpPr>
-            <a:spLocks noGrp="1"/>
-          </p:cNvSpPr>
-          <p:nvPr/>
-        </p:nvSpPr>
-        <p:spPr>
-          <a:xfrm>
-            <a:off x="13607028" y="7414163"/>
-            <a:ext cx="168706" cy="168706"/>
-          </a:xfrm>
-          <a:custGeom>
-            <a:avLst/>
-            <a:gdLst/>
-            <a:ahLst/>
-            <a:cxnLst/>
-            <a:rect l="0" t="0" r="0" b="0"/>
-            <a:pathLst>
-              <a:path w="180975" h="180975">
-                <a:moveTo>
-                  <a:pt x="0" y="0"/>
-                </a:moveTo>
-                <a:lnTo>
-                  <a:pt x="180975" y="0"/>
-                </a:lnTo>
-                <a:lnTo>
-                  <a:pt x="180975" y="180975"/>
-                </a:lnTo>
-                <a:lnTo>
-                  <a:pt x="0" y="180975"/>
-                </a:lnTo>
-                <a:close/>
-              </a:path>
-            </a:pathLst>
-          </a:custGeom>
-          <a:solidFill>
-            <a:srgbClr val="94B3C6"/>
-          </a:solidFill>
-          <a:ln w="5239">
-            <a:solidFill>
-              <a:srgbClr val="FFFFFF"/>
-            </a:solidFill>
-            <a:prstDash val="solid"/>
-          </a:ln>
-        </p:spPr>
-      </p:sp>
-      <p:sp>
-        <p:nvSpPr>
-          <p:cNvPr id="267" name="path-264">
-            <a:extLst>
-              <a:ext uri="{FF2B5EF4-FFF2-40B4-BE49-F238E27FC236}">
-                <a16:creationId xmlns:a16="http://schemas.microsoft.com/office/drawing/2014/main" id="{5DE1C58E-1143-4C3A-A784-81AB74D2ECBE}"/>
-              </a:ext>
-            </a:extLst>
-          </p:cNvPr>
-          <p:cNvSpPr>
-            <a:spLocks noGrp="1"/>
-          </p:cNvSpPr>
-          <p:nvPr/>
-        </p:nvSpPr>
-        <p:spPr>
-          <a:xfrm>
-            <a:off x="13820129" y="7414163"/>
-            <a:ext cx="168706" cy="168706"/>
-          </a:xfrm>
-          <a:custGeom>
-            <a:avLst/>
-            <a:gdLst/>
-            <a:ahLst/>
-            <a:cxnLst/>
-            <a:rect l="0" t="0" r="0" b="0"/>
-            <a:pathLst>
-              <a:path w="180975" h="180975">
-                <a:moveTo>
-                  <a:pt x="0" y="0"/>
-                </a:moveTo>
-                <a:lnTo>
-                  <a:pt x="180975" y="0"/>
-                </a:lnTo>
-                <a:lnTo>
-                  <a:pt x="180975" y="180975"/>
-                </a:lnTo>
-                <a:lnTo>
-                  <a:pt x="0" y="180975"/>
-                </a:lnTo>
-                <a:close/>
-              </a:path>
-            </a:pathLst>
-          </a:custGeom>
-          <a:solidFill>
-            <a:srgbClr val="417697"/>
-          </a:solidFill>
-          <a:ln w="5239">
-            <a:solidFill>
-              <a:srgbClr val="FFFFFF"/>
-            </a:solidFill>
-            <a:prstDash val="solid"/>
-          </a:ln>
-        </p:spPr>
-      </p:sp>
-      <p:sp>
-        <p:nvSpPr>
-          <p:cNvPr id="268" name="path-265">
-            <a:extLst>
-              <a:ext uri="{FF2B5EF4-FFF2-40B4-BE49-F238E27FC236}">
-                <a16:creationId xmlns:a16="http://schemas.microsoft.com/office/drawing/2014/main" id="{69EC55F9-57D7-4212-A3AB-3970324A0675}"/>
-              </a:ext>
-            </a:extLst>
-          </p:cNvPr>
-          <p:cNvSpPr>
-            <a:spLocks noGrp="1"/>
-          </p:cNvSpPr>
-          <p:nvPr/>
-        </p:nvSpPr>
-        <p:spPr>
-          <a:xfrm>
-            <a:off x="14033231" y="7414163"/>
-            <a:ext cx="168706" cy="168706"/>
-          </a:xfrm>
-          <a:custGeom>
-            <a:avLst/>
-            <a:gdLst/>
-            <a:ahLst/>
-            <a:cxnLst/>
-            <a:rect l="0" t="0" r="0" b="0"/>
-            <a:pathLst>
-              <a:path w="180975" h="180975">
-                <a:moveTo>
-                  <a:pt x="0" y="0"/>
-                </a:moveTo>
-                <a:lnTo>
-                  <a:pt x="180975" y="0"/>
-                </a:lnTo>
-                <a:lnTo>
-                  <a:pt x="180975" y="180975"/>
-                </a:lnTo>
-                <a:lnTo>
-                  <a:pt x="0" y="180975"/>
-                </a:lnTo>
-                <a:close/>
-              </a:path>
-            </a:pathLst>
-          </a:custGeom>
-          <a:solidFill>
-            <a:srgbClr val="467A9A"/>
-          </a:solidFill>
-          <a:ln w="5239">
-            <a:solidFill>
-              <a:srgbClr val="FFFFFF"/>
-            </a:solidFill>
-            <a:prstDash val="solid"/>
-          </a:ln>
-        </p:spPr>
-      </p:sp>
-      <p:sp>
-        <p:nvSpPr>
-          <p:cNvPr id="269" name="path-266">
-            <a:extLst>
-              <a:ext uri="{FF2B5EF4-FFF2-40B4-BE49-F238E27FC236}">
-                <a16:creationId xmlns:a16="http://schemas.microsoft.com/office/drawing/2014/main" id="{91C6DB8C-0C8E-4CE2-BD4D-9CB79619D046}"/>
-              </a:ext>
-            </a:extLst>
-          </p:cNvPr>
-          <p:cNvSpPr>
-            <a:spLocks noGrp="1"/>
-          </p:cNvSpPr>
-          <p:nvPr/>
-        </p:nvSpPr>
-        <p:spPr>
-          <a:xfrm>
-            <a:off x="14246333" y="7414163"/>
-            <a:ext cx="168706" cy="168706"/>
-          </a:xfrm>
-          <a:custGeom>
-            <a:avLst/>
-            <a:gdLst/>
-            <a:ahLst/>
-            <a:cxnLst/>
-            <a:rect l="0" t="0" r="0" b="0"/>
-            <a:pathLst>
-              <a:path w="180975" h="180975">
-                <a:moveTo>
-                  <a:pt x="0" y="0"/>
-                </a:moveTo>
-                <a:lnTo>
-                  <a:pt x="180975" y="0"/>
-                </a:lnTo>
-                <a:lnTo>
-                  <a:pt x="180975" y="180975"/>
-                </a:lnTo>
-                <a:lnTo>
-                  <a:pt x="0" y="180975"/>
-                </a:lnTo>
-                <a:close/>
-              </a:path>
-            </a:pathLst>
-          </a:custGeom>
-          <a:solidFill>
-            <a:srgbClr val="9CB8CA"/>
-          </a:solidFill>
-          <a:ln w="5239">
-            <a:solidFill>
-              <a:srgbClr val="FFFFFF"/>
-            </a:solidFill>
-            <a:prstDash val="solid"/>
-          </a:ln>
-        </p:spPr>
-      </p:sp>
-      <p:sp>
-        <p:nvSpPr>
-          <p:cNvPr id="270" name="path-267">
-            <a:extLst>
-              <a:ext uri="{FF2B5EF4-FFF2-40B4-BE49-F238E27FC236}">
-                <a16:creationId xmlns:a16="http://schemas.microsoft.com/office/drawing/2014/main" id="{96176644-D097-44A8-8F27-A2634A23EC18}"/>
-              </a:ext>
-            </a:extLst>
-          </p:cNvPr>
-          <p:cNvSpPr>
-            <a:spLocks noGrp="1"/>
-          </p:cNvSpPr>
-          <p:nvPr/>
-        </p:nvSpPr>
-        <p:spPr>
-          <a:xfrm>
-            <a:off x="14459435" y="7414163"/>
-            <a:ext cx="168706" cy="168706"/>
-          </a:xfrm>
-          <a:custGeom>
-            <a:avLst/>
-            <a:gdLst/>
-            <a:ahLst/>
-            <a:cxnLst/>
-            <a:rect l="0" t="0" r="0" b="0"/>
-            <a:pathLst>
-              <a:path w="180975" h="180975">
-                <a:moveTo>
-                  <a:pt x="0" y="0"/>
-                </a:moveTo>
-                <a:lnTo>
-                  <a:pt x="180975" y="0"/>
-                </a:lnTo>
-                <a:lnTo>
-                  <a:pt x="180975" y="180975"/>
-                </a:lnTo>
-                <a:lnTo>
-                  <a:pt x="0" y="180975"/>
-                </a:lnTo>
-                <a:close/>
-              </a:path>
-            </a:pathLst>
-          </a:custGeom>
-          <a:solidFill>
-            <a:srgbClr val="CDDDE6"/>
-          </a:solidFill>
-          <a:ln w="5239">
-            <a:solidFill>
-              <a:srgbClr val="FFFFFF"/>
-            </a:solidFill>
-            <a:prstDash val="solid"/>
-          </a:ln>
-        </p:spPr>
-      </p:sp>
-      <p:sp>
-        <p:nvSpPr>
-          <p:cNvPr id="271" name="path-268">
-            <a:extLst>
-              <a:ext uri="{FF2B5EF4-FFF2-40B4-BE49-F238E27FC236}">
-                <a16:creationId xmlns:a16="http://schemas.microsoft.com/office/drawing/2014/main" id="{41545B2A-2A0A-45B2-A878-91DC6AD97053}"/>
-              </a:ext>
-            </a:extLst>
-          </p:cNvPr>
-          <p:cNvSpPr>
-            <a:spLocks noGrp="1"/>
-          </p:cNvSpPr>
-          <p:nvPr/>
-        </p:nvSpPr>
-        <p:spPr>
-          <a:xfrm>
-            <a:off x="14672536" y="7414163"/>
-            <a:ext cx="168706" cy="168706"/>
-          </a:xfrm>
-          <a:custGeom>
-            <a:avLst/>
-            <a:gdLst/>
-            <a:ahLst/>
-            <a:cxnLst/>
-            <a:rect l="0" t="0" r="0" b="0"/>
-            <a:pathLst>
-              <a:path w="180975" h="180975">
-                <a:moveTo>
-                  <a:pt x="0" y="0"/>
-                </a:moveTo>
-                <a:lnTo>
-                  <a:pt x="180975" y="0"/>
-                </a:lnTo>
-                <a:lnTo>
-                  <a:pt x="180975" y="180975"/>
-                </a:lnTo>
-                <a:lnTo>
-                  <a:pt x="0" y="180975"/>
-                </a:lnTo>
-                <a:close/>
-              </a:path>
-            </a:pathLst>
-          </a:custGeom>
-          <a:solidFill>
-            <a:srgbClr val="D1E0E8"/>
-          </a:solidFill>
-          <a:ln w="5239">
-            <a:solidFill>
-              <a:srgbClr val="FFFFFF"/>
-            </a:solidFill>
-            <a:prstDash val="solid"/>
-          </a:ln>
-        </p:spPr>
-      </p:sp>
-      <p:sp>
-        <p:nvSpPr>
-          <p:cNvPr id="272" name="path-269">
-            <a:extLst>
-              <a:ext uri="{FF2B5EF4-FFF2-40B4-BE49-F238E27FC236}">
-                <a16:creationId xmlns:a16="http://schemas.microsoft.com/office/drawing/2014/main" id="{91FF800E-D048-4B3A-AF38-1EEA4883FE9A}"/>
-              </a:ext>
-            </a:extLst>
-          </p:cNvPr>
-          <p:cNvSpPr>
-            <a:spLocks noGrp="1"/>
-          </p:cNvSpPr>
-          <p:nvPr/>
-        </p:nvSpPr>
-        <p:spPr>
-          <a:xfrm>
-            <a:off x="14885638" y="7414163"/>
-            <a:ext cx="168706" cy="168706"/>
-          </a:xfrm>
-          <a:custGeom>
-            <a:avLst/>
-            <a:gdLst/>
-            <a:ahLst/>
-            <a:cxnLst/>
-            <a:rect l="0" t="0" r="0" b="0"/>
-            <a:pathLst>
-              <a:path w="180975" h="180975">
-                <a:moveTo>
-                  <a:pt x="0" y="0"/>
-                </a:moveTo>
-                <a:lnTo>
-                  <a:pt x="180975" y="0"/>
-                </a:lnTo>
-                <a:lnTo>
-                  <a:pt x="180975" y="180975"/>
-                </a:lnTo>
-                <a:lnTo>
-                  <a:pt x="0" y="180975"/>
-                </a:lnTo>
-                <a:close/>
-              </a:path>
-            </a:pathLst>
-          </a:custGeom>
-          <a:solidFill>
-            <a:srgbClr val="C9DAE4"/>
-          </a:solidFill>
-          <a:ln w="5239">
-            <a:solidFill>
-              <a:srgbClr val="FFFFFF"/>
-            </a:solidFill>
-            <a:prstDash val="solid"/>
-          </a:ln>
-        </p:spPr>
-      </p:sp>
-      <p:sp>
-        <p:nvSpPr>
-          <p:cNvPr id="273" name="path-270">
-            <a:extLst>
-              <a:ext uri="{FF2B5EF4-FFF2-40B4-BE49-F238E27FC236}">
-                <a16:creationId xmlns:a16="http://schemas.microsoft.com/office/drawing/2014/main" id="{426CE33E-8D31-45D0-99C3-BF5B943874EF}"/>
-              </a:ext>
-            </a:extLst>
-          </p:cNvPr>
-          <p:cNvSpPr>
-            <a:spLocks noGrp="1"/>
-          </p:cNvSpPr>
-          <p:nvPr/>
-        </p:nvSpPr>
-        <p:spPr>
-          <a:xfrm>
-            <a:off x="15098740" y="7414163"/>
-            <a:ext cx="168706" cy="168706"/>
-          </a:xfrm>
-          <a:custGeom>
-            <a:avLst/>
-            <a:gdLst/>
-            <a:ahLst/>
-            <a:cxnLst/>
-            <a:rect l="0" t="0" r="0" b="0"/>
-            <a:pathLst>
-              <a:path w="180975" h="180975">
-                <a:moveTo>
-                  <a:pt x="0" y="0"/>
-                </a:moveTo>
-                <a:lnTo>
-                  <a:pt x="180975" y="0"/>
-                </a:lnTo>
-                <a:lnTo>
-                  <a:pt x="180975" y="180975"/>
-                </a:lnTo>
-                <a:lnTo>
-                  <a:pt x="0" y="180975"/>
-                </a:lnTo>
-                <a:close/>
-              </a:path>
-            </a:pathLst>
-          </a:custGeom>
-          <a:solidFill>
-            <a:srgbClr val="8CADC1"/>
-          </a:solidFill>
-          <a:ln w="5239">
-            <a:solidFill>
-              <a:srgbClr val="FFFFFF"/>
-            </a:solidFill>
-            <a:prstDash val="solid"/>
-          </a:ln>
-        </p:spPr>
-      </p:sp>
-      <p:sp>
-        <p:nvSpPr>
-          <p:cNvPr id="274" name="path-271">
-            <a:extLst>
-              <a:ext uri="{FF2B5EF4-FFF2-40B4-BE49-F238E27FC236}">
-                <a16:creationId xmlns:a16="http://schemas.microsoft.com/office/drawing/2014/main" id="{31EFE6C8-CE3F-4B0C-B72C-A5A700C17C6E}"/>
-              </a:ext>
-            </a:extLst>
-          </p:cNvPr>
-          <p:cNvSpPr>
-            <a:spLocks noGrp="1"/>
-          </p:cNvSpPr>
-          <p:nvPr/>
-        </p:nvSpPr>
-        <p:spPr>
-          <a:xfrm>
-            <a:off x="15311841" y="7414163"/>
-            <a:ext cx="168706" cy="168706"/>
-          </a:xfrm>
-          <a:custGeom>
-            <a:avLst/>
-            <a:gdLst/>
-            <a:ahLst/>
-            <a:cxnLst/>
-            <a:rect l="0" t="0" r="0" b="0"/>
-            <a:pathLst>
-              <a:path w="180975" h="180975">
-                <a:moveTo>
-                  <a:pt x="0" y="0"/>
-                </a:moveTo>
-                <a:lnTo>
-                  <a:pt x="180975" y="0"/>
-                </a:lnTo>
-                <a:lnTo>
-                  <a:pt x="180975" y="180975"/>
-                </a:lnTo>
-                <a:lnTo>
-                  <a:pt x="0" y="180975"/>
-                </a:lnTo>
-                <a:close/>
-              </a:path>
-            </a:pathLst>
-          </a:custGeom>
-          <a:solidFill>
-            <a:srgbClr val="3C7295"/>
-          </a:solidFill>
-          <a:ln w="5239">
-            <a:solidFill>
-              <a:srgbClr val="FFFFFF"/>
-            </a:solidFill>
-            <a:prstDash val="solid"/>
-          </a:ln>
-        </p:spPr>
-      </p:sp>
-      <p:sp>
-        <p:nvSpPr>
-          <p:cNvPr id="275" name="path-272">
-            <a:extLst>
-              <a:ext uri="{FF2B5EF4-FFF2-40B4-BE49-F238E27FC236}">
-                <a16:creationId xmlns:a16="http://schemas.microsoft.com/office/drawing/2014/main" id="{14A0AD83-FDC0-47A0-908B-ED60BE2C6CA7}"/>
-              </a:ext>
-            </a:extLst>
-          </p:cNvPr>
-          <p:cNvSpPr>
-            <a:spLocks noGrp="1"/>
-          </p:cNvSpPr>
-          <p:nvPr/>
-        </p:nvSpPr>
-        <p:spPr>
-          <a:xfrm>
-            <a:off x="15524943" y="7414163"/>
-            <a:ext cx="168706" cy="168706"/>
-          </a:xfrm>
-          <a:custGeom>
-            <a:avLst/>
-            <a:gdLst/>
-            <a:ahLst/>
-            <a:cxnLst/>
-            <a:rect l="0" t="0" r="0" b="0"/>
-            <a:pathLst>
-              <a:path w="180975" h="180975">
-                <a:moveTo>
-                  <a:pt x="0" y="0"/>
-                </a:moveTo>
-                <a:lnTo>
-                  <a:pt x="180975" y="0"/>
-                </a:lnTo>
-                <a:lnTo>
-                  <a:pt x="180975" y="180975"/>
-                </a:lnTo>
-                <a:lnTo>
-                  <a:pt x="0" y="180975"/>
-                </a:lnTo>
-                <a:close/>
-              </a:path>
-            </a:pathLst>
-          </a:custGeom>
-          <a:solidFill>
-            <a:srgbClr val="4D7E9E"/>
-          </a:solidFill>
-          <a:ln w="5239">
-            <a:solidFill>
-              <a:srgbClr val="FFFFFF"/>
-            </a:solidFill>
-            <a:prstDash val="solid"/>
-          </a:ln>
-        </p:spPr>
-      </p:sp>
-      <p:sp>
-        <p:nvSpPr>
-          <p:cNvPr id="276" name="path-273">
-            <a:extLst>
-              <a:ext uri="{FF2B5EF4-FFF2-40B4-BE49-F238E27FC236}">
-                <a16:creationId xmlns:a16="http://schemas.microsoft.com/office/drawing/2014/main" id="{74AC32C3-5D37-4092-98A2-09F1DCD95427}"/>
-              </a:ext>
-            </a:extLst>
-          </p:cNvPr>
-          <p:cNvSpPr>
-            <a:spLocks noGrp="1"/>
-          </p:cNvSpPr>
-          <p:nvPr/>
-        </p:nvSpPr>
-        <p:spPr>
-          <a:xfrm>
-            <a:off x="15738045" y="7414163"/>
-            <a:ext cx="168706" cy="168706"/>
-          </a:xfrm>
-          <a:custGeom>
-            <a:avLst/>
-            <a:gdLst/>
-            <a:ahLst/>
-            <a:cxnLst/>
-            <a:rect l="0" t="0" r="0" b="0"/>
-            <a:pathLst>
-              <a:path w="180975" h="180975">
-                <a:moveTo>
-                  <a:pt x="0" y="0"/>
-                </a:moveTo>
-                <a:lnTo>
-                  <a:pt x="180975" y="0"/>
-                </a:lnTo>
-                <a:lnTo>
-                  <a:pt x="180975" y="180975"/>
-                </a:lnTo>
-                <a:lnTo>
-                  <a:pt x="0" y="180975"/>
-                </a:lnTo>
-                <a:close/>
-              </a:path>
-            </a:pathLst>
-          </a:custGeom>
-          <a:solidFill>
-            <a:srgbClr val="A4BECF"/>
-          </a:solidFill>
-          <a:ln w="5239">
-            <a:solidFill>
-              <a:srgbClr val="FFFFFF"/>
-            </a:solidFill>
-            <a:prstDash val="solid"/>
-          </a:ln>
-        </p:spPr>
-      </p:sp>
-      <p:sp>
-        <p:nvSpPr>
-          <p:cNvPr id="277" name="path-274">
-            <a:extLst>
-              <a:ext uri="{FF2B5EF4-FFF2-40B4-BE49-F238E27FC236}">
-                <a16:creationId xmlns:a16="http://schemas.microsoft.com/office/drawing/2014/main" id="{F02E5EF3-976B-4EE3-87F1-0854C8337281}"/>
-              </a:ext>
-            </a:extLst>
-          </p:cNvPr>
-          <p:cNvSpPr>
-            <a:spLocks noGrp="1"/>
-          </p:cNvSpPr>
-          <p:nvPr/>
-        </p:nvSpPr>
-        <p:spPr>
-          <a:xfrm>
-            <a:off x="13393926" y="7627265"/>
-            <a:ext cx="168706" cy="168706"/>
-          </a:xfrm>
-          <a:custGeom>
-            <a:avLst/>
-            <a:gdLst/>
-            <a:ahLst/>
-            <a:cxnLst/>
-            <a:rect l="0" t="0" r="0" b="0"/>
-            <a:pathLst>
-              <a:path w="180975" h="180975">
-                <a:moveTo>
-                  <a:pt x="0" y="0"/>
-                </a:moveTo>
-                <a:lnTo>
-                  <a:pt x="180975" y="0"/>
-                </a:lnTo>
-                <a:lnTo>
-                  <a:pt x="180975" y="180975"/>
-                </a:lnTo>
-                <a:lnTo>
-                  <a:pt x="0" y="180975"/>
-                </a:lnTo>
-                <a:close/>
-              </a:path>
-            </a:pathLst>
-          </a:custGeom>
-          <a:solidFill>
-            <a:srgbClr val="B1C8D6"/>
-          </a:solidFill>
-          <a:ln w="5239">
-            <a:solidFill>
-              <a:srgbClr val="FFFFFF"/>
-            </a:solidFill>
-            <a:prstDash val="solid"/>
-          </a:ln>
-        </p:spPr>
-      </p:sp>
-      <p:sp>
-        <p:nvSpPr>
-          <p:cNvPr id="278" name="path-275">
-            <a:extLst>
-              <a:ext uri="{FF2B5EF4-FFF2-40B4-BE49-F238E27FC236}">
-                <a16:creationId xmlns:a16="http://schemas.microsoft.com/office/drawing/2014/main" id="{DFA9DB1D-3A55-426F-AF80-ADA0C2FDA573}"/>
-              </a:ext>
-            </a:extLst>
-          </p:cNvPr>
-          <p:cNvSpPr>
-            <a:spLocks noGrp="1"/>
-          </p:cNvSpPr>
-          <p:nvPr/>
-        </p:nvSpPr>
-        <p:spPr>
-          <a:xfrm>
-            <a:off x="13607028" y="7627265"/>
-            <a:ext cx="168706" cy="168706"/>
-          </a:xfrm>
-          <a:custGeom>
-            <a:avLst/>
-            <a:gdLst/>
-            <a:ahLst/>
-            <a:cxnLst/>
-            <a:rect l="0" t="0" r="0" b="0"/>
-            <a:pathLst>
-              <a:path w="180975" h="180975">
-                <a:moveTo>
-                  <a:pt x="0" y="0"/>
-                </a:moveTo>
-                <a:lnTo>
-                  <a:pt x="180975" y="0"/>
-                </a:lnTo>
-                <a:lnTo>
-                  <a:pt x="180975" y="180975"/>
-                </a:lnTo>
-                <a:lnTo>
-                  <a:pt x="0" y="180975"/>
-                </a:lnTo>
-                <a:close/>
-              </a:path>
-            </a:pathLst>
-          </a:custGeom>
-          <a:solidFill>
-            <a:srgbClr val="5C89A6"/>
-          </a:solidFill>
-          <a:ln w="5239">
-            <a:solidFill>
-              <a:srgbClr val="FFFFFF"/>
-            </a:solidFill>
-            <a:prstDash val="solid"/>
-          </a:ln>
-        </p:spPr>
-      </p:sp>
-      <p:sp>
-        <p:nvSpPr>
-          <p:cNvPr id="279" name="path-276">
-            <a:extLst>
-              <a:ext uri="{FF2B5EF4-FFF2-40B4-BE49-F238E27FC236}">
-                <a16:creationId xmlns:a16="http://schemas.microsoft.com/office/drawing/2014/main" id="{7C5DEC7F-4551-4360-8165-DC68DA815532}"/>
-              </a:ext>
-            </a:extLst>
-          </p:cNvPr>
-          <p:cNvSpPr>
-            <a:spLocks noGrp="1"/>
-          </p:cNvSpPr>
-          <p:nvPr/>
-        </p:nvSpPr>
-        <p:spPr>
-          <a:xfrm>
-            <a:off x="13820129" y="7627265"/>
-            <a:ext cx="168706" cy="168706"/>
-          </a:xfrm>
-          <a:custGeom>
-            <a:avLst/>
-            <a:gdLst/>
-            <a:ahLst/>
-            <a:cxnLst/>
-            <a:rect l="0" t="0" r="0" b="0"/>
-            <a:pathLst>
-              <a:path w="180975" h="180975">
-                <a:moveTo>
-                  <a:pt x="0" y="0"/>
-                </a:moveTo>
-                <a:lnTo>
-                  <a:pt x="180975" y="0"/>
-                </a:lnTo>
-                <a:lnTo>
-                  <a:pt x="180975" y="180975"/>
-                </a:lnTo>
-                <a:lnTo>
-                  <a:pt x="0" y="180975"/>
-                </a:lnTo>
-                <a:close/>
-              </a:path>
-            </a:pathLst>
-          </a:custGeom>
-          <a:solidFill>
-            <a:srgbClr val="366D91"/>
-          </a:solidFill>
-          <a:ln w="5239">
-            <a:solidFill>
-              <a:srgbClr val="FFFFFF"/>
-            </a:solidFill>
-            <a:prstDash val="solid"/>
-          </a:ln>
-        </p:spPr>
-      </p:sp>
-      <p:sp>
-        <p:nvSpPr>
-          <p:cNvPr id="280" name="path-277">
-            <a:extLst>
-              <a:ext uri="{FF2B5EF4-FFF2-40B4-BE49-F238E27FC236}">
-                <a16:creationId xmlns:a16="http://schemas.microsoft.com/office/drawing/2014/main" id="{95009EA3-76AE-4F28-AABE-8529C85ACB47}"/>
-              </a:ext>
-            </a:extLst>
-          </p:cNvPr>
-          <p:cNvSpPr>
-            <a:spLocks noGrp="1"/>
-          </p:cNvSpPr>
-          <p:nvPr/>
-        </p:nvSpPr>
-        <p:spPr>
-          <a:xfrm>
-            <a:off x="14033231" y="7627265"/>
-            <a:ext cx="168706" cy="168706"/>
-          </a:xfrm>
-          <a:custGeom>
-            <a:avLst/>
-            <a:gdLst/>
-            <a:ahLst/>
-            <a:cxnLst/>
-            <a:rect l="0" t="0" r="0" b="0"/>
-            <a:pathLst>
-              <a:path w="180975" h="180975">
-                <a:moveTo>
-                  <a:pt x="0" y="0"/>
-                </a:moveTo>
-                <a:lnTo>
-                  <a:pt x="180975" y="0"/>
-                </a:lnTo>
-                <a:lnTo>
-                  <a:pt x="180975" y="180975"/>
-                </a:lnTo>
-                <a:lnTo>
-                  <a:pt x="0" y="180975"/>
-                </a:lnTo>
-                <a:close/>
-              </a:path>
-            </a:pathLst>
-          </a:custGeom>
-          <a:solidFill>
-            <a:srgbClr val="7BA0B8"/>
-          </a:solidFill>
-          <a:ln w="5239">
-            <a:solidFill>
-              <a:srgbClr val="FFFFFF"/>
-            </a:solidFill>
-            <a:prstDash val="solid"/>
-          </a:ln>
-        </p:spPr>
-      </p:sp>
-      <p:sp>
-        <p:nvSpPr>
-          <p:cNvPr id="281" name="path-278">
-            <a:extLst>
-              <a:ext uri="{FF2B5EF4-FFF2-40B4-BE49-F238E27FC236}">
-                <a16:creationId xmlns:a16="http://schemas.microsoft.com/office/drawing/2014/main" id="{03D0A6A1-5285-45EF-BC7A-05406E33CA09}"/>
-              </a:ext>
-            </a:extLst>
-          </p:cNvPr>
-          <p:cNvSpPr>
-            <a:spLocks noGrp="1"/>
-          </p:cNvSpPr>
-          <p:nvPr/>
-        </p:nvSpPr>
-        <p:spPr>
-          <a:xfrm>
-            <a:off x="14246333" y="7627265"/>
-            <a:ext cx="168706" cy="168706"/>
-          </a:xfrm>
-          <a:custGeom>
-            <a:avLst/>
-            <a:gdLst/>
-            <a:ahLst/>
-            <a:cxnLst/>
-            <a:rect l="0" t="0" r="0" b="0"/>
-            <a:pathLst>
-              <a:path w="180975" h="180975">
-                <a:moveTo>
-                  <a:pt x="0" y="0"/>
-                </a:moveTo>
-                <a:lnTo>
-                  <a:pt x="180975" y="0"/>
-                </a:lnTo>
-                <a:lnTo>
-                  <a:pt x="180975" y="180975"/>
-                </a:lnTo>
-                <a:lnTo>
-                  <a:pt x="0" y="180975"/>
-                </a:lnTo>
-                <a:close/>
-              </a:path>
-            </a:pathLst>
-          </a:custGeom>
-          <a:solidFill>
-            <a:srgbClr val="C3D5E0"/>
-          </a:solidFill>
-          <a:ln w="5239">
-            <a:solidFill>
-              <a:srgbClr val="FFFFFF"/>
-            </a:solidFill>
-            <a:prstDash val="solid"/>
-          </a:ln>
-        </p:spPr>
-      </p:sp>
-      <p:sp>
-        <p:nvSpPr>
-          <p:cNvPr id="282" name="path-279">
-            <a:extLst>
-              <a:ext uri="{FF2B5EF4-FFF2-40B4-BE49-F238E27FC236}">
-                <a16:creationId xmlns:a16="http://schemas.microsoft.com/office/drawing/2014/main" id="{EF5B97F9-F360-4DCB-AED3-759B9BABA919}"/>
-              </a:ext>
-            </a:extLst>
-          </p:cNvPr>
-          <p:cNvSpPr>
-            <a:spLocks noGrp="1"/>
-          </p:cNvSpPr>
-          <p:nvPr/>
-        </p:nvSpPr>
-        <p:spPr>
-          <a:xfrm>
-            <a:off x="14459435" y="7627265"/>
-            <a:ext cx="168706" cy="168706"/>
-          </a:xfrm>
-          <a:custGeom>
-            <a:avLst/>
-            <a:gdLst/>
-            <a:ahLst/>
-            <a:cxnLst/>
-            <a:rect l="0" t="0" r="0" b="0"/>
-            <a:pathLst>
-              <a:path w="180975" h="180975">
-                <a:moveTo>
-                  <a:pt x="0" y="0"/>
-                </a:moveTo>
-                <a:lnTo>
-                  <a:pt x="180975" y="0"/>
-                </a:lnTo>
-                <a:lnTo>
-                  <a:pt x="180975" y="180975"/>
-                </a:lnTo>
-                <a:lnTo>
-                  <a:pt x="0" y="180975"/>
-                </a:lnTo>
-                <a:close/>
-              </a:path>
-            </a:pathLst>
-          </a:custGeom>
-          <a:solidFill>
-            <a:srgbClr val="D1E0E8"/>
-          </a:solidFill>
-          <a:ln w="5239">
-            <a:solidFill>
-              <a:srgbClr val="FFFFFF"/>
-            </a:solidFill>
-            <a:prstDash val="solid"/>
-          </a:ln>
-        </p:spPr>
-      </p:sp>
-      <p:sp>
-        <p:nvSpPr>
-          <p:cNvPr id="283" name="path-280">
-            <a:extLst>
-              <a:ext uri="{FF2B5EF4-FFF2-40B4-BE49-F238E27FC236}">
-                <a16:creationId xmlns:a16="http://schemas.microsoft.com/office/drawing/2014/main" id="{A7E66C71-ADEA-4272-8294-1E10617FE99A}"/>
-              </a:ext>
-            </a:extLst>
-          </p:cNvPr>
-          <p:cNvSpPr>
-            <a:spLocks noGrp="1"/>
-          </p:cNvSpPr>
-          <p:nvPr/>
-        </p:nvSpPr>
-        <p:spPr>
-          <a:xfrm>
-            <a:off x="14672536" y="7627265"/>
-            <a:ext cx="168706" cy="168706"/>
-          </a:xfrm>
-          <a:custGeom>
-            <a:avLst/>
-            <a:gdLst/>
-            <a:ahLst/>
-            <a:cxnLst/>
-            <a:rect l="0" t="0" r="0" b="0"/>
-            <a:pathLst>
-              <a:path w="180975" h="180975">
-                <a:moveTo>
-                  <a:pt x="0" y="0"/>
-                </a:moveTo>
-                <a:lnTo>
-                  <a:pt x="180975" y="0"/>
-                </a:lnTo>
-                <a:lnTo>
-                  <a:pt x="180975" y="180975"/>
-                </a:lnTo>
-                <a:lnTo>
-                  <a:pt x="0" y="180975"/>
-                </a:lnTo>
-                <a:close/>
-              </a:path>
-            </a:pathLst>
-          </a:custGeom>
-          <a:solidFill>
-            <a:srgbClr val="D0DEE7"/>
-          </a:solidFill>
-          <a:ln w="5239">
-            <a:solidFill>
-              <a:srgbClr val="FFFFFF"/>
-            </a:solidFill>
-            <a:prstDash val="solid"/>
-          </a:ln>
-        </p:spPr>
-      </p:sp>
-      <p:sp>
-        <p:nvSpPr>
-          <p:cNvPr id="284" name="path-281">
-            <a:extLst>
-              <a:ext uri="{FF2B5EF4-FFF2-40B4-BE49-F238E27FC236}">
-                <a16:creationId xmlns:a16="http://schemas.microsoft.com/office/drawing/2014/main" id="{B756F57F-EDFA-4DA6-9991-FDEE14562617}"/>
-              </a:ext>
-            </a:extLst>
-          </p:cNvPr>
-          <p:cNvSpPr>
-            <a:spLocks noGrp="1"/>
-          </p:cNvSpPr>
-          <p:nvPr/>
-        </p:nvSpPr>
-        <p:spPr>
-          <a:xfrm>
-            <a:off x="14885638" y="7627265"/>
-            <a:ext cx="168706" cy="168706"/>
-          </a:xfrm>
-          <a:custGeom>
-            <a:avLst/>
-            <a:gdLst/>
-            <a:ahLst/>
-            <a:cxnLst/>
-            <a:rect l="0" t="0" r="0" b="0"/>
-            <a:pathLst>
-              <a:path w="180975" h="180975">
-                <a:moveTo>
-                  <a:pt x="0" y="0"/>
-                </a:moveTo>
-                <a:lnTo>
-                  <a:pt x="180975" y="0"/>
-                </a:lnTo>
-                <a:lnTo>
-                  <a:pt x="180975" y="180975"/>
-                </a:lnTo>
-                <a:lnTo>
-                  <a:pt x="0" y="180975"/>
-                </a:lnTo>
-                <a:close/>
-              </a:path>
-            </a:pathLst>
-          </a:custGeom>
-          <a:solidFill>
-            <a:srgbClr val="AAC3D3"/>
-          </a:solidFill>
-          <a:ln w="5239">
-            <a:solidFill>
-              <a:srgbClr val="FFFFFF"/>
-            </a:solidFill>
-            <a:prstDash val="solid"/>
-          </a:ln>
-        </p:spPr>
-      </p:sp>
-      <p:sp>
-        <p:nvSpPr>
-          <p:cNvPr id="285" name="path-282">
-            <a:extLst>
-              <a:ext uri="{FF2B5EF4-FFF2-40B4-BE49-F238E27FC236}">
-                <a16:creationId xmlns:a16="http://schemas.microsoft.com/office/drawing/2014/main" id="{6FCB5EE0-F4AD-4378-837E-1426F0F25812}"/>
-              </a:ext>
-            </a:extLst>
-          </p:cNvPr>
-          <p:cNvSpPr>
-            <a:spLocks noGrp="1"/>
-          </p:cNvSpPr>
-          <p:nvPr/>
-        </p:nvSpPr>
-        <p:spPr>
-          <a:xfrm>
-            <a:off x="15098740" y="7627265"/>
-            <a:ext cx="168706" cy="168706"/>
-          </a:xfrm>
-          <a:custGeom>
-            <a:avLst/>
-            <a:gdLst/>
-            <a:ahLst/>
-            <a:cxnLst/>
-            <a:rect l="0" t="0" r="0" b="0"/>
-            <a:pathLst>
-              <a:path w="180975" h="180975">
-                <a:moveTo>
-                  <a:pt x="0" y="0"/>
-                </a:moveTo>
-                <a:lnTo>
-                  <a:pt x="180975" y="0"/>
-                </a:lnTo>
-                <a:lnTo>
-                  <a:pt x="180975" y="180975"/>
-                </a:lnTo>
-                <a:lnTo>
-                  <a:pt x="0" y="180975"/>
-                </a:lnTo>
-                <a:close/>
-              </a:path>
-            </a:pathLst>
-          </a:custGeom>
-          <a:solidFill>
-            <a:srgbClr val="5483A2"/>
-          </a:solidFill>
-          <a:ln w="5239">
-            <a:solidFill>
-              <a:srgbClr val="FFFFFF"/>
-            </a:solidFill>
-            <a:prstDash val="solid"/>
-          </a:ln>
-        </p:spPr>
-      </p:sp>
-      <p:sp>
-        <p:nvSpPr>
-          <p:cNvPr id="286" name="path-283">
-            <a:extLst>
-              <a:ext uri="{FF2B5EF4-FFF2-40B4-BE49-F238E27FC236}">
-                <a16:creationId xmlns:a16="http://schemas.microsoft.com/office/drawing/2014/main" id="{B952173E-00C9-4B0E-98E5-006F63AC2D2A}"/>
-              </a:ext>
-            </a:extLst>
-          </p:cNvPr>
-          <p:cNvSpPr>
-            <a:spLocks noGrp="1"/>
-          </p:cNvSpPr>
-          <p:nvPr/>
-        </p:nvSpPr>
-        <p:spPr>
-          <a:xfrm>
-            <a:off x="15311841" y="7627265"/>
-            <a:ext cx="168706" cy="168706"/>
-          </a:xfrm>
-          <a:custGeom>
-            <a:avLst/>
-            <a:gdLst/>
-            <a:ahLst/>
-            <a:cxnLst/>
-            <a:rect l="0" t="0" r="0" b="0"/>
-            <a:pathLst>
-              <a:path w="180975" h="180975">
-                <a:moveTo>
-                  <a:pt x="0" y="0"/>
-                </a:moveTo>
-                <a:lnTo>
-                  <a:pt x="180975" y="0"/>
-                </a:lnTo>
-                <a:lnTo>
-                  <a:pt x="180975" y="180975"/>
-                </a:lnTo>
-                <a:lnTo>
-                  <a:pt x="0" y="180975"/>
-                </a:lnTo>
-                <a:close/>
-              </a:path>
-            </a:pathLst>
-          </a:custGeom>
-          <a:solidFill>
-            <a:srgbClr val="396F93"/>
-          </a:solidFill>
-          <a:ln w="5239">
-            <a:solidFill>
-              <a:srgbClr val="FFFFFF"/>
-            </a:solidFill>
-            <a:prstDash val="solid"/>
-          </a:ln>
-        </p:spPr>
-      </p:sp>
-      <p:sp>
-        <p:nvSpPr>
-          <p:cNvPr id="287" name="path-284">
-            <a:extLst>
-              <a:ext uri="{FF2B5EF4-FFF2-40B4-BE49-F238E27FC236}">
-                <a16:creationId xmlns:a16="http://schemas.microsoft.com/office/drawing/2014/main" id="{040669C0-580E-495C-A637-C69098E4AEA8}"/>
-              </a:ext>
-            </a:extLst>
-          </p:cNvPr>
-          <p:cNvSpPr>
-            <a:spLocks noGrp="1"/>
-          </p:cNvSpPr>
-          <p:nvPr/>
-        </p:nvSpPr>
-        <p:spPr>
-          <a:xfrm>
-            <a:off x="15524943" y="7627265"/>
-            <a:ext cx="168706" cy="168706"/>
-          </a:xfrm>
-          <a:custGeom>
-            <a:avLst/>
-            <a:gdLst/>
-            <a:ahLst/>
-            <a:cxnLst/>
-            <a:rect l="0" t="0" r="0" b="0"/>
-            <a:pathLst>
-              <a:path w="180975" h="180975">
-                <a:moveTo>
-                  <a:pt x="0" y="0"/>
-                </a:moveTo>
-                <a:lnTo>
-                  <a:pt x="180975" y="0"/>
-                </a:lnTo>
-                <a:lnTo>
-                  <a:pt x="180975" y="180975"/>
-                </a:lnTo>
-                <a:lnTo>
-                  <a:pt x="0" y="180975"/>
-                </a:lnTo>
-                <a:close/>
-              </a:path>
-            </a:pathLst>
-          </a:custGeom>
-          <a:solidFill>
-            <a:srgbClr val="84A7BD"/>
-          </a:solidFill>
-          <a:ln w="5239">
-            <a:solidFill>
-              <a:srgbClr val="FFFFFF"/>
-            </a:solidFill>
-            <a:prstDash val="solid"/>
-          </a:ln>
-        </p:spPr>
-      </p:sp>
-      <p:sp>
-        <p:nvSpPr>
-          <p:cNvPr id="288" name="path-285">
-            <a:extLst>
-              <a:ext uri="{FF2B5EF4-FFF2-40B4-BE49-F238E27FC236}">
-                <a16:creationId xmlns:a16="http://schemas.microsoft.com/office/drawing/2014/main" id="{11371DA0-52EA-40FB-ADE2-300427B586AA}"/>
-              </a:ext>
-            </a:extLst>
-          </p:cNvPr>
-          <p:cNvSpPr>
-            <a:spLocks noGrp="1"/>
-          </p:cNvSpPr>
-          <p:nvPr/>
-        </p:nvSpPr>
-        <p:spPr>
-          <a:xfrm>
-            <a:off x="15738045" y="7627265"/>
-            <a:ext cx="168706" cy="168706"/>
-          </a:xfrm>
-          <a:custGeom>
-            <a:avLst/>
-            <a:gdLst/>
-            <a:ahLst/>
-            <a:cxnLst/>
-            <a:rect l="0" t="0" r="0" b="0"/>
-            <a:pathLst>
-              <a:path w="180975" h="180975">
-                <a:moveTo>
-                  <a:pt x="0" y="0"/>
-                </a:moveTo>
-                <a:lnTo>
-                  <a:pt x="180975" y="0"/>
-                </a:lnTo>
-                <a:lnTo>
-                  <a:pt x="180975" y="180975"/>
-                </a:lnTo>
-                <a:lnTo>
-                  <a:pt x="0" y="180975"/>
-                </a:lnTo>
-                <a:close/>
-              </a:path>
-            </a:pathLst>
-          </a:custGeom>
-          <a:solidFill>
-            <a:srgbClr val="C6D8E2"/>
-          </a:solidFill>
-          <a:ln w="5239">
-            <a:solidFill>
-              <a:srgbClr val="FFFFFF"/>
-            </a:solidFill>
-            <a:prstDash val="solid"/>
-          </a:ln>
-        </p:spPr>
-      </p:sp>
-      <p:sp>
-        <p:nvSpPr>
-          <p:cNvPr id="289" name="path-286">
-            <a:extLst>
-              <a:ext uri="{FF2B5EF4-FFF2-40B4-BE49-F238E27FC236}">
-                <a16:creationId xmlns:a16="http://schemas.microsoft.com/office/drawing/2014/main" id="{10F75A8B-8B88-4E28-A1C3-D26D654E940D}"/>
-              </a:ext>
-            </a:extLst>
-          </p:cNvPr>
-          <p:cNvSpPr>
-            <a:spLocks noGrp="1"/>
-          </p:cNvSpPr>
-          <p:nvPr/>
-        </p:nvSpPr>
-        <p:spPr>
-          <a:xfrm>
-            <a:off x="13393926" y="7840367"/>
-            <a:ext cx="168706" cy="168706"/>
-          </a:xfrm>
-          <a:custGeom>
-            <a:avLst/>
-            <a:gdLst/>
-            <a:ahLst/>
-            <a:cxnLst/>
-            <a:rect l="0" t="0" r="0" b="0"/>
-            <a:pathLst>
-              <a:path w="180975" h="180975">
-                <a:moveTo>
-                  <a:pt x="0" y="0"/>
-                </a:moveTo>
-                <a:lnTo>
-                  <a:pt x="180975" y="0"/>
-                </a:lnTo>
-                <a:lnTo>
-                  <a:pt x="180975" y="180975"/>
-                </a:lnTo>
-                <a:lnTo>
-                  <a:pt x="0" y="180975"/>
-                </a:lnTo>
-                <a:close/>
-              </a:path>
-            </a:pathLst>
-          </a:custGeom>
-          <a:solidFill>
-            <a:srgbClr val="7DA2B9"/>
-          </a:solidFill>
-          <a:ln w="5239">
-            <a:solidFill>
-              <a:srgbClr val="FFFFFF"/>
-            </a:solidFill>
-            <a:prstDash val="solid"/>
-          </a:ln>
-        </p:spPr>
-      </p:sp>
-      <p:sp>
-        <p:nvSpPr>
-          <p:cNvPr id="290" name="path-287">
-            <a:extLst>
-              <a:ext uri="{FF2B5EF4-FFF2-40B4-BE49-F238E27FC236}">
-                <a16:creationId xmlns:a16="http://schemas.microsoft.com/office/drawing/2014/main" id="{3C06A932-A6A6-4BC0-9D53-8FCDBB9EEFCB}"/>
-              </a:ext>
-            </a:extLst>
-          </p:cNvPr>
-          <p:cNvSpPr>
-            <a:spLocks noGrp="1"/>
-          </p:cNvSpPr>
-          <p:nvPr/>
-        </p:nvSpPr>
-        <p:spPr>
-          <a:xfrm>
-            <a:off x="13607028" y="7840367"/>
-            <a:ext cx="168706" cy="168706"/>
-          </a:xfrm>
-          <a:custGeom>
-            <a:avLst/>
-            <a:gdLst/>
-            <a:ahLst/>
-            <a:cxnLst/>
-            <a:rect l="0" t="0" r="0" b="0"/>
-            <a:pathLst>
-              <a:path w="180975" h="180975">
-                <a:moveTo>
-                  <a:pt x="0" y="0"/>
-                </a:moveTo>
-                <a:lnTo>
-                  <a:pt x="180975" y="0"/>
-                </a:lnTo>
-                <a:lnTo>
-                  <a:pt x="180975" y="180975"/>
-                </a:lnTo>
-                <a:lnTo>
-                  <a:pt x="0" y="180975"/>
-                </a:lnTo>
-                <a:close/>
-              </a:path>
-            </a:pathLst>
-          </a:custGeom>
-          <a:solidFill>
-            <a:srgbClr val="376E91"/>
-          </a:solidFill>
-          <a:ln w="5239">
-            <a:solidFill>
-              <a:srgbClr val="FFFFFF"/>
-            </a:solidFill>
-            <a:prstDash val="solid"/>
-          </a:ln>
-        </p:spPr>
-      </p:sp>
-      <p:sp>
-        <p:nvSpPr>
-          <p:cNvPr id="291" name="path-288">
-            <a:extLst>
-              <a:ext uri="{FF2B5EF4-FFF2-40B4-BE49-F238E27FC236}">
-                <a16:creationId xmlns:a16="http://schemas.microsoft.com/office/drawing/2014/main" id="{E8B691FB-FEB4-4242-BFD9-879A204509EE}"/>
-              </a:ext>
-            </a:extLst>
-          </p:cNvPr>
-          <p:cNvSpPr>
-            <a:spLocks noGrp="1"/>
-          </p:cNvSpPr>
-          <p:nvPr/>
-        </p:nvSpPr>
-        <p:spPr>
-          <a:xfrm>
-            <a:off x="13820129" y="7840367"/>
-            <a:ext cx="168706" cy="168706"/>
-          </a:xfrm>
-          <a:custGeom>
-            <a:avLst/>
-            <a:gdLst/>
-            <a:ahLst/>
-            <a:cxnLst/>
-            <a:rect l="0" t="0" r="0" b="0"/>
-            <a:pathLst>
-              <a:path w="180975" h="180975">
-                <a:moveTo>
-                  <a:pt x="0" y="0"/>
-                </a:moveTo>
-                <a:lnTo>
-                  <a:pt x="180975" y="0"/>
-                </a:lnTo>
-                <a:lnTo>
-                  <a:pt x="180975" y="180975"/>
-                </a:lnTo>
-                <a:lnTo>
-                  <a:pt x="0" y="180975"/>
-                </a:lnTo>
-                <a:close/>
-              </a:path>
-            </a:pathLst>
-          </a:custGeom>
-          <a:solidFill>
-            <a:srgbClr val="5987A5"/>
-          </a:solidFill>
-          <a:ln w="5239">
-            <a:solidFill>
-              <a:srgbClr val="FFFFFF"/>
-            </a:solidFill>
-            <a:prstDash val="solid"/>
-          </a:ln>
-        </p:spPr>
-      </p:sp>
-      <p:sp>
-        <p:nvSpPr>
-          <p:cNvPr id="292" name="path-289">
-            <a:extLst>
-              <a:ext uri="{FF2B5EF4-FFF2-40B4-BE49-F238E27FC236}">
-                <a16:creationId xmlns:a16="http://schemas.microsoft.com/office/drawing/2014/main" id="{BE4B980F-7F97-4DD2-B426-607201EAA0B6}"/>
-              </a:ext>
-            </a:extLst>
-          </p:cNvPr>
-          <p:cNvSpPr>
-            <a:spLocks noGrp="1"/>
-          </p:cNvSpPr>
-          <p:nvPr/>
-        </p:nvSpPr>
-        <p:spPr>
-          <a:xfrm>
-            <a:off x="14033231" y="7840367"/>
-            <a:ext cx="168706" cy="168706"/>
-          </a:xfrm>
-          <a:custGeom>
-            <a:avLst/>
-            <a:gdLst/>
-            <a:ahLst/>
-            <a:cxnLst/>
-            <a:rect l="0" t="0" r="0" b="0"/>
-            <a:pathLst>
-              <a:path w="180975" h="180975">
-                <a:moveTo>
-                  <a:pt x="0" y="0"/>
-                </a:moveTo>
-                <a:lnTo>
-                  <a:pt x="180975" y="0"/>
-                </a:lnTo>
-                <a:lnTo>
-                  <a:pt x="180975" y="180975"/>
-                </a:lnTo>
-                <a:lnTo>
-                  <a:pt x="0" y="180975"/>
-                </a:lnTo>
-                <a:close/>
-              </a:path>
-            </a:pathLst>
-          </a:custGeom>
-          <a:solidFill>
-            <a:srgbClr val="AFC6D5"/>
-          </a:solidFill>
-          <a:ln w="5239">
-            <a:solidFill>
-              <a:srgbClr val="FFFFFF"/>
-            </a:solidFill>
-            <a:prstDash val="solid"/>
-          </a:ln>
-        </p:spPr>
-      </p:sp>
-      <p:sp>
-        <p:nvSpPr>
-          <p:cNvPr id="293" name="path-290">
-            <a:extLst>
-              <a:ext uri="{FF2B5EF4-FFF2-40B4-BE49-F238E27FC236}">
-                <a16:creationId xmlns:a16="http://schemas.microsoft.com/office/drawing/2014/main" id="{CD6005E3-8A05-49D0-94DF-F071400DC96E}"/>
-              </a:ext>
-            </a:extLst>
-          </p:cNvPr>
-          <p:cNvSpPr>
-            <a:spLocks noGrp="1"/>
-          </p:cNvSpPr>
-          <p:nvPr/>
-        </p:nvSpPr>
-        <p:spPr>
-          <a:xfrm>
-            <a:off x="14246333" y="7840367"/>
-            <a:ext cx="168706" cy="168706"/>
-          </a:xfrm>
-          <a:custGeom>
-            <a:avLst/>
-            <a:gdLst/>
-            <a:ahLst/>
-            <a:cxnLst/>
-            <a:rect l="0" t="0" r="0" b="0"/>
-            <a:pathLst>
-              <a:path w="180975" h="180975">
-                <a:moveTo>
-                  <a:pt x="0" y="0"/>
-                </a:moveTo>
-                <a:lnTo>
-                  <a:pt x="180975" y="0"/>
-                </a:lnTo>
-                <a:lnTo>
-                  <a:pt x="180975" y="180975"/>
-                </a:lnTo>
-                <a:lnTo>
-                  <a:pt x="0" y="180975"/>
-                </a:lnTo>
-                <a:close/>
-              </a:path>
-            </a:pathLst>
-          </a:custGeom>
-          <a:solidFill>
-            <a:srgbClr val="D0DFE8"/>
-          </a:solidFill>
-          <a:ln w="5239">
-            <a:solidFill>
-              <a:srgbClr val="FFFFFF"/>
-            </a:solidFill>
-            <a:prstDash val="solid"/>
-          </a:ln>
-        </p:spPr>
-      </p:sp>
-      <p:sp>
-        <p:nvSpPr>
-          <p:cNvPr id="294" name="path-291">
-            <a:extLst>
-              <a:ext uri="{FF2B5EF4-FFF2-40B4-BE49-F238E27FC236}">
-                <a16:creationId xmlns:a16="http://schemas.microsoft.com/office/drawing/2014/main" id="{CD3FE049-9C5C-48E5-A5FF-F7EB2F616F53}"/>
-              </a:ext>
-            </a:extLst>
-          </p:cNvPr>
-          <p:cNvSpPr>
-            <a:spLocks noGrp="1"/>
-          </p:cNvSpPr>
-          <p:nvPr/>
-        </p:nvSpPr>
-        <p:spPr>
-          <a:xfrm>
-            <a:off x="14459435" y="7840367"/>
-            <a:ext cx="168706" cy="168706"/>
-          </a:xfrm>
-          <a:custGeom>
-            <a:avLst/>
-            <a:gdLst/>
-            <a:ahLst/>
-            <a:cxnLst/>
-            <a:rect l="0" t="0" r="0" b="0"/>
-            <a:pathLst>
-              <a:path w="180975" h="180975">
-                <a:moveTo>
-                  <a:pt x="0" y="0"/>
-                </a:moveTo>
-                <a:lnTo>
-                  <a:pt x="180975" y="0"/>
-                </a:lnTo>
-                <a:lnTo>
-                  <a:pt x="180975" y="180975"/>
-                </a:lnTo>
-                <a:lnTo>
-                  <a:pt x="0" y="180975"/>
-                </a:lnTo>
-                <a:close/>
-              </a:path>
-            </a:pathLst>
-          </a:custGeom>
-          <a:solidFill>
-            <a:srgbClr val="D1E0E8"/>
-          </a:solidFill>
-          <a:ln w="5239">
-            <a:solidFill>
-              <a:srgbClr val="FFFFFF"/>
-            </a:solidFill>
-            <a:prstDash val="solid"/>
-          </a:ln>
-        </p:spPr>
-      </p:sp>
-      <p:sp>
-        <p:nvSpPr>
           <p:cNvPr id="295" name="path-292">
             <a:extLst>
               <a:ext uri="{FF2B5EF4-FFF2-40B4-BE49-F238E27FC236}">
@@ -21066,130 +20589,6 @@
           <a:ln w="5239">
             <a:solidFill>
               <a:srgbClr val="FFFFFF"/>
-            </a:solidFill>
-            <a:prstDash val="solid"/>
-          </a:ln>
-        </p:spPr>
-      </p:sp>
-      <p:sp>
-        <p:nvSpPr>
-          <p:cNvPr id="301" name="visual-298">
-            <a:extLst>
-              <a:ext uri="{FF2B5EF4-FFF2-40B4-BE49-F238E27FC236}">
-                <a16:creationId xmlns:a16="http://schemas.microsoft.com/office/drawing/2014/main" id="{AD5CB1C1-B814-4D35-8DD4-4F2ABBFD4AB7}"/>
-              </a:ext>
-            </a:extLst>
-          </p:cNvPr>
-          <p:cNvSpPr>
-            <a:spLocks noGrp="1"/>
-          </p:cNvSpPr>
-          <p:nvPr/>
-        </p:nvSpPr>
-        <p:spPr>
-          <a:xfrm>
-            <a:off x="14237454" y="7192183"/>
-            <a:ext cx="186464" cy="186464"/>
-          </a:xfrm>
-          <a:prstGeom prst="rect">
-            <a:avLst/>
-          </a:prstGeom>
-          <a:noFill/>
-          <a:ln w="13335">
-            <a:solidFill>
-              <a:srgbClr val="2C7A86"/>
-            </a:solidFill>
-            <a:prstDash val="solid"/>
-          </a:ln>
-        </p:spPr>
-      </p:sp>
-      <p:sp>
-        <p:nvSpPr>
-          <p:cNvPr id="302" name="visual-299">
-            <a:extLst>
-              <a:ext uri="{FF2B5EF4-FFF2-40B4-BE49-F238E27FC236}">
-                <a16:creationId xmlns:a16="http://schemas.microsoft.com/office/drawing/2014/main" id="{1E444CF9-C3DF-4E32-9CE2-4B6A61B957EE}"/>
-              </a:ext>
-            </a:extLst>
-          </p:cNvPr>
-          <p:cNvSpPr>
-            <a:spLocks noGrp="1"/>
-          </p:cNvSpPr>
-          <p:nvPr/>
-        </p:nvSpPr>
-        <p:spPr>
-          <a:xfrm>
-            <a:off x="14450556" y="7192183"/>
-            <a:ext cx="186464" cy="186464"/>
-          </a:xfrm>
-          <a:prstGeom prst="rect">
-            <a:avLst/>
-          </a:prstGeom>
-          <a:noFill/>
-          <a:ln w="27623">
-            <a:solidFill>
-              <a:srgbClr val="2C7A86"/>
-            </a:solidFill>
-            <a:prstDash val="solid"/>
-          </a:ln>
-        </p:spPr>
-      </p:sp>
-      <p:sp>
-        <p:nvSpPr>
-          <p:cNvPr id="303" name="visual-300">
-            <a:extLst>
-              <a:ext uri="{FF2B5EF4-FFF2-40B4-BE49-F238E27FC236}">
-                <a16:creationId xmlns:a16="http://schemas.microsoft.com/office/drawing/2014/main" id="{846780D9-2502-4074-BFBE-77BF698FCEC7}"/>
-              </a:ext>
-            </a:extLst>
-          </p:cNvPr>
-          <p:cNvSpPr>
-            <a:spLocks noGrp="1"/>
-          </p:cNvSpPr>
-          <p:nvPr/>
-        </p:nvSpPr>
-        <p:spPr>
-          <a:xfrm>
-            <a:off x="14663657" y="7192183"/>
-            <a:ext cx="186464" cy="186464"/>
-          </a:xfrm>
-          <a:prstGeom prst="rect">
-            <a:avLst/>
-          </a:prstGeom>
-          <a:noFill/>
-          <a:ln w="13335">
-            <a:solidFill>
-              <a:srgbClr val="2C7A86"/>
-            </a:solidFill>
-            <a:prstDash val="solid"/>
-          </a:ln>
-        </p:spPr>
-      </p:sp>
-      <p:sp>
-        <p:nvSpPr>
-          <p:cNvPr id="304" name="visual-301">
-            <a:extLst>
-              <a:ext uri="{FF2B5EF4-FFF2-40B4-BE49-F238E27FC236}">
-                <a16:creationId xmlns:a16="http://schemas.microsoft.com/office/drawing/2014/main" id="{F3653DB4-90DF-4D6C-834A-D3B47EABADC9}"/>
-              </a:ext>
-            </a:extLst>
-          </p:cNvPr>
-          <p:cNvSpPr>
-            <a:spLocks noGrp="1"/>
-          </p:cNvSpPr>
-          <p:nvPr/>
-        </p:nvSpPr>
-        <p:spPr>
-          <a:xfrm>
-            <a:off x="14876759" y="7192183"/>
-            <a:ext cx="186464" cy="186464"/>
-          </a:xfrm>
-          <a:prstGeom prst="rect">
-            <a:avLst/>
-          </a:prstGeom>
-          <a:noFill/>
-          <a:ln w="13335">
-            <a:solidFill>
-              <a:srgbClr val="2C7A86"/>
             </a:solidFill>
             <a:prstDash val="solid"/>
           </a:ln>
@@ -21658,9 +21057,9 @@
           <p:nvPr/>
         </p:nvSpPr>
         <p:spPr>
-          <a:xfrm>
-            <a:off x="11946610" y="9145615"/>
-            <a:ext cx="1314127" cy="888"/>
+          <a:xfrm flipV="1">
+            <a:off x="11946610" y="9099896"/>
+            <a:ext cx="1749689" cy="45719"/>
           </a:xfrm>
           <a:custGeom>
             <a:avLst/>
@@ -21703,9 +21102,9 @@
           <p:nvPr/>
         </p:nvSpPr>
         <p:spPr>
-          <a:xfrm>
-            <a:off x="13260738" y="7280974"/>
-            <a:ext cx="888" cy="1864640"/>
+          <a:xfrm flipH="1">
+            <a:off x="13531145" y="8170474"/>
+            <a:ext cx="165154" cy="971338"/>
           </a:xfrm>
           <a:custGeom>
             <a:avLst/>
@@ -21735,51 +21134,6 @@
       </p:sp>
       <p:sp>
         <p:nvSpPr>
-          <p:cNvPr id="316" name="path-313">
-            <a:extLst>
-              <a:ext uri="{FF2B5EF4-FFF2-40B4-BE49-F238E27FC236}">
-                <a16:creationId xmlns:a16="http://schemas.microsoft.com/office/drawing/2014/main" id="{80843E64-612F-46A7-8CD1-B511F7989DA5}"/>
-              </a:ext>
-            </a:extLst>
-          </p:cNvPr>
-          <p:cNvSpPr>
-            <a:spLocks noGrp="1"/>
-          </p:cNvSpPr>
-          <p:nvPr/>
-        </p:nvSpPr>
-        <p:spPr>
-          <a:xfrm>
-            <a:off x="13260737" y="7280975"/>
-            <a:ext cx="1086819" cy="888"/>
-          </a:xfrm>
-          <a:custGeom>
-            <a:avLst/>
-            <a:gdLst/>
-            <a:ahLst/>
-            <a:cxnLst/>
-            <a:rect l="0" t="0" r="0" b="0"/>
-            <a:pathLst>
-              <a:path w="1165860" h="953">
-                <a:moveTo>
-                  <a:pt x="0" y="0"/>
-                </a:moveTo>
-                <a:lnTo>
-                  <a:pt x="1165860" y="0"/>
-                </a:lnTo>
-              </a:path>
-            </a:pathLst>
-          </a:custGeom>
-          <a:noFill/>
-          <a:ln w="17145">
-            <a:solidFill>
-              <a:srgbClr val="2C7A86"/>
-            </a:solidFill>
-            <a:prstDash val="solid"/>
-          </a:ln>
-        </p:spPr>
-      </p:sp>
-      <p:sp>
-        <p:nvSpPr>
           <p:cNvPr id="317" name="path-314">
             <a:extLst>
               <a:ext uri="{FF2B5EF4-FFF2-40B4-BE49-F238E27FC236}">
@@ -21793,8 +21147,8 @@
           <p:nvPr/>
         </p:nvSpPr>
         <p:spPr>
-          <a:xfrm>
-            <a:off x="14326246" y="7238354"/>
+          <a:xfrm rot="16200000">
+            <a:off x="13642867" y="8077765"/>
             <a:ext cx="106551" cy="85241"/>
           </a:xfrm>
           <a:custGeom>
@@ -26767,6 +26121,1117 @@
               <a:srgbClr val="2C7A86"/>
             </a:solidFill>
             <a:prstDash val="dash"/>
+          </a:ln>
+        </p:spPr>
+      </p:sp>
+      <p:sp>
+        <p:nvSpPr>
+          <p:cNvPr id="350" name="path-202">
+            <a:extLst>
+              <a:ext uri="{FF2B5EF4-FFF2-40B4-BE49-F238E27FC236}">
+                <a16:creationId xmlns:a16="http://schemas.microsoft.com/office/drawing/2014/main" id="{F2319EA9-B217-4D5A-B578-AEF512842A7F}"/>
+              </a:ext>
+            </a:extLst>
+          </p:cNvPr>
+          <p:cNvSpPr>
+            <a:spLocks noGrp="1"/>
+          </p:cNvSpPr>
+          <p:nvPr/>
+        </p:nvSpPr>
+        <p:spPr>
+          <a:xfrm>
+            <a:off x="13394047" y="6150746"/>
+            <a:ext cx="168706" cy="168706"/>
+          </a:xfrm>
+          <a:custGeom>
+            <a:avLst/>
+            <a:gdLst/>
+            <a:ahLst/>
+            <a:cxnLst/>
+            <a:rect l="0" t="0" r="0" b="0"/>
+            <a:pathLst>
+              <a:path w="180975" h="180975">
+                <a:moveTo>
+                  <a:pt x="0" y="0"/>
+                </a:moveTo>
+                <a:lnTo>
+                  <a:pt x="180975" y="0"/>
+                </a:lnTo>
+                <a:lnTo>
+                  <a:pt x="180975" y="180975"/>
+                </a:lnTo>
+                <a:lnTo>
+                  <a:pt x="0" y="180975"/>
+                </a:lnTo>
+                <a:close/>
+              </a:path>
+            </a:pathLst>
+          </a:custGeom>
+          <a:solidFill>
+            <a:srgbClr val="88AABF"/>
+          </a:solidFill>
+          <a:ln w="5239">
+            <a:solidFill>
+              <a:srgbClr val="FFFFFF"/>
+            </a:solidFill>
+            <a:prstDash val="solid"/>
+          </a:ln>
+        </p:spPr>
+      </p:sp>
+      <p:sp>
+        <p:nvSpPr>
+          <p:cNvPr id="352" name="path-204">
+            <a:extLst>
+              <a:ext uri="{FF2B5EF4-FFF2-40B4-BE49-F238E27FC236}">
+                <a16:creationId xmlns:a16="http://schemas.microsoft.com/office/drawing/2014/main" id="{CE479CE7-114C-4E1E-8310-658CA28F63BE}"/>
+              </a:ext>
+            </a:extLst>
+          </p:cNvPr>
+          <p:cNvSpPr>
+            <a:spLocks noGrp="1"/>
+          </p:cNvSpPr>
+          <p:nvPr/>
+        </p:nvSpPr>
+        <p:spPr>
+          <a:xfrm>
+            <a:off x="13820250" y="6150746"/>
+            <a:ext cx="168706" cy="168706"/>
+          </a:xfrm>
+          <a:custGeom>
+            <a:avLst/>
+            <a:gdLst/>
+            <a:ahLst/>
+            <a:cxnLst/>
+            <a:rect l="0" t="0" r="0" b="0"/>
+            <a:pathLst>
+              <a:path w="180975" h="180975">
+                <a:moveTo>
+                  <a:pt x="0" y="0"/>
+                </a:moveTo>
+                <a:lnTo>
+                  <a:pt x="180975" y="0"/>
+                </a:lnTo>
+                <a:lnTo>
+                  <a:pt x="180975" y="180975"/>
+                </a:lnTo>
+                <a:lnTo>
+                  <a:pt x="0" y="180975"/>
+                </a:lnTo>
+                <a:close/>
+              </a:path>
+            </a:pathLst>
+          </a:custGeom>
+          <a:solidFill>
+            <a:srgbClr val="D1E0E8"/>
+          </a:solidFill>
+          <a:ln w="5239">
+            <a:solidFill>
+              <a:srgbClr val="FFFFFF"/>
+            </a:solidFill>
+            <a:prstDash val="solid"/>
+          </a:ln>
+        </p:spPr>
+      </p:sp>
+      <p:sp>
+        <p:nvSpPr>
+          <p:cNvPr id="353" name="path-205">
+            <a:extLst>
+              <a:ext uri="{FF2B5EF4-FFF2-40B4-BE49-F238E27FC236}">
+                <a16:creationId xmlns:a16="http://schemas.microsoft.com/office/drawing/2014/main" id="{5C49EDC4-7621-44EF-899F-9676AE41477F}"/>
+              </a:ext>
+            </a:extLst>
+          </p:cNvPr>
+          <p:cNvSpPr>
+            <a:spLocks noGrp="1"/>
+          </p:cNvSpPr>
+          <p:nvPr/>
+        </p:nvSpPr>
+        <p:spPr>
+          <a:xfrm>
+            <a:off x="14033352" y="6150746"/>
+            <a:ext cx="168706" cy="168706"/>
+          </a:xfrm>
+          <a:custGeom>
+            <a:avLst/>
+            <a:gdLst/>
+            <a:ahLst/>
+            <a:cxnLst/>
+            <a:rect l="0" t="0" r="0" b="0"/>
+            <a:pathLst>
+              <a:path w="180975" h="180975">
+                <a:moveTo>
+                  <a:pt x="0" y="0"/>
+                </a:moveTo>
+                <a:lnTo>
+                  <a:pt x="180975" y="0"/>
+                </a:lnTo>
+                <a:lnTo>
+                  <a:pt x="180975" y="180975"/>
+                </a:lnTo>
+                <a:lnTo>
+                  <a:pt x="0" y="180975"/>
+                </a:lnTo>
+                <a:close/>
+              </a:path>
+            </a:pathLst>
+          </a:custGeom>
+          <a:solidFill>
+            <a:srgbClr val="CEDDE6"/>
+          </a:solidFill>
+          <a:ln w="5239">
+            <a:solidFill>
+              <a:srgbClr val="FFFFFF"/>
+            </a:solidFill>
+            <a:prstDash val="solid"/>
+          </a:ln>
+        </p:spPr>
+      </p:sp>
+      <p:sp>
+        <p:nvSpPr>
+          <p:cNvPr id="355" name="path-206">
+            <a:extLst>
+              <a:ext uri="{FF2B5EF4-FFF2-40B4-BE49-F238E27FC236}">
+                <a16:creationId xmlns:a16="http://schemas.microsoft.com/office/drawing/2014/main" id="{236D5B33-7352-46E6-87B5-B369B4B899C6}"/>
+              </a:ext>
+            </a:extLst>
+          </p:cNvPr>
+          <p:cNvSpPr>
+            <a:spLocks noGrp="1"/>
+          </p:cNvSpPr>
+          <p:nvPr/>
+        </p:nvSpPr>
+        <p:spPr>
+          <a:xfrm>
+            <a:off x="14246454" y="6150746"/>
+            <a:ext cx="168706" cy="168706"/>
+          </a:xfrm>
+          <a:custGeom>
+            <a:avLst/>
+            <a:gdLst/>
+            <a:ahLst/>
+            <a:cxnLst/>
+            <a:rect l="0" t="0" r="0" b="0"/>
+            <a:pathLst>
+              <a:path w="180975" h="180975">
+                <a:moveTo>
+                  <a:pt x="0" y="0"/>
+                </a:moveTo>
+                <a:lnTo>
+                  <a:pt x="180975" y="0"/>
+                </a:lnTo>
+                <a:lnTo>
+                  <a:pt x="180975" y="180975"/>
+                </a:lnTo>
+                <a:lnTo>
+                  <a:pt x="0" y="180975"/>
+                </a:lnTo>
+                <a:close/>
+              </a:path>
+            </a:pathLst>
+          </a:custGeom>
+          <a:solidFill>
+            <a:srgbClr val="9FBBCC"/>
+          </a:solidFill>
+          <a:ln w="5239">
+            <a:solidFill>
+              <a:srgbClr val="FFFFFF"/>
+            </a:solidFill>
+            <a:prstDash val="solid"/>
+          </a:ln>
+        </p:spPr>
+      </p:sp>
+      <p:sp>
+        <p:nvSpPr>
+          <p:cNvPr id="356" name="path-207">
+            <a:extLst>
+              <a:ext uri="{FF2B5EF4-FFF2-40B4-BE49-F238E27FC236}">
+                <a16:creationId xmlns:a16="http://schemas.microsoft.com/office/drawing/2014/main" id="{0A23F3CE-1D46-409E-AAB5-A4BA36C67E1A}"/>
+              </a:ext>
+            </a:extLst>
+          </p:cNvPr>
+          <p:cNvSpPr>
+            <a:spLocks noGrp="1"/>
+          </p:cNvSpPr>
+          <p:nvPr/>
+        </p:nvSpPr>
+        <p:spPr>
+          <a:xfrm>
+            <a:off x="14459556" y="6150746"/>
+            <a:ext cx="168706" cy="168706"/>
+          </a:xfrm>
+          <a:custGeom>
+            <a:avLst/>
+            <a:gdLst/>
+            <a:ahLst/>
+            <a:cxnLst/>
+            <a:rect l="0" t="0" r="0" b="0"/>
+            <a:pathLst>
+              <a:path w="180975" h="180975">
+                <a:moveTo>
+                  <a:pt x="0" y="0"/>
+                </a:moveTo>
+                <a:lnTo>
+                  <a:pt x="180975" y="0"/>
+                </a:lnTo>
+                <a:lnTo>
+                  <a:pt x="180975" y="180975"/>
+                </a:lnTo>
+                <a:lnTo>
+                  <a:pt x="0" y="180975"/>
+                </a:lnTo>
+                <a:close/>
+              </a:path>
+            </a:pathLst>
+          </a:custGeom>
+          <a:solidFill>
+            <a:srgbClr val="497B9C"/>
+          </a:solidFill>
+          <a:ln w="5239">
+            <a:solidFill>
+              <a:srgbClr val="FFFFFF"/>
+            </a:solidFill>
+            <a:prstDash val="solid"/>
+          </a:ln>
+        </p:spPr>
+      </p:sp>
+      <p:sp>
+        <p:nvSpPr>
+          <p:cNvPr id="362" name="path-208">
+            <a:extLst>
+              <a:ext uri="{FF2B5EF4-FFF2-40B4-BE49-F238E27FC236}">
+                <a16:creationId xmlns:a16="http://schemas.microsoft.com/office/drawing/2014/main" id="{5DA8150B-97A2-4525-A7D0-6AEA7A1FEEED}"/>
+              </a:ext>
+            </a:extLst>
+          </p:cNvPr>
+          <p:cNvSpPr>
+            <a:spLocks noGrp="1"/>
+          </p:cNvSpPr>
+          <p:nvPr/>
+        </p:nvSpPr>
+        <p:spPr>
+          <a:xfrm>
+            <a:off x="14672657" y="6150746"/>
+            <a:ext cx="168706" cy="168706"/>
+          </a:xfrm>
+          <a:custGeom>
+            <a:avLst/>
+            <a:gdLst/>
+            <a:ahLst/>
+            <a:cxnLst/>
+            <a:rect l="0" t="0" r="0" b="0"/>
+            <a:pathLst>
+              <a:path w="180975" h="180975">
+                <a:moveTo>
+                  <a:pt x="0" y="0"/>
+                </a:moveTo>
+                <a:lnTo>
+                  <a:pt x="180975" y="0"/>
+                </a:lnTo>
+                <a:lnTo>
+                  <a:pt x="180975" y="180975"/>
+                </a:lnTo>
+                <a:lnTo>
+                  <a:pt x="0" y="180975"/>
+                </a:lnTo>
+                <a:close/>
+              </a:path>
+            </a:pathLst>
+          </a:custGeom>
+          <a:solidFill>
+            <a:srgbClr val="3F7496"/>
+          </a:solidFill>
+          <a:ln w="5239">
+            <a:solidFill>
+              <a:srgbClr val="FFFFFF"/>
+            </a:solidFill>
+            <a:prstDash val="solid"/>
+          </a:ln>
+        </p:spPr>
+      </p:sp>
+      <p:sp>
+        <p:nvSpPr>
+          <p:cNvPr id="385" name="path-209">
+            <a:extLst>
+              <a:ext uri="{FF2B5EF4-FFF2-40B4-BE49-F238E27FC236}">
+                <a16:creationId xmlns:a16="http://schemas.microsoft.com/office/drawing/2014/main" id="{5A824F83-D8B2-43F2-9716-564C55D7A47B}"/>
+              </a:ext>
+            </a:extLst>
+          </p:cNvPr>
+          <p:cNvSpPr>
+            <a:spLocks noGrp="1"/>
+          </p:cNvSpPr>
+          <p:nvPr/>
+        </p:nvSpPr>
+        <p:spPr>
+          <a:xfrm>
+            <a:off x="14885759" y="6150746"/>
+            <a:ext cx="168706" cy="168706"/>
+          </a:xfrm>
+          <a:custGeom>
+            <a:avLst/>
+            <a:gdLst/>
+            <a:ahLst/>
+            <a:cxnLst/>
+            <a:rect l="0" t="0" r="0" b="0"/>
+            <a:pathLst>
+              <a:path w="180975" h="180975">
+                <a:moveTo>
+                  <a:pt x="0" y="0"/>
+                </a:moveTo>
+                <a:lnTo>
+                  <a:pt x="180975" y="0"/>
+                </a:lnTo>
+                <a:lnTo>
+                  <a:pt x="180975" y="180975"/>
+                </a:lnTo>
+                <a:lnTo>
+                  <a:pt x="0" y="180975"/>
+                </a:lnTo>
+                <a:close/>
+              </a:path>
+            </a:pathLst>
+          </a:custGeom>
+          <a:solidFill>
+            <a:srgbClr val="91B0C4"/>
+          </a:solidFill>
+          <a:ln w="5239">
+            <a:solidFill>
+              <a:srgbClr val="FFFFFF"/>
+            </a:solidFill>
+            <a:prstDash val="solid"/>
+          </a:ln>
+        </p:spPr>
+      </p:sp>
+      <p:sp>
+        <p:nvSpPr>
+          <p:cNvPr id="386" name="path-210">
+            <a:extLst>
+              <a:ext uri="{FF2B5EF4-FFF2-40B4-BE49-F238E27FC236}">
+                <a16:creationId xmlns:a16="http://schemas.microsoft.com/office/drawing/2014/main" id="{255224ED-698C-42EC-AD1A-83D05C65B5E5}"/>
+              </a:ext>
+            </a:extLst>
+          </p:cNvPr>
+          <p:cNvSpPr>
+            <a:spLocks noGrp="1"/>
+          </p:cNvSpPr>
+          <p:nvPr/>
+        </p:nvSpPr>
+        <p:spPr>
+          <a:xfrm>
+            <a:off x="15098861" y="6150746"/>
+            <a:ext cx="168706" cy="168706"/>
+          </a:xfrm>
+          <a:custGeom>
+            <a:avLst/>
+            <a:gdLst/>
+            <a:ahLst/>
+            <a:cxnLst/>
+            <a:rect l="0" t="0" r="0" b="0"/>
+            <a:pathLst>
+              <a:path w="180975" h="180975">
+                <a:moveTo>
+                  <a:pt x="0" y="0"/>
+                </a:moveTo>
+                <a:lnTo>
+                  <a:pt x="180975" y="0"/>
+                </a:lnTo>
+                <a:lnTo>
+                  <a:pt x="180975" y="180975"/>
+                </a:lnTo>
+                <a:lnTo>
+                  <a:pt x="0" y="180975"/>
+                </a:lnTo>
+                <a:close/>
+              </a:path>
+            </a:pathLst>
+          </a:custGeom>
+          <a:solidFill>
+            <a:srgbClr val="CBDBE5"/>
+          </a:solidFill>
+          <a:ln w="5239">
+            <a:solidFill>
+              <a:srgbClr val="FFFFFF"/>
+            </a:solidFill>
+            <a:prstDash val="solid"/>
+          </a:ln>
+        </p:spPr>
+      </p:sp>
+      <p:sp>
+        <p:nvSpPr>
+          <p:cNvPr id="388" name="path-211">
+            <a:extLst>
+              <a:ext uri="{FF2B5EF4-FFF2-40B4-BE49-F238E27FC236}">
+                <a16:creationId xmlns:a16="http://schemas.microsoft.com/office/drawing/2014/main" id="{D6CBED84-84F3-4CFF-B74A-D857827F49A6}"/>
+              </a:ext>
+            </a:extLst>
+          </p:cNvPr>
+          <p:cNvSpPr>
+            <a:spLocks noGrp="1"/>
+          </p:cNvSpPr>
+          <p:nvPr/>
+        </p:nvSpPr>
+        <p:spPr>
+          <a:xfrm>
+            <a:off x="15311962" y="6150746"/>
+            <a:ext cx="168706" cy="168706"/>
+          </a:xfrm>
+          <a:custGeom>
+            <a:avLst/>
+            <a:gdLst/>
+            <a:ahLst/>
+            <a:cxnLst/>
+            <a:rect l="0" t="0" r="0" b="0"/>
+            <a:pathLst>
+              <a:path w="180975" h="180975">
+                <a:moveTo>
+                  <a:pt x="0" y="0"/>
+                </a:moveTo>
+                <a:lnTo>
+                  <a:pt x="180975" y="0"/>
+                </a:lnTo>
+                <a:lnTo>
+                  <a:pt x="180975" y="180975"/>
+                </a:lnTo>
+                <a:lnTo>
+                  <a:pt x="0" y="180975"/>
+                </a:lnTo>
+                <a:close/>
+              </a:path>
+            </a:pathLst>
+          </a:custGeom>
+          <a:solidFill>
+            <a:srgbClr val="D1E0E8"/>
+          </a:solidFill>
+          <a:ln w="5239">
+            <a:solidFill>
+              <a:srgbClr val="FFFFFF"/>
+            </a:solidFill>
+            <a:prstDash val="solid"/>
+          </a:ln>
+        </p:spPr>
+      </p:sp>
+      <p:sp>
+        <p:nvSpPr>
+          <p:cNvPr id="400" name="path-212">
+            <a:extLst>
+              <a:ext uri="{FF2B5EF4-FFF2-40B4-BE49-F238E27FC236}">
+                <a16:creationId xmlns:a16="http://schemas.microsoft.com/office/drawing/2014/main" id="{64D7F756-7E83-4853-85B5-BC3068E70558}"/>
+              </a:ext>
+            </a:extLst>
+          </p:cNvPr>
+          <p:cNvSpPr>
+            <a:spLocks noGrp="1"/>
+          </p:cNvSpPr>
+          <p:nvPr/>
+        </p:nvSpPr>
+        <p:spPr>
+          <a:xfrm>
+            <a:off x="15525064" y="6150746"/>
+            <a:ext cx="168706" cy="168706"/>
+          </a:xfrm>
+          <a:custGeom>
+            <a:avLst/>
+            <a:gdLst/>
+            <a:ahLst/>
+            <a:cxnLst/>
+            <a:rect l="0" t="0" r="0" b="0"/>
+            <a:pathLst>
+              <a:path w="180975" h="180975">
+                <a:moveTo>
+                  <a:pt x="0" y="0"/>
+                </a:moveTo>
+                <a:lnTo>
+                  <a:pt x="180975" y="0"/>
+                </a:lnTo>
+                <a:lnTo>
+                  <a:pt x="180975" y="180975"/>
+                </a:lnTo>
+                <a:lnTo>
+                  <a:pt x="0" y="180975"/>
+                </a:lnTo>
+                <a:close/>
+              </a:path>
+            </a:pathLst>
+          </a:custGeom>
+          <a:solidFill>
+            <a:srgbClr val="CCDCE6"/>
+          </a:solidFill>
+          <a:ln w="5239">
+            <a:solidFill>
+              <a:srgbClr val="FFFFFF"/>
+            </a:solidFill>
+            <a:prstDash val="solid"/>
+          </a:ln>
+        </p:spPr>
+      </p:sp>
+      <p:sp>
+        <p:nvSpPr>
+          <p:cNvPr id="407" name="path-213">
+            <a:extLst>
+              <a:ext uri="{FF2B5EF4-FFF2-40B4-BE49-F238E27FC236}">
+                <a16:creationId xmlns:a16="http://schemas.microsoft.com/office/drawing/2014/main" id="{153A6681-91CF-405E-A61D-1D55DAA47362}"/>
+              </a:ext>
+            </a:extLst>
+          </p:cNvPr>
+          <p:cNvSpPr>
+            <a:spLocks noGrp="1"/>
+          </p:cNvSpPr>
+          <p:nvPr/>
+        </p:nvSpPr>
+        <p:spPr>
+          <a:xfrm>
+            <a:off x="15738166" y="6150746"/>
+            <a:ext cx="168706" cy="168706"/>
+          </a:xfrm>
+          <a:custGeom>
+            <a:avLst/>
+            <a:gdLst/>
+            <a:ahLst/>
+            <a:cxnLst/>
+            <a:rect l="0" t="0" r="0" b="0"/>
+            <a:pathLst>
+              <a:path w="180975" h="180975">
+                <a:moveTo>
+                  <a:pt x="0" y="0"/>
+                </a:moveTo>
+                <a:lnTo>
+                  <a:pt x="180975" y="0"/>
+                </a:lnTo>
+                <a:lnTo>
+                  <a:pt x="180975" y="180975"/>
+                </a:lnTo>
+                <a:lnTo>
+                  <a:pt x="0" y="180975"/>
+                </a:lnTo>
+                <a:close/>
+              </a:path>
+            </a:pathLst>
+          </a:custGeom>
+          <a:solidFill>
+            <a:srgbClr val="97B5C8"/>
+          </a:solidFill>
+          <a:ln w="5239">
+            <a:solidFill>
+              <a:srgbClr val="FFFFFF"/>
+            </a:solidFill>
+            <a:prstDash val="solid"/>
+          </a:ln>
+        </p:spPr>
+      </p:sp>
+      <p:sp>
+        <p:nvSpPr>
+          <p:cNvPr id="408" name="path-203">
+            <a:extLst>
+              <a:ext uri="{FF2B5EF4-FFF2-40B4-BE49-F238E27FC236}">
+                <a16:creationId xmlns:a16="http://schemas.microsoft.com/office/drawing/2014/main" id="{2AEE2773-D848-4A4A-85D5-4BA7B22A720A}"/>
+              </a:ext>
+            </a:extLst>
+          </p:cNvPr>
+          <p:cNvSpPr>
+            <a:spLocks noGrp="1"/>
+          </p:cNvSpPr>
+          <p:nvPr/>
+        </p:nvSpPr>
+        <p:spPr>
+          <a:xfrm>
+            <a:off x="13607028" y="6348655"/>
+            <a:ext cx="168706" cy="168706"/>
+          </a:xfrm>
+          <a:custGeom>
+            <a:avLst/>
+            <a:gdLst/>
+            <a:ahLst/>
+            <a:cxnLst/>
+            <a:rect l="0" t="0" r="0" b="0"/>
+            <a:pathLst>
+              <a:path w="180975" h="180975">
+                <a:moveTo>
+                  <a:pt x="0" y="0"/>
+                </a:moveTo>
+                <a:lnTo>
+                  <a:pt x="180975" y="0"/>
+                </a:lnTo>
+                <a:lnTo>
+                  <a:pt x="180975" y="180975"/>
+                </a:lnTo>
+                <a:lnTo>
+                  <a:pt x="0" y="180975"/>
+                </a:lnTo>
+                <a:close/>
+              </a:path>
+            </a:pathLst>
+          </a:custGeom>
+          <a:solidFill>
+            <a:srgbClr val="A6BFD0"/>
+          </a:solidFill>
+          <a:ln w="5239">
+            <a:solidFill>
+              <a:srgbClr val="FFFFFF"/>
+            </a:solidFill>
+            <a:prstDash val="solid"/>
+          </a:ln>
+        </p:spPr>
+      </p:sp>
+      <p:sp>
+        <p:nvSpPr>
+          <p:cNvPr id="409" name="path-215">
+            <a:extLst>
+              <a:ext uri="{FF2B5EF4-FFF2-40B4-BE49-F238E27FC236}">
+                <a16:creationId xmlns:a16="http://schemas.microsoft.com/office/drawing/2014/main" id="{C44952E3-E790-410A-ADA1-7C8C5A979E44}"/>
+              </a:ext>
+            </a:extLst>
+          </p:cNvPr>
+          <p:cNvSpPr>
+            <a:spLocks noGrp="1"/>
+          </p:cNvSpPr>
+          <p:nvPr/>
+        </p:nvSpPr>
+        <p:spPr>
+          <a:xfrm>
+            <a:off x="13607028" y="6561757"/>
+            <a:ext cx="168706" cy="168706"/>
+          </a:xfrm>
+          <a:custGeom>
+            <a:avLst/>
+            <a:gdLst/>
+            <a:ahLst/>
+            <a:cxnLst/>
+            <a:rect l="0" t="0" r="0" b="0"/>
+            <a:pathLst>
+              <a:path w="180975" h="180975">
+                <a:moveTo>
+                  <a:pt x="0" y="0"/>
+                </a:moveTo>
+                <a:lnTo>
+                  <a:pt x="180975" y="0"/>
+                </a:lnTo>
+                <a:lnTo>
+                  <a:pt x="180975" y="180975"/>
+                </a:lnTo>
+                <a:lnTo>
+                  <a:pt x="0" y="180975"/>
+                </a:lnTo>
+                <a:close/>
+              </a:path>
+            </a:pathLst>
+          </a:custGeom>
+          <a:solidFill>
+            <a:srgbClr val="6F97B1"/>
+          </a:solidFill>
+          <a:ln w="5239">
+            <a:solidFill>
+              <a:srgbClr val="FFFFFF"/>
+            </a:solidFill>
+            <a:prstDash val="solid"/>
+          </a:ln>
+        </p:spPr>
+      </p:sp>
+      <p:sp>
+        <p:nvSpPr>
+          <p:cNvPr id="410" name="path-227">
+            <a:extLst>
+              <a:ext uri="{FF2B5EF4-FFF2-40B4-BE49-F238E27FC236}">
+                <a16:creationId xmlns:a16="http://schemas.microsoft.com/office/drawing/2014/main" id="{5481C297-3144-4F28-9557-DD68D610BB43}"/>
+              </a:ext>
+            </a:extLst>
+          </p:cNvPr>
+          <p:cNvSpPr>
+            <a:spLocks noGrp="1"/>
+          </p:cNvSpPr>
+          <p:nvPr/>
+        </p:nvSpPr>
+        <p:spPr>
+          <a:xfrm>
+            <a:off x="13607028" y="6774858"/>
+            <a:ext cx="168706" cy="168706"/>
+          </a:xfrm>
+          <a:custGeom>
+            <a:avLst/>
+            <a:gdLst/>
+            <a:ahLst/>
+            <a:cxnLst/>
+            <a:rect l="0" t="0" r="0" b="0"/>
+            <a:pathLst>
+              <a:path w="180975" h="180975">
+                <a:moveTo>
+                  <a:pt x="0" y="0"/>
+                </a:moveTo>
+                <a:lnTo>
+                  <a:pt x="180975" y="0"/>
+                </a:lnTo>
+                <a:lnTo>
+                  <a:pt x="180975" y="180975"/>
+                </a:lnTo>
+                <a:lnTo>
+                  <a:pt x="0" y="180975"/>
+                </a:lnTo>
+                <a:close/>
+              </a:path>
+            </a:pathLst>
+          </a:custGeom>
+          <a:solidFill>
+            <a:srgbClr val="B7CCD9"/>
+          </a:solidFill>
+          <a:ln w="5239">
+            <a:solidFill>
+              <a:srgbClr val="FFFFFF"/>
+            </a:solidFill>
+            <a:prstDash val="solid"/>
+          </a:ln>
+        </p:spPr>
+      </p:sp>
+      <p:sp>
+        <p:nvSpPr>
+          <p:cNvPr id="411" name="path-239">
+            <a:extLst>
+              <a:ext uri="{FF2B5EF4-FFF2-40B4-BE49-F238E27FC236}">
+                <a16:creationId xmlns:a16="http://schemas.microsoft.com/office/drawing/2014/main" id="{4BD41799-D008-47A8-B73F-814AEAA6BEE8}"/>
+              </a:ext>
+            </a:extLst>
+          </p:cNvPr>
+          <p:cNvSpPr>
+            <a:spLocks noGrp="1"/>
+          </p:cNvSpPr>
+          <p:nvPr/>
+        </p:nvSpPr>
+        <p:spPr>
+          <a:xfrm>
+            <a:off x="13607028" y="6987960"/>
+            <a:ext cx="168706" cy="168706"/>
+          </a:xfrm>
+          <a:custGeom>
+            <a:avLst/>
+            <a:gdLst/>
+            <a:ahLst/>
+            <a:cxnLst/>
+            <a:rect l="0" t="0" r="0" b="0"/>
+            <a:pathLst>
+              <a:path w="180975" h="180975">
+                <a:moveTo>
+                  <a:pt x="0" y="0"/>
+                </a:moveTo>
+                <a:lnTo>
+                  <a:pt x="180975" y="0"/>
+                </a:lnTo>
+                <a:lnTo>
+                  <a:pt x="180975" y="180975"/>
+                </a:lnTo>
+                <a:lnTo>
+                  <a:pt x="0" y="180975"/>
+                </a:lnTo>
+                <a:close/>
+              </a:path>
+            </a:pathLst>
+          </a:custGeom>
+          <a:solidFill>
+            <a:srgbClr val="D1E0E8"/>
+          </a:solidFill>
+          <a:ln w="5239">
+            <a:solidFill>
+              <a:srgbClr val="FFFFFF"/>
+            </a:solidFill>
+            <a:prstDash val="solid"/>
+          </a:ln>
+        </p:spPr>
+      </p:sp>
+      <p:sp>
+        <p:nvSpPr>
+          <p:cNvPr id="412" name="path-251">
+            <a:extLst>
+              <a:ext uri="{FF2B5EF4-FFF2-40B4-BE49-F238E27FC236}">
+                <a16:creationId xmlns:a16="http://schemas.microsoft.com/office/drawing/2014/main" id="{BC813136-F8C4-4ACD-A89E-2CB9D8F01DE1}"/>
+              </a:ext>
+            </a:extLst>
+          </p:cNvPr>
+          <p:cNvSpPr>
+            <a:spLocks noGrp="1"/>
+          </p:cNvSpPr>
+          <p:nvPr/>
+        </p:nvSpPr>
+        <p:spPr>
+          <a:xfrm>
+            <a:off x="13607028" y="7201062"/>
+            <a:ext cx="168706" cy="168706"/>
+          </a:xfrm>
+          <a:custGeom>
+            <a:avLst/>
+            <a:gdLst/>
+            <a:ahLst/>
+            <a:cxnLst/>
+            <a:rect l="0" t="0" r="0" b="0"/>
+            <a:pathLst>
+              <a:path w="180975" h="180975">
+                <a:moveTo>
+                  <a:pt x="0" y="0"/>
+                </a:moveTo>
+                <a:lnTo>
+                  <a:pt x="180975" y="0"/>
+                </a:lnTo>
+                <a:lnTo>
+                  <a:pt x="180975" y="180975"/>
+                </a:lnTo>
+                <a:lnTo>
+                  <a:pt x="0" y="180975"/>
+                </a:lnTo>
+                <a:close/>
+              </a:path>
+            </a:pathLst>
+          </a:custGeom>
+          <a:solidFill>
+            <a:srgbClr val="B7CCD9"/>
+          </a:solidFill>
+          <a:ln w="5239">
+            <a:solidFill>
+              <a:srgbClr val="FFFFFF"/>
+            </a:solidFill>
+            <a:prstDash val="solid"/>
+          </a:ln>
+        </p:spPr>
+      </p:sp>
+      <p:sp>
+        <p:nvSpPr>
+          <p:cNvPr id="413" name="path-263">
+            <a:extLst>
+              <a:ext uri="{FF2B5EF4-FFF2-40B4-BE49-F238E27FC236}">
+                <a16:creationId xmlns:a16="http://schemas.microsoft.com/office/drawing/2014/main" id="{B2826995-8EC9-484D-8689-12F8F9CBB078}"/>
+              </a:ext>
+            </a:extLst>
+          </p:cNvPr>
+          <p:cNvSpPr>
+            <a:spLocks noGrp="1"/>
+          </p:cNvSpPr>
+          <p:nvPr/>
+        </p:nvSpPr>
+        <p:spPr>
+          <a:xfrm>
+            <a:off x="13607028" y="7414163"/>
+            <a:ext cx="168706" cy="168706"/>
+          </a:xfrm>
+          <a:custGeom>
+            <a:avLst/>
+            <a:gdLst/>
+            <a:ahLst/>
+            <a:cxnLst/>
+            <a:rect l="0" t="0" r="0" b="0"/>
+            <a:pathLst>
+              <a:path w="180975" h="180975">
+                <a:moveTo>
+                  <a:pt x="0" y="0"/>
+                </a:moveTo>
+                <a:lnTo>
+                  <a:pt x="180975" y="0"/>
+                </a:lnTo>
+                <a:lnTo>
+                  <a:pt x="180975" y="180975"/>
+                </a:lnTo>
+                <a:lnTo>
+                  <a:pt x="0" y="180975"/>
+                </a:lnTo>
+                <a:close/>
+              </a:path>
+            </a:pathLst>
+          </a:custGeom>
+          <a:solidFill>
+            <a:srgbClr val="366D91"/>
+          </a:solidFill>
+          <a:ln w="5239">
+            <a:solidFill>
+              <a:srgbClr val="FFFFFF"/>
+            </a:solidFill>
+            <a:prstDash val="solid"/>
+          </a:ln>
+        </p:spPr>
+      </p:sp>
+      <p:sp>
+        <p:nvSpPr>
+          <p:cNvPr id="414" name="path-275">
+            <a:extLst>
+              <a:ext uri="{FF2B5EF4-FFF2-40B4-BE49-F238E27FC236}">
+                <a16:creationId xmlns:a16="http://schemas.microsoft.com/office/drawing/2014/main" id="{26E7F265-E085-46AF-BF8C-516C1A2D9284}"/>
+              </a:ext>
+            </a:extLst>
+          </p:cNvPr>
+          <p:cNvSpPr>
+            <a:spLocks noGrp="1"/>
+          </p:cNvSpPr>
+          <p:nvPr/>
+        </p:nvSpPr>
+        <p:spPr>
+          <a:xfrm>
+            <a:off x="13607028" y="7627265"/>
+            <a:ext cx="168706" cy="168706"/>
+          </a:xfrm>
+          <a:custGeom>
+            <a:avLst/>
+            <a:gdLst/>
+            <a:ahLst/>
+            <a:cxnLst/>
+            <a:rect l="0" t="0" r="0" b="0"/>
+            <a:pathLst>
+              <a:path w="180975" h="180975">
+                <a:moveTo>
+                  <a:pt x="0" y="0"/>
+                </a:moveTo>
+                <a:lnTo>
+                  <a:pt x="180975" y="0"/>
+                </a:lnTo>
+                <a:lnTo>
+                  <a:pt x="180975" y="180975"/>
+                </a:lnTo>
+                <a:lnTo>
+                  <a:pt x="0" y="180975"/>
+                </a:lnTo>
+                <a:close/>
+              </a:path>
+            </a:pathLst>
+          </a:custGeom>
+          <a:solidFill>
+            <a:srgbClr val="4F809F"/>
+          </a:solidFill>
+          <a:ln w="5239">
+            <a:solidFill>
+              <a:srgbClr val="FFFFFF"/>
+            </a:solidFill>
+            <a:prstDash val="solid"/>
+          </a:ln>
+        </p:spPr>
+      </p:sp>
+      <p:sp>
+        <p:nvSpPr>
+          <p:cNvPr id="415" name="path-287">
+            <a:extLst>
+              <a:ext uri="{FF2B5EF4-FFF2-40B4-BE49-F238E27FC236}">
+                <a16:creationId xmlns:a16="http://schemas.microsoft.com/office/drawing/2014/main" id="{D87A1509-2776-48C6-887F-47EFC37D3374}"/>
+              </a:ext>
+            </a:extLst>
+          </p:cNvPr>
+          <p:cNvSpPr>
+            <a:spLocks noGrp="1"/>
+          </p:cNvSpPr>
+          <p:nvPr/>
+        </p:nvSpPr>
+        <p:spPr>
+          <a:xfrm>
+            <a:off x="13607028" y="7840367"/>
+            <a:ext cx="168706" cy="168706"/>
+          </a:xfrm>
+          <a:custGeom>
+            <a:avLst/>
+            <a:gdLst/>
+            <a:ahLst/>
+            <a:cxnLst/>
+            <a:rect l="0" t="0" r="0" b="0"/>
+            <a:pathLst>
+              <a:path w="180975" h="180975">
+                <a:moveTo>
+                  <a:pt x="0" y="0"/>
+                </a:moveTo>
+                <a:lnTo>
+                  <a:pt x="180975" y="0"/>
+                </a:lnTo>
+                <a:lnTo>
+                  <a:pt x="180975" y="180975"/>
+                </a:lnTo>
+                <a:lnTo>
+                  <a:pt x="0" y="180975"/>
+                </a:lnTo>
+                <a:close/>
+              </a:path>
+            </a:pathLst>
+          </a:custGeom>
+          <a:solidFill>
+            <a:srgbClr val="D1E0E8"/>
+          </a:solidFill>
+          <a:ln w="5239">
+            <a:solidFill>
+              <a:srgbClr val="FFFFFF"/>
+            </a:solidFill>
+            <a:prstDash val="solid"/>
+          </a:ln>
+        </p:spPr>
+      </p:sp>
+      <p:sp>
+        <p:nvSpPr>
+          <p:cNvPr id="416" name="visual-298">
+            <a:extLst>
+              <a:ext uri="{FF2B5EF4-FFF2-40B4-BE49-F238E27FC236}">
+                <a16:creationId xmlns:a16="http://schemas.microsoft.com/office/drawing/2014/main" id="{F03E6693-3248-4C79-9EEF-1D3D9FF91DED}"/>
+              </a:ext>
+            </a:extLst>
+          </p:cNvPr>
+          <p:cNvSpPr>
+            <a:spLocks noGrp="1"/>
+          </p:cNvSpPr>
+          <p:nvPr/>
+        </p:nvSpPr>
+        <p:spPr>
+          <a:xfrm>
+            <a:off x="13589269" y="6126674"/>
+            <a:ext cx="205312" cy="1900157"/>
+          </a:xfrm>
+          <a:prstGeom prst="rect">
+            <a:avLst/>
+          </a:prstGeom>
+          <a:noFill/>
+          <a:ln w="13335">
+            <a:solidFill>
+              <a:srgbClr val="2C7A86"/>
+            </a:solidFill>
+            <a:prstDash val="solid"/>
+          </a:ln>
+        </p:spPr>
+      </p:sp>
+      <p:sp>
+        <p:nvSpPr>
+          <p:cNvPr id="417" name="path-203">
+            <a:extLst>
+              <a:ext uri="{FF2B5EF4-FFF2-40B4-BE49-F238E27FC236}">
+                <a16:creationId xmlns:a16="http://schemas.microsoft.com/office/drawing/2014/main" id="{913AF151-10E3-4616-B59F-70BB3831E1AC}"/>
+              </a:ext>
+            </a:extLst>
+          </p:cNvPr>
+          <p:cNvSpPr>
+            <a:spLocks noGrp="1"/>
+          </p:cNvSpPr>
+          <p:nvPr/>
+        </p:nvSpPr>
+        <p:spPr>
+          <a:xfrm>
+            <a:off x="13607149" y="6150746"/>
+            <a:ext cx="168706" cy="168706"/>
+          </a:xfrm>
+          <a:custGeom>
+            <a:avLst/>
+            <a:gdLst/>
+            <a:ahLst/>
+            <a:cxnLst/>
+            <a:rect l="0" t="0" r="0" b="0"/>
+            <a:pathLst>
+              <a:path w="180975" h="180975">
+                <a:moveTo>
+                  <a:pt x="0" y="0"/>
+                </a:moveTo>
+                <a:lnTo>
+                  <a:pt x="180975" y="0"/>
+                </a:lnTo>
+                <a:lnTo>
+                  <a:pt x="180975" y="180975"/>
+                </a:lnTo>
+                <a:lnTo>
+                  <a:pt x="0" y="180975"/>
+                </a:lnTo>
+                <a:close/>
+              </a:path>
+            </a:pathLst>
+          </a:custGeom>
+          <a:solidFill>
+            <a:srgbClr val="D1E0E8"/>
+          </a:solidFill>
+          <a:ln w="5239">
+            <a:solidFill>
+              <a:srgbClr val="FFFFFF"/>
+            </a:solidFill>
+            <a:prstDash val="solid"/>
           </a:ln>
         </p:spPr>
       </p:sp>

--- a/plotting/流程图/final.pptx
+++ b/plotting/流程图/final.pptx
@@ -8,7 +8,7 @@
     <p:notesMasterId r:id="rId3"/>
   </p:notesMasterIdLst>
   <p:sldIdLst>
-    <p:sldId id="259" r:id="rId2"/>
+    <p:sldId id="265" r:id="rId2"/>
   </p:sldIdLst>
   <p:sldSz cx="17145000" cy="10477500"/>
   <p:notesSz cx="6858000" cy="9144000"/>
@@ -763,7 +763,7 @@
               </a:defRPr>
             </a:pPr>
             <a:r>
-              <a:rPr sz="2657" b="1">
+              <a:rPr sz="2657" b="1" dirty="0">
                 <a:solidFill>
                   <a:srgbClr val="246A96"/>
                 </a:solidFill>
@@ -771,7 +771,7 @@
                 <a:ea typeface="Times New Roman"/>
                 <a:cs typeface="Times New Roman"/>
               </a:rPr>
-              <a:t>A   From symbols to RF</a:t>
+              <a:t>From symbols to RF</a:t>
             </a:r>
           </a:p>
         </p:txBody>
@@ -792,7 +792,7 @@
         </p:nvSpPr>
         <p:spPr>
           <a:xfrm>
-            <a:off x="8039746" y="213102"/>
+            <a:off x="8483708" y="213102"/>
             <a:ext cx="3773676" cy="443962"/>
           </a:xfrm>
           <a:prstGeom prst="rect">
@@ -810,7 +810,7 @@
           </a:bodyPr>
           <a:lstStyle/>
           <a:p>
-            <a:pPr algn="l">
+            <a:pPr>
               <a:defRPr sz="2625" b="1">
                 <a:solidFill>
                   <a:srgbClr val="246A96"/>
@@ -821,7 +821,7 @@
               </a:defRPr>
             </a:pPr>
             <a:r>
-              <a:rPr sz="2447" b="1">
+              <a:rPr sz="2447" b="1" dirty="0">
                 <a:solidFill>
                   <a:srgbClr val="246A96"/>
                 </a:solidFill>
@@ -829,57 +829,10 @@
                 <a:ea typeface="Times New Roman"/>
                 <a:cs typeface="Times New Roman"/>
               </a:rPr>
-              <a:t>B   Far-field propagation</a:t>
+              <a:t>Far-field propagation</a:t>
             </a:r>
-          </a:p>
-        </p:txBody>
-      </p:sp>
-      <p:sp>
-        <p:nvSpPr>
-          <p:cNvPr id="3" name="visual-3">
-            <a:extLst>
-              <a:ext uri="{FF2B5EF4-FFF2-40B4-BE49-F238E27FC236}">
-                <a16:creationId xmlns:a16="http://schemas.microsoft.com/office/drawing/2014/main" id="{38117F04-9B3F-4228-979E-5F1552F95CDA}"/>
-              </a:ext>
-            </a:extLst>
-          </p:cNvPr>
-          <p:cNvSpPr>
-            <a:spLocks noGrp="1"/>
-          </p:cNvSpPr>
-          <p:nvPr/>
-        </p:nvSpPr>
-        <p:spPr>
-          <a:xfrm>
-            <a:off x="11884456" y="213102"/>
-            <a:ext cx="4288672" cy="443962"/>
-          </a:xfrm>
-          <a:prstGeom prst="rect">
-            <a:avLst/>
-          </a:prstGeom>
-          <a:noFill/>
-          <a:ln w="0">
-            <a:noFill/>
-            <a:prstDash val="solid"/>
-          </a:ln>
-        </p:spPr>
-        <p:txBody>
-          <a:bodyPr wrap="none" lIns="0" tIns="0" rIns="0" bIns="0" anchor="ctr">
-            <a:noAutofit/>
-          </a:bodyPr>
-          <a:lstStyle/>
-          <a:p>
-            <a:pPr algn="l">
-              <a:defRPr sz="2625" b="1">
-                <a:solidFill>
-                  <a:srgbClr val="246A96"/>
-                </a:solidFill>
-                <a:latin typeface="Times New Roman"/>
-                <a:ea typeface="Times New Roman"/>
-                <a:cs typeface="Times New Roman"/>
-              </a:defRPr>
-            </a:pPr>
             <a:r>
-              <a:rPr sz="2447" b="1">
+              <a:rPr lang="en-US" altLang="zh-CN" sz="2447" b="1" dirty="0">
                 <a:solidFill>
                   <a:srgbClr val="246A96"/>
                 </a:solidFill>
@@ -887,7 +840,7 @@
                 <a:ea typeface="Times New Roman"/>
                 <a:cs typeface="Times New Roman"/>
               </a:rPr>
-              <a:t>C   Holographic reception</a:t>
+              <a:t> and  Holographic reception</a:t>
             </a:r>
           </a:p>
         </p:txBody>
@@ -9113,64 +9066,6 @@
       </p:sp>
       <p:sp>
         <p:nvSpPr>
-          <p:cNvPr id="59" name="visual-59">
-            <a:extLst>
-              <a:ext uri="{FF2B5EF4-FFF2-40B4-BE49-F238E27FC236}">
-                <a16:creationId xmlns:a16="http://schemas.microsoft.com/office/drawing/2014/main" id="{208FD410-88C5-465A-8362-3525A3A5209D}"/>
-              </a:ext>
-            </a:extLst>
-          </p:cNvPr>
-          <p:cNvSpPr>
-            <a:spLocks noGrp="1"/>
-          </p:cNvSpPr>
-          <p:nvPr/>
-        </p:nvSpPr>
-        <p:spPr>
-          <a:xfrm>
-            <a:off x="8235089" y="2992304"/>
-            <a:ext cx="1544987" cy="275256"/>
-          </a:xfrm>
-          <a:prstGeom prst="rect">
-            <a:avLst/>
-          </a:prstGeom>
-          <a:noFill/>
-          <a:ln w="0">
-            <a:noFill/>
-            <a:prstDash val="solid"/>
-          </a:ln>
-        </p:spPr>
-        <p:txBody>
-          <a:bodyPr wrap="none" lIns="0" tIns="0" rIns="0" bIns="0" anchor="ctr">
-            <a:noAutofit/>
-          </a:bodyPr>
-          <a:lstStyle/>
-          <a:p>
-            <a:pPr algn="l">
-              <a:defRPr sz="1950">
-                <a:solidFill>
-                  <a:srgbClr val="2C7A86"/>
-                </a:solidFill>
-                <a:latin typeface="Times New Roman"/>
-                <a:ea typeface="Times New Roman"/>
-                <a:cs typeface="Times New Roman"/>
-              </a:defRPr>
-            </a:pPr>
-            <a:r>
-              <a:rPr sz="1818">
-                <a:solidFill>
-                  <a:srgbClr val="2C7A86"/>
-                </a:solidFill>
-                <a:latin typeface="Times New Roman"/>
-                <a:ea typeface="Times New Roman"/>
-                <a:cs typeface="Times New Roman"/>
-              </a:rPr>
-              <a:t>Other users</a:t>
-            </a:r>
-          </a:p>
-        </p:txBody>
-      </p:sp>
-      <p:sp>
-        <p:nvSpPr>
           <p:cNvPr id="60" name="visual-60">
             <a:extLst>
               <a:ext uri="{FF2B5EF4-FFF2-40B4-BE49-F238E27FC236}">
@@ -9772,7 +9667,7 @@
               </a:defRPr>
             </a:pPr>
             <a:r>
-              <a:rPr sz="1958">
+              <a:rPr sz="1958" dirty="0">
                 <a:solidFill>
                   <a:srgbClr val="566574"/>
                 </a:solidFill>
@@ -12591,100 +12486,6 @@
             </a:r>
           </a:p>
         </p:txBody>
-      </p:sp>
-      <p:sp>
-        <p:nvSpPr>
-          <p:cNvPr id="129" name="path-128">
-            <a:extLst>
-              <a:ext uri="{FF2B5EF4-FFF2-40B4-BE49-F238E27FC236}">
-                <a16:creationId xmlns:a16="http://schemas.microsoft.com/office/drawing/2014/main" id="{1A7CDA50-5AC9-4B67-8340-BE9795A9B8CA}"/>
-              </a:ext>
-            </a:extLst>
-          </p:cNvPr>
-          <p:cNvSpPr>
-            <a:spLocks noGrp="1"/>
-          </p:cNvSpPr>
-          <p:nvPr/>
-        </p:nvSpPr>
-        <p:spPr>
-          <a:xfrm>
-            <a:off x="15578219" y="2184293"/>
-            <a:ext cx="385359" cy="888"/>
-          </a:xfrm>
-          <a:custGeom>
-            <a:avLst/>
-            <a:gdLst/>
-            <a:ahLst/>
-            <a:cxnLst/>
-            <a:rect l="0" t="0" r="0" b="0"/>
-            <a:pathLst>
-              <a:path w="413385" h="953">
-                <a:moveTo>
-                  <a:pt x="0" y="0"/>
-                </a:moveTo>
-                <a:lnTo>
-                  <a:pt x="413385" y="0"/>
-                </a:lnTo>
-              </a:path>
-            </a:pathLst>
-          </a:custGeom>
-          <a:noFill/>
-          <a:ln w="24765">
-            <a:solidFill>
-              <a:srgbClr val="246A96"/>
-            </a:solidFill>
-            <a:prstDash val="solid"/>
-          </a:ln>
-        </p:spPr>
-      </p:sp>
-      <p:sp>
-        <p:nvSpPr>
-          <p:cNvPr id="130" name="path-129">
-            <a:extLst>
-              <a:ext uri="{FF2B5EF4-FFF2-40B4-BE49-F238E27FC236}">
-                <a16:creationId xmlns:a16="http://schemas.microsoft.com/office/drawing/2014/main" id="{1D91A49A-6F62-4502-882D-F0470AC18778}"/>
-              </a:ext>
-            </a:extLst>
-          </p:cNvPr>
-          <p:cNvSpPr>
-            <a:spLocks noGrp="1"/>
-          </p:cNvSpPr>
-          <p:nvPr/>
-        </p:nvSpPr>
-        <p:spPr>
-          <a:xfrm>
-            <a:off x="15942267" y="2141672"/>
-            <a:ext cx="106551" cy="85241"/>
-          </a:xfrm>
-          <a:custGeom>
-            <a:avLst/>
-            <a:gdLst/>
-            <a:ahLst/>
-            <a:cxnLst/>
-            <a:rect l="0" t="0" r="0" b="0"/>
-            <a:pathLst>
-              <a:path w="114300" h="91440">
-                <a:moveTo>
-                  <a:pt x="114300" y="45720"/>
-                </a:moveTo>
-                <a:lnTo>
-                  <a:pt x="0" y="91440"/>
-                </a:lnTo>
-                <a:lnTo>
-                  <a:pt x="0" y="0"/>
-                </a:lnTo>
-                <a:close/>
-              </a:path>
-            </a:pathLst>
-          </a:custGeom>
-          <a:solidFill>
-            <a:srgbClr val="246A96"/>
-          </a:solidFill>
-          <a:ln w="0">
-            <a:noFill/>
-            <a:prstDash val="solid"/>
-          </a:ln>
-        </p:spPr>
       </p:sp>
       <p:sp>
         <p:nvSpPr>
@@ -13889,8 +13690,8 @@
         </p:nvSpPr>
         <p:spPr>
           <a:xfrm>
-            <a:off x="16048818" y="2184293"/>
-            <a:ext cx="168706" cy="888"/>
+            <a:off x="16048817" y="2184292"/>
+            <a:ext cx="382252" cy="53714"/>
           </a:xfrm>
           <a:custGeom>
             <a:avLst/>
@@ -13934,7 +13735,7 @@
         </p:nvSpPr>
         <p:spPr>
           <a:xfrm>
-            <a:off x="16217524" y="2184292"/>
+            <a:off x="16432845" y="2190761"/>
             <a:ext cx="888" cy="2610496"/>
           </a:xfrm>
           <a:custGeom>
@@ -13979,8 +13780,8 @@
         </p:nvSpPr>
         <p:spPr>
           <a:xfrm flipV="1">
-            <a:off x="8057505" y="4726419"/>
-            <a:ext cx="8160019" cy="67095"/>
+            <a:off x="8057505" y="4716690"/>
+            <a:ext cx="8373564" cy="87904"/>
           </a:xfrm>
           <a:custGeom>
             <a:avLst/>
@@ -14710,8 +14511,8 @@
         </p:nvSpPr>
         <p:spPr>
           <a:xfrm>
-            <a:off x="2516859" y="7644589"/>
-            <a:ext cx="9633974" cy="45719"/>
+            <a:off x="2502651" y="7667941"/>
+            <a:ext cx="9452839" cy="45719"/>
           </a:xfrm>
           <a:custGeom>
             <a:avLst/>
@@ -14741,6 +14542,51 @@
       </p:sp>
       <p:sp>
         <p:nvSpPr>
+          <p:cNvPr id="171" name="path-168">
+            <a:extLst>
+              <a:ext uri="{FF2B5EF4-FFF2-40B4-BE49-F238E27FC236}">
+                <a16:creationId xmlns:a16="http://schemas.microsoft.com/office/drawing/2014/main" id="{C6992C50-3C71-4AC3-83F4-2D86040D3176}"/>
+              </a:ext>
+            </a:extLst>
+          </p:cNvPr>
+          <p:cNvSpPr>
+            <a:spLocks noGrp="1"/>
+          </p:cNvSpPr>
+          <p:nvPr/>
+        </p:nvSpPr>
+        <p:spPr>
+          <a:xfrm>
+            <a:off x="11946610" y="7662782"/>
+            <a:ext cx="229084" cy="888"/>
+          </a:xfrm>
+          <a:custGeom>
+            <a:avLst/>
+            <a:gdLst/>
+            <a:ahLst/>
+            <a:cxnLst/>
+            <a:rect l="0" t="0" r="0" b="0"/>
+            <a:pathLst>
+              <a:path w="245745" h="953">
+                <a:moveTo>
+                  <a:pt x="0" y="0"/>
+                </a:moveTo>
+                <a:lnTo>
+                  <a:pt x="245745" y="0"/>
+                </a:lnTo>
+              </a:path>
+            </a:pathLst>
+          </a:custGeom>
+          <a:noFill/>
+          <a:ln w="14288">
+            <a:solidFill>
+              <a:srgbClr val="203344"/>
+            </a:solidFill>
+            <a:prstDash val="solid"/>
+          </a:ln>
+        </p:spPr>
+      </p:sp>
+      <p:sp>
+        <p:nvSpPr>
           <p:cNvPr id="172" name="path-169">
             <a:extLst>
               <a:ext uri="{FF2B5EF4-FFF2-40B4-BE49-F238E27FC236}">
@@ -14755,7 +14601,7 @@
         </p:nvSpPr>
         <p:spPr>
           <a:xfrm>
-            <a:off x="12144892" y="7618542"/>
+            <a:off x="12174867" y="7630816"/>
             <a:ext cx="79913" cy="63931"/>
           </a:xfrm>
           <a:custGeom>
@@ -27235,10 +27081,116 @@
           </a:ln>
         </p:spPr>
       </p:sp>
+      <p:sp>
+        <p:nvSpPr>
+          <p:cNvPr id="142" name="矩形 141">
+            <a:extLst>
+              <a:ext uri="{FF2B5EF4-FFF2-40B4-BE49-F238E27FC236}">
+                <a16:creationId xmlns:a16="http://schemas.microsoft.com/office/drawing/2014/main" id="{36517AA0-BB1B-426F-9752-D1D83465285A}"/>
+              </a:ext>
+            </a:extLst>
+          </p:cNvPr>
+          <p:cNvSpPr/>
+          <p:nvPr/>
+        </p:nvSpPr>
+        <p:spPr>
+          <a:xfrm>
+            <a:off x="875489" y="825768"/>
+            <a:ext cx="6807944" cy="3684499"/>
+          </a:xfrm>
+          <a:prstGeom prst="rect">
+            <a:avLst/>
+          </a:prstGeom>
+          <a:noFill/>
+          <a:ln>
+            <a:solidFill>
+              <a:srgbClr val="156082"/>
+            </a:solidFill>
+            <a:prstDash val="dash"/>
+          </a:ln>
+        </p:spPr>
+        <p:style>
+          <a:lnRef idx="2">
+            <a:schemeClr val="accent1">
+              <a:shade val="50000"/>
+            </a:schemeClr>
+          </a:lnRef>
+          <a:fillRef idx="1">
+            <a:schemeClr val="accent1"/>
+          </a:fillRef>
+          <a:effectRef idx="0">
+            <a:schemeClr val="accent1"/>
+          </a:effectRef>
+          <a:fontRef idx="minor">
+            <a:schemeClr val="lt1"/>
+          </a:fontRef>
+        </p:style>
+        <p:txBody>
+          <a:bodyPr rtlCol="0" anchor="ctr"/>
+          <a:lstStyle/>
+          <a:p>
+            <a:pPr algn="ctr"/>
+            <a:endParaRPr lang="zh-CN" altLang="en-US"/>
+          </a:p>
+        </p:txBody>
+      </p:sp>
+      <p:sp>
+        <p:nvSpPr>
+          <p:cNvPr id="419" name="矩形 418">
+            <a:extLst>
+              <a:ext uri="{FF2B5EF4-FFF2-40B4-BE49-F238E27FC236}">
+                <a16:creationId xmlns:a16="http://schemas.microsoft.com/office/drawing/2014/main" id="{7BB264D0-BC60-4242-8FA1-78F01AF57B01}"/>
+              </a:ext>
+            </a:extLst>
+          </p:cNvPr>
+          <p:cNvSpPr/>
+          <p:nvPr/>
+        </p:nvSpPr>
+        <p:spPr>
+          <a:xfrm>
+            <a:off x="8337847" y="825768"/>
+            <a:ext cx="7709194" cy="3684499"/>
+          </a:xfrm>
+          <a:prstGeom prst="rect">
+            <a:avLst/>
+          </a:prstGeom>
+          <a:noFill/>
+          <a:ln>
+            <a:solidFill>
+              <a:srgbClr val="156082"/>
+            </a:solidFill>
+            <a:prstDash val="dash"/>
+          </a:ln>
+        </p:spPr>
+        <p:style>
+          <a:lnRef idx="2">
+            <a:schemeClr val="accent1">
+              <a:shade val="50000"/>
+            </a:schemeClr>
+          </a:lnRef>
+          <a:fillRef idx="1">
+            <a:schemeClr val="accent1"/>
+          </a:fillRef>
+          <a:effectRef idx="0">
+            <a:schemeClr val="accent1"/>
+          </a:effectRef>
+          <a:fontRef idx="minor">
+            <a:schemeClr val="lt1"/>
+          </a:fontRef>
+        </p:style>
+        <p:txBody>
+          <a:bodyPr rtlCol="0" anchor="ctr"/>
+          <a:lstStyle/>
+          <a:p>
+            <a:pPr algn="ctr"/>
+            <a:endParaRPr lang="zh-CN" altLang="en-US"/>
+          </a:p>
+        </p:txBody>
+      </p:sp>
     </p:spTree>
     <p:extLst>
       <p:ext uri="{BB962C8B-B14F-4D97-AF65-F5344CB8AC3E}">
-        <p14:creationId xmlns:p14="http://schemas.microsoft.com/office/powerpoint/2010/main" val="352971893"/>
+        <p14:creationId xmlns:p14="http://schemas.microsoft.com/office/powerpoint/2010/main" val="3486368323"/>
       </p:ext>
     </p:extLst>
   </p:cSld>

--- a/plotting/流程图/final.pptx
+++ b/plotting/流程图/final.pptx
@@ -21287,7 +21287,7 @@
                 <a:latin typeface="Times New Roman"/>
                 <a:cs typeface="Times New Roman"/>
               </a:rPr>
-              <a:t> 4</a:t>
+              <a:t> 5</a:t>
             </a:r>
             <a:endParaRPr lang="zh-CN" altLang="en-US" sz="1600" dirty="0">
               <a:solidFill>
@@ -21481,7 +21481,7 @@
                 <a:latin typeface="Times New Roman"/>
                 <a:cs typeface="Times New Roman"/>
               </a:rPr>
-              <a:t> 5</a:t>
+              <a:t> 4</a:t>
             </a:r>
             <a:endParaRPr lang="zh-CN" altLang="en-US" sz="1600" dirty="0">
               <a:solidFill>
